--- a/pictures/make-pictures.pptx
+++ b/pictures/make-pictures.pptx
@@ -5,15 +5,16 @@
     <p:sldMasterId id="2147483648" r:id="rId1"/>
   </p:sldMasterIdLst>
   <p:notesMasterIdLst>
-    <p:notesMasterId r:id="rId6"/>
+    <p:notesMasterId r:id="rId7"/>
   </p:notesMasterIdLst>
   <p:handoutMasterIdLst>
-    <p:handoutMasterId r:id="rId7"/>
+    <p:handoutMasterId r:id="rId8"/>
   </p:handoutMasterIdLst>
   <p:sldIdLst>
     <p:sldId id="256" r:id="rId3"/>
     <p:sldId id="257" r:id="rId4"/>
     <p:sldId id="258" r:id="rId5"/>
+    <p:sldId id="259" r:id="rId6"/>
   </p:sldIdLst>
   <p:sldSz cx="12192000" cy="6858000"/>
   <p:notesSz cx="7103745" cy="10234295"/>
@@ -10630,7 +10631,7 @@
         </p:nvGraphicFramePr>
         <p:xfrm>
           <a:off x="2216150" y="1626870"/>
-          <a:ext cx="4972050" cy="3304540"/>
+          <a:ext cx="4972050" cy="3304630"/>
         </p:xfrm>
         <a:graphic>
           <a:graphicData uri="http://schemas.openxmlformats.org/drawingml/2006/table">
@@ -14425,6 +14426,90 @@
           </p:sp>
         </mc:Fallback>
       </mc:AlternateContent>
+    </p:spTree>
+  </p:cSld>
+  <p:clrMapOvr>
+    <a:masterClrMapping/>
+  </p:clrMapOvr>
+</p:sld>
+</file>
+
+<file path=ppt/slides/slide4.xml><?xml version="1.0" encoding="utf-8"?>
+<p:sld xmlns:a="http://schemas.openxmlformats.org/drawingml/2006/main" xmlns:r="http://schemas.openxmlformats.org/officeDocument/2006/relationships" xmlns:p="http://schemas.openxmlformats.org/presentationml/2006/main">
+  <p:cSld>
+    <p:spTree>
+      <p:nvGrpSpPr>
+        <p:cNvPr id="1" name=""/>
+        <p:cNvGrpSpPr/>
+        <p:nvPr/>
+      </p:nvGrpSpPr>
+      <p:grpSpPr/>
+      <p:grpSp>
+        <p:nvGrpSpPr>
+          <p:cNvPr id="6" name="组合 5"/>
+          <p:cNvGrpSpPr/>
+          <p:nvPr/>
+        </p:nvGrpSpPr>
+        <p:grpSpPr>
+          <a:xfrm>
+            <a:off x="963930" y="767080"/>
+            <a:ext cx="9903460" cy="4582160"/>
+            <a:chOff x="1518" y="1208"/>
+            <a:chExt cx="15596" cy="7216"/>
+          </a:xfrm>
+          <a:noFill/>
+        </p:grpSpPr>
+        <p:pic>
+          <p:nvPicPr>
+            <p:cNvPr id="4" name="图片 3"/>
+            <p:cNvPicPr>
+              <a:picLocks noChangeAspect="1"/>
+            </p:cNvPicPr>
+            <p:nvPr/>
+          </p:nvPicPr>
+          <p:blipFill>
+            <a:blip r:embed="rId1"/>
+            <a:stretch>
+              <a:fillRect/>
+            </a:stretch>
+          </p:blipFill>
+          <p:spPr>
+            <a:xfrm>
+              <a:off x="1518" y="1208"/>
+              <a:ext cx="10884" cy="7216"/>
+            </a:xfrm>
+            <a:prstGeom prst="rect">
+              <a:avLst/>
+            </a:prstGeom>
+            <a:grpFill/>
+          </p:spPr>
+        </p:pic>
+        <p:pic>
+          <p:nvPicPr>
+            <p:cNvPr id="5" name="图片 4"/>
+            <p:cNvPicPr>
+              <a:picLocks noChangeAspect="1"/>
+            </p:cNvPicPr>
+            <p:nvPr/>
+          </p:nvPicPr>
+          <p:blipFill>
+            <a:blip r:embed="rId2"/>
+            <a:stretch>
+              <a:fillRect/>
+            </a:stretch>
+          </p:blipFill>
+          <p:spPr>
+            <a:xfrm>
+              <a:off x="12802" y="2076"/>
+              <a:ext cx="4313" cy="5480"/>
+            </a:xfrm>
+            <a:prstGeom prst="rect">
+              <a:avLst/>
+            </a:prstGeom>
+            <a:grpFill/>
+          </p:spPr>
+        </p:pic>
+      </p:grpSp>
     </p:spTree>
   </p:cSld>
   <p:clrMapOvr>

--- a/pictures/make-pictures.pptx
+++ b/pictures/make-pictures.pptx
@@ -5,16 +5,20 @@
     <p:sldMasterId id="2147483648" r:id="rId1"/>
   </p:sldMasterIdLst>
   <p:notesMasterIdLst>
-    <p:notesMasterId r:id="rId7"/>
+    <p:notesMasterId r:id="rId11"/>
   </p:notesMasterIdLst>
   <p:handoutMasterIdLst>
-    <p:handoutMasterId r:id="rId8"/>
+    <p:handoutMasterId r:id="rId12"/>
   </p:handoutMasterIdLst>
   <p:sldIdLst>
     <p:sldId id="256" r:id="rId3"/>
     <p:sldId id="257" r:id="rId4"/>
     <p:sldId id="258" r:id="rId5"/>
     <p:sldId id="259" r:id="rId6"/>
+    <p:sldId id="260" r:id="rId7"/>
+    <p:sldId id="261" r:id="rId8"/>
+    <p:sldId id="262" r:id="rId9"/>
+    <p:sldId id="263" r:id="rId10"/>
   </p:sldIdLst>
   <p:sldSz cx="12192000" cy="6858000"/>
   <p:notesSz cx="7103745" cy="10234295"/>
@@ -116,12 +120,12 @@
   <p:extLst>
     <p:ext uri="{EFAFB233-063F-42B5-8137-9DF3F51BA10A}">
       <p15:sldGuideLst xmlns:p15="http://schemas.microsoft.com/office/powerpoint/2012/main">
-        <p15:guide id="1" orient="horz" pos="2174" userDrawn="1">
+        <p15:guide id="1" orient="horz" pos="2050" userDrawn="1">
           <p15:clr>
             <a:srgbClr val="A4A3A4"/>
           </p15:clr>
         </p15:guide>
-        <p15:guide id="2" pos="3774" userDrawn="1">
+        <p15:guide id="2" pos="3703" userDrawn="1">
           <p15:clr>
             <a:srgbClr val="A4A3A4"/>
           </p15:clr>
@@ -14518,6 +14522,6948 @@
 </p:sld>
 </file>
 
+<file path=ppt/slides/slide5.xml><?xml version="1.0" encoding="utf-8"?>
+<p:sld xmlns:a="http://schemas.openxmlformats.org/drawingml/2006/main" xmlns:r="http://schemas.openxmlformats.org/officeDocument/2006/relationships" xmlns:p="http://schemas.openxmlformats.org/presentationml/2006/main">
+  <p:cSld>
+    <p:spTree>
+      <p:nvGrpSpPr>
+        <p:cNvPr id="1" name=""/>
+        <p:cNvGrpSpPr/>
+        <p:nvPr/>
+      </p:nvGrpSpPr>
+      <p:grpSpPr/>
+      <p:grpSp>
+        <p:nvGrpSpPr>
+          <p:cNvPr id="21" name="组合 20"/>
+          <p:cNvGrpSpPr/>
+          <p:nvPr/>
+        </p:nvGrpSpPr>
+        <p:grpSpPr>
+          <a:xfrm>
+            <a:off x="2152650" y="1950085"/>
+            <a:ext cx="3524250" cy="2701290"/>
+            <a:chOff x="3390" y="3071"/>
+            <a:chExt cx="5550" cy="4254"/>
+          </a:xfrm>
+        </p:grpSpPr>
+        <p:sp>
+          <p:nvSpPr>
+            <p:cNvPr id="7" name="任意多边形 6"/>
+            <p:cNvSpPr/>
+            <p:nvPr/>
+          </p:nvSpPr>
+          <p:spPr>
+            <a:xfrm>
+              <a:off x="3390" y="3891"/>
+              <a:ext cx="5550" cy="3435"/>
+            </a:xfrm>
+            <a:custGeom>
+              <a:avLst/>
+              <a:gdLst>
+                <a:gd name="connisteX0" fmla="*/ 1457325 w 3524250"/>
+                <a:gd name="connsiteY0" fmla="*/ 0 h 2181225"/>
+                <a:gd name="connisteX1" fmla="*/ 0 w 3524250"/>
+                <a:gd name="connsiteY1" fmla="*/ 2162175 h 2181225"/>
+                <a:gd name="connisteX2" fmla="*/ 3524250 w 3524250"/>
+                <a:gd name="connsiteY2" fmla="*/ 2181225 h 2181225"/>
+                <a:gd name="connisteX3" fmla="*/ 1457325 w 3524250"/>
+                <a:gd name="connsiteY3" fmla="*/ 0 h 2181225"/>
+              </a:gdLst>
+              <a:ahLst/>
+              <a:cxnLst>
+                <a:cxn ang="0">
+                  <a:pos x="connisteX0" y="connsiteY0"/>
+                </a:cxn>
+                <a:cxn ang="0">
+                  <a:pos x="connisteX1" y="connsiteY1"/>
+                </a:cxn>
+                <a:cxn ang="0">
+                  <a:pos x="connisteX2" y="connsiteY2"/>
+                </a:cxn>
+                <a:cxn ang="0">
+                  <a:pos x="connisteX3" y="connsiteY3"/>
+                </a:cxn>
+              </a:cxnLst>
+              <a:rect l="l" t="t" r="r" b="b"/>
+              <a:pathLst>
+                <a:path w="3524250" h="2181225">
+                  <a:moveTo>
+                    <a:pt x="1457325" y="0"/>
+                  </a:moveTo>
+                  <a:lnTo>
+                    <a:pt x="0" y="2162175"/>
+                  </a:lnTo>
+                  <a:lnTo>
+                    <a:pt x="3524250" y="2181225"/>
+                  </a:lnTo>
+                  <a:lnTo>
+                    <a:pt x="1457325" y="0"/>
+                  </a:lnTo>
+                  <a:close/>
+                </a:path>
+              </a:pathLst>
+            </a:custGeom>
+            <a:noFill/>
+            <a:ln w="19050">
+              <a:solidFill>
+                <a:srgbClr val="7030A0"/>
+              </a:solidFill>
+            </a:ln>
+            <a:extLst>
+              <a:ext uri="{909E8E84-426E-40DD-AFC4-6F175D3DCCD1}">
+                <a14:hiddenFill xmlns:a14="http://schemas.microsoft.com/office/drawing/2010/main">
+                  <a:solidFill>
+                    <a:srgbClr val="845EC2"/>
+                  </a:solidFill>
+                </a14:hiddenFill>
+              </a:ext>
+            </a:extLst>
+          </p:spPr>
+          <p:style>
+            <a:lnRef idx="2">
+              <a:schemeClr val="accent1">
+                <a:lumMod val="75000"/>
+              </a:schemeClr>
+            </a:lnRef>
+            <a:fillRef idx="1">
+              <a:schemeClr val="accent1"/>
+            </a:fillRef>
+            <a:effectRef idx="0">
+              <a:srgbClr val="FFFFFF"/>
+            </a:effectRef>
+            <a:fontRef idx="minor">
+              <a:schemeClr val="lt1"/>
+            </a:fontRef>
+          </p:style>
+          <p:txBody>
+            <a:bodyPr rtlCol="0" anchor="ctr"/>
+            <a:p>
+              <a:pPr algn="ctr"/>
+              <a:endParaRPr lang="zh-CN" altLang="en-US"/>
+            </a:p>
+          </p:txBody>
+        </p:sp>
+        <p:cxnSp>
+          <p:nvCxnSpPr>
+            <p:cNvPr id="8" name="直接连接符 7"/>
+            <p:cNvCxnSpPr>
+              <a:stCxn id="7" idx="2"/>
+            </p:cNvCxnSpPr>
+            <p:nvPr/>
+          </p:nvCxnSpPr>
+          <p:spPr>
+            <a:xfrm flipH="1" flipV="1">
+              <a:off x="5380" y="4355"/>
+              <a:ext cx="3560" cy="2971"/>
+            </a:xfrm>
+            <a:prstGeom prst="line">
+              <a:avLst/>
+            </a:prstGeom>
+            <a:ln w="19050">
+              <a:solidFill>
+                <a:srgbClr val="C00000"/>
+              </a:solidFill>
+            </a:ln>
+          </p:spPr>
+          <p:style>
+            <a:lnRef idx="2">
+              <a:schemeClr val="accent1"/>
+            </a:lnRef>
+            <a:fillRef idx="0">
+              <a:srgbClr val="FFFFFF"/>
+            </a:fillRef>
+            <a:effectRef idx="0">
+              <a:srgbClr val="FFFFFF"/>
+            </a:effectRef>
+            <a:fontRef idx="minor">
+              <a:schemeClr val="tx1"/>
+            </a:fontRef>
+          </p:style>
+        </p:cxnSp>
+        <p:cxnSp>
+          <p:nvCxnSpPr>
+            <p:cNvPr id="9" name="直接连接符 8"/>
+            <p:cNvCxnSpPr>
+              <a:stCxn id="7" idx="2"/>
+            </p:cNvCxnSpPr>
+            <p:nvPr/>
+          </p:nvCxnSpPr>
+          <p:spPr>
+            <a:xfrm flipH="1" flipV="1">
+              <a:off x="5992" y="3403"/>
+              <a:ext cx="2948" cy="3923"/>
+            </a:xfrm>
+            <a:prstGeom prst="line">
+              <a:avLst/>
+            </a:prstGeom>
+            <a:ln w="19050">
+              <a:solidFill>
+                <a:srgbClr val="C00000"/>
+              </a:solidFill>
+            </a:ln>
+          </p:spPr>
+          <p:style>
+            <a:lnRef idx="2">
+              <a:schemeClr val="accent1"/>
+            </a:lnRef>
+            <a:fillRef idx="0">
+              <a:srgbClr val="FFFFFF"/>
+            </a:fillRef>
+            <a:effectRef idx="0">
+              <a:srgbClr val="FFFFFF"/>
+            </a:effectRef>
+            <a:fontRef idx="minor">
+              <a:schemeClr val="tx1"/>
+            </a:fontRef>
+          </p:style>
+        </p:cxnSp>
+        <p:cxnSp>
+          <p:nvCxnSpPr>
+            <p:cNvPr id="10" name="直接连接符 9"/>
+            <p:cNvCxnSpPr>
+              <a:endCxn id="7" idx="1"/>
+            </p:cNvCxnSpPr>
+            <p:nvPr/>
+          </p:nvCxnSpPr>
+          <p:spPr>
+            <a:xfrm flipH="1">
+              <a:off x="3390" y="3071"/>
+              <a:ext cx="2843" cy="4225"/>
+            </a:xfrm>
+            <a:prstGeom prst="line">
+              <a:avLst/>
+            </a:prstGeom>
+            <a:ln w="19050">
+              <a:solidFill>
+                <a:srgbClr val="7030A0"/>
+              </a:solidFill>
+            </a:ln>
+          </p:spPr>
+          <p:style>
+            <a:lnRef idx="2">
+              <a:schemeClr val="accent1"/>
+            </a:lnRef>
+            <a:fillRef idx="0">
+              <a:srgbClr val="FFFFFF"/>
+            </a:fillRef>
+            <a:effectRef idx="0">
+              <a:srgbClr val="FFFFFF"/>
+            </a:effectRef>
+            <a:fontRef idx="minor">
+              <a:schemeClr val="tx1"/>
+            </a:fontRef>
+          </p:style>
+        </p:cxnSp>
+        <p:cxnSp>
+          <p:nvCxnSpPr>
+            <p:cNvPr id="15" name="直接连接符 14"/>
+            <p:cNvCxnSpPr/>
+            <p:nvPr/>
+          </p:nvCxnSpPr>
+          <p:spPr>
+            <a:xfrm>
+              <a:off x="3743" y="5948"/>
+              <a:ext cx="778" cy="640"/>
+            </a:xfrm>
+            <a:prstGeom prst="line">
+              <a:avLst/>
+            </a:prstGeom>
+            <a:ln w="28575">
+              <a:solidFill>
+                <a:schemeClr val="tx1"/>
+              </a:solidFill>
+            </a:ln>
+          </p:spPr>
+          <p:style>
+            <a:lnRef idx="2">
+              <a:schemeClr val="accent1"/>
+            </a:lnRef>
+            <a:fillRef idx="0">
+              <a:srgbClr val="FFFFFF"/>
+            </a:fillRef>
+            <a:effectRef idx="0">
+              <a:srgbClr val="FFFFFF"/>
+            </a:effectRef>
+            <a:fontRef idx="minor">
+              <a:schemeClr val="tx1"/>
+            </a:fontRef>
+          </p:style>
+        </p:cxnSp>
+        <p:cxnSp>
+          <p:nvCxnSpPr>
+            <p:cNvPr id="16" name="直接连接符 15"/>
+            <p:cNvCxnSpPr/>
+            <p:nvPr/>
+          </p:nvCxnSpPr>
+          <p:spPr>
+            <a:xfrm flipV="1">
+              <a:off x="7548" y="5920"/>
+              <a:ext cx="1023" cy="778"/>
+            </a:xfrm>
+            <a:prstGeom prst="line">
+              <a:avLst/>
+            </a:prstGeom>
+            <a:ln w="28575">
+              <a:solidFill>
+                <a:schemeClr val="tx1"/>
+              </a:solidFill>
+            </a:ln>
+          </p:spPr>
+          <p:style>
+            <a:lnRef idx="2">
+              <a:schemeClr val="accent1"/>
+            </a:lnRef>
+            <a:fillRef idx="0">
+              <a:srgbClr val="FFFFFF"/>
+            </a:fillRef>
+            <a:effectRef idx="0">
+              <a:srgbClr val="FFFFFF"/>
+            </a:effectRef>
+            <a:fontRef idx="minor">
+              <a:schemeClr val="tx1"/>
+            </a:fontRef>
+          </p:style>
+        </p:cxnSp>
+        <p:sp>
+          <p:nvSpPr>
+            <p:cNvPr id="19" name="左大括号 18"/>
+            <p:cNvSpPr/>
+            <p:nvPr/>
+          </p:nvSpPr>
+          <p:spPr>
+            <a:xfrm rot="2040000">
+              <a:off x="5406" y="3228"/>
+              <a:ext cx="300" cy="1123"/>
+            </a:xfrm>
+            <a:prstGeom prst="leftBrace">
+              <a:avLst>
+                <a:gd name="adj1" fmla="val 146583"/>
+                <a:gd name="adj2" fmla="val 50000"/>
+              </a:avLst>
+            </a:prstGeom>
+            <a:ln w="19050">
+              <a:solidFill>
+                <a:srgbClr val="00B050"/>
+              </a:solidFill>
+            </a:ln>
+          </p:spPr>
+          <p:style>
+            <a:lnRef idx="2">
+              <a:schemeClr val="accent1"/>
+            </a:lnRef>
+            <a:fillRef idx="0">
+              <a:srgbClr val="FFFFFF"/>
+            </a:fillRef>
+            <a:effectRef idx="0">
+              <a:srgbClr val="FFFFFF"/>
+            </a:effectRef>
+            <a:fontRef idx="minor">
+              <a:schemeClr val="tx1"/>
+            </a:fontRef>
+          </p:style>
+          <p:txBody>
+            <a:bodyPr rtlCol="0" anchor="ctr"/>
+            <a:p>
+              <a:pPr algn="ctr"/>
+              <a:endParaRPr lang="zh-CN" altLang="en-US"/>
+            </a:p>
+          </p:txBody>
+        </p:sp>
+      </p:grpSp>
+      <p:grpSp>
+        <p:nvGrpSpPr>
+          <p:cNvPr id="22" name="组合 21"/>
+          <p:cNvGrpSpPr/>
+          <p:nvPr/>
+        </p:nvGrpSpPr>
+        <p:grpSpPr>
+          <a:xfrm>
+            <a:off x="7225665" y="1374140"/>
+            <a:ext cx="1203325" cy="3258820"/>
+            <a:chOff x="11379" y="2164"/>
+            <a:chExt cx="1895" cy="5132"/>
+          </a:xfrm>
+        </p:grpSpPr>
+        <p:sp>
+          <p:nvSpPr>
+            <p:cNvPr id="11" name="任意多边形 10"/>
+            <p:cNvSpPr/>
+            <p:nvPr/>
+          </p:nvSpPr>
+          <p:spPr>
+            <a:xfrm>
+              <a:off x="11657" y="3861"/>
+              <a:ext cx="1209" cy="3435"/>
+            </a:xfrm>
+            <a:custGeom>
+              <a:avLst/>
+              <a:gdLst>
+                <a:gd name="connisteX0" fmla="*/ 1457325 w 3524250"/>
+                <a:gd name="connsiteY0" fmla="*/ 0 h 2181225"/>
+                <a:gd name="connisteX1" fmla="*/ 0 w 3524250"/>
+                <a:gd name="connsiteY1" fmla="*/ 2162175 h 2181225"/>
+                <a:gd name="connisteX2" fmla="*/ 3524250 w 3524250"/>
+                <a:gd name="connsiteY2" fmla="*/ 2181225 h 2181225"/>
+                <a:gd name="connisteX3" fmla="*/ 1457325 w 3524250"/>
+                <a:gd name="connsiteY3" fmla="*/ 0 h 2181225"/>
+              </a:gdLst>
+              <a:ahLst/>
+              <a:cxnLst>
+                <a:cxn ang="0">
+                  <a:pos x="connisteX0" y="connsiteY0"/>
+                </a:cxn>
+                <a:cxn ang="0">
+                  <a:pos x="connisteX1" y="connsiteY1"/>
+                </a:cxn>
+                <a:cxn ang="0">
+                  <a:pos x="connisteX2" y="connsiteY2"/>
+                </a:cxn>
+                <a:cxn ang="0">
+                  <a:pos x="connisteX3" y="connsiteY3"/>
+                </a:cxn>
+              </a:cxnLst>
+              <a:rect l="l" t="t" r="r" b="b"/>
+              <a:pathLst>
+                <a:path w="3524250" h="2181225">
+                  <a:moveTo>
+                    <a:pt x="1457325" y="0"/>
+                  </a:moveTo>
+                  <a:lnTo>
+                    <a:pt x="0" y="2162175"/>
+                  </a:lnTo>
+                  <a:lnTo>
+                    <a:pt x="3524250" y="2181225"/>
+                  </a:lnTo>
+                  <a:lnTo>
+                    <a:pt x="1457325" y="0"/>
+                  </a:lnTo>
+                  <a:close/>
+                </a:path>
+              </a:pathLst>
+            </a:custGeom>
+            <a:noFill/>
+            <a:ln w="19050">
+              <a:solidFill>
+                <a:srgbClr val="7030A0"/>
+              </a:solidFill>
+            </a:ln>
+            <a:extLst>
+              <a:ext uri="{909E8E84-426E-40DD-AFC4-6F175D3DCCD1}">
+                <a14:hiddenFill xmlns:a14="http://schemas.microsoft.com/office/drawing/2010/main">
+                  <a:solidFill>
+                    <a:srgbClr val="845EC2"/>
+                  </a:solidFill>
+                </a14:hiddenFill>
+              </a:ext>
+            </a:extLst>
+          </p:spPr>
+          <p:style>
+            <a:lnRef idx="2">
+              <a:schemeClr val="accent1">
+                <a:lumMod val="75000"/>
+              </a:schemeClr>
+            </a:lnRef>
+            <a:fillRef idx="1">
+              <a:schemeClr val="accent1"/>
+            </a:fillRef>
+            <a:effectRef idx="0">
+              <a:srgbClr val="FFFFFF"/>
+            </a:effectRef>
+            <a:fontRef idx="minor">
+              <a:schemeClr val="lt1"/>
+            </a:fontRef>
+          </p:style>
+          <p:txBody>
+            <a:bodyPr rtlCol="0" anchor="ctr"/>
+            <a:p>
+              <a:pPr algn="ctr"/>
+              <a:endParaRPr lang="zh-CN" altLang="en-US"/>
+            </a:p>
+          </p:txBody>
+        </p:sp>
+        <p:cxnSp>
+          <p:nvCxnSpPr>
+            <p:cNvPr id="12" name="直接连接符 11"/>
+            <p:cNvCxnSpPr/>
+            <p:nvPr/>
+          </p:nvCxnSpPr>
+          <p:spPr>
+            <a:xfrm flipH="1" flipV="1">
+              <a:off x="12004" y="4890"/>
+              <a:ext cx="862" cy="2406"/>
+            </a:xfrm>
+            <a:prstGeom prst="line">
+              <a:avLst/>
+            </a:prstGeom>
+            <a:ln w="19050">
+              <a:solidFill>
+                <a:srgbClr val="C00000"/>
+              </a:solidFill>
+            </a:ln>
+          </p:spPr>
+          <p:style>
+            <a:lnRef idx="2">
+              <a:schemeClr val="accent1"/>
+            </a:lnRef>
+            <a:fillRef idx="0">
+              <a:srgbClr val="FFFFFF"/>
+            </a:fillRef>
+            <a:effectRef idx="0">
+              <a:srgbClr val="FFFFFF"/>
+            </a:effectRef>
+            <a:fontRef idx="minor">
+              <a:schemeClr val="tx1"/>
+            </a:fontRef>
+          </p:style>
+        </p:cxnSp>
+        <p:cxnSp>
+          <p:nvCxnSpPr>
+            <p:cNvPr id="13" name="直接连接符 12"/>
+            <p:cNvCxnSpPr/>
+            <p:nvPr/>
+          </p:nvCxnSpPr>
+          <p:spPr>
+            <a:xfrm flipH="1" flipV="1">
+              <a:off x="12371" y="2364"/>
+              <a:ext cx="495" cy="4932"/>
+            </a:xfrm>
+            <a:prstGeom prst="line">
+              <a:avLst/>
+            </a:prstGeom>
+            <a:ln w="19050">
+              <a:solidFill>
+                <a:srgbClr val="C00000"/>
+              </a:solidFill>
+            </a:ln>
+          </p:spPr>
+          <p:style>
+            <a:lnRef idx="2">
+              <a:schemeClr val="accent1"/>
+            </a:lnRef>
+            <a:fillRef idx="0">
+              <a:srgbClr val="FFFFFF"/>
+            </a:fillRef>
+            <a:effectRef idx="0">
+              <a:srgbClr val="FFFFFF"/>
+            </a:effectRef>
+            <a:fontRef idx="minor">
+              <a:schemeClr val="tx1"/>
+            </a:fontRef>
+          </p:style>
+        </p:cxnSp>
+        <p:cxnSp>
+          <p:nvCxnSpPr>
+            <p:cNvPr id="14" name="直接连接符 13"/>
+            <p:cNvCxnSpPr>
+              <a:endCxn id="11" idx="1"/>
+            </p:cNvCxnSpPr>
+            <p:nvPr/>
+          </p:nvCxnSpPr>
+          <p:spPr>
+            <a:xfrm flipH="1">
+              <a:off x="11657" y="2164"/>
+              <a:ext cx="744" cy="5102"/>
+            </a:xfrm>
+            <a:prstGeom prst="line">
+              <a:avLst/>
+            </a:prstGeom>
+            <a:ln w="19050">
+              <a:solidFill>
+                <a:srgbClr val="7030A0"/>
+              </a:solidFill>
+            </a:ln>
+          </p:spPr>
+          <p:style>
+            <a:lnRef idx="2">
+              <a:schemeClr val="accent1"/>
+            </a:lnRef>
+            <a:fillRef idx="0">
+              <a:srgbClr val="FFFFFF"/>
+            </a:fillRef>
+            <a:effectRef idx="0">
+              <a:srgbClr val="FFFFFF"/>
+            </a:effectRef>
+            <a:fontRef idx="minor">
+              <a:schemeClr val="tx1"/>
+            </a:fontRef>
+          </p:style>
+        </p:cxnSp>
+        <p:cxnSp>
+          <p:nvCxnSpPr>
+            <p:cNvPr id="17" name="直接连接符 16"/>
+            <p:cNvCxnSpPr/>
+            <p:nvPr/>
+          </p:nvCxnSpPr>
+          <p:spPr>
+            <a:xfrm>
+              <a:off x="11379" y="6084"/>
+              <a:ext cx="791" cy="314"/>
+            </a:xfrm>
+            <a:prstGeom prst="line">
+              <a:avLst/>
+            </a:prstGeom>
+            <a:ln w="28575">
+              <a:solidFill>
+                <a:schemeClr val="tx1"/>
+              </a:solidFill>
+            </a:ln>
+          </p:spPr>
+          <p:style>
+            <a:lnRef idx="2">
+              <a:schemeClr val="accent1"/>
+            </a:lnRef>
+            <a:fillRef idx="0">
+              <a:srgbClr val="FFFFFF"/>
+            </a:fillRef>
+            <a:effectRef idx="0">
+              <a:srgbClr val="FFFFFF"/>
+            </a:effectRef>
+            <a:fontRef idx="minor">
+              <a:schemeClr val="tx1"/>
+            </a:fontRef>
+          </p:style>
+        </p:cxnSp>
+        <p:cxnSp>
+          <p:nvCxnSpPr>
+            <p:cNvPr id="18" name="直接连接符 17"/>
+            <p:cNvCxnSpPr/>
+            <p:nvPr/>
+          </p:nvCxnSpPr>
+          <p:spPr>
+            <a:xfrm flipV="1">
+              <a:off x="12252" y="5620"/>
+              <a:ext cx="1023" cy="778"/>
+            </a:xfrm>
+            <a:prstGeom prst="line">
+              <a:avLst/>
+            </a:prstGeom>
+            <a:ln w="28575">
+              <a:solidFill>
+                <a:schemeClr val="tx1"/>
+              </a:solidFill>
+            </a:ln>
+          </p:spPr>
+          <p:style>
+            <a:lnRef idx="2">
+              <a:schemeClr val="accent1"/>
+            </a:lnRef>
+            <a:fillRef idx="0">
+              <a:srgbClr val="FFFFFF"/>
+            </a:fillRef>
+            <a:effectRef idx="0">
+              <a:srgbClr val="FFFFFF"/>
+            </a:effectRef>
+            <a:fontRef idx="minor">
+              <a:schemeClr val="tx1"/>
+            </a:fontRef>
+          </p:style>
+        </p:cxnSp>
+        <p:sp>
+          <p:nvSpPr>
+            <p:cNvPr id="20" name="左大括号 19"/>
+            <p:cNvSpPr/>
+            <p:nvPr/>
+          </p:nvSpPr>
+          <p:spPr>
+            <a:xfrm rot="480000">
+              <a:off x="11898" y="2373"/>
+              <a:ext cx="300" cy="2508"/>
+            </a:xfrm>
+            <a:prstGeom prst="leftBrace">
+              <a:avLst>
+                <a:gd name="adj1" fmla="val 146583"/>
+                <a:gd name="adj2" fmla="val 50000"/>
+              </a:avLst>
+            </a:prstGeom>
+            <a:ln w="19050">
+              <a:solidFill>
+                <a:srgbClr val="00B050"/>
+              </a:solidFill>
+            </a:ln>
+          </p:spPr>
+          <p:style>
+            <a:lnRef idx="2">
+              <a:schemeClr val="accent1"/>
+            </a:lnRef>
+            <a:fillRef idx="0">
+              <a:srgbClr val="FFFFFF"/>
+            </a:fillRef>
+            <a:effectRef idx="0">
+              <a:srgbClr val="FFFFFF"/>
+            </a:effectRef>
+            <a:fontRef idx="minor">
+              <a:schemeClr val="tx1"/>
+            </a:fontRef>
+          </p:style>
+          <p:txBody>
+            <a:bodyPr rtlCol="0" anchor="ctr"/>
+            <a:p>
+              <a:pPr algn="ctr"/>
+              <a:endParaRPr lang="zh-CN" altLang="en-US"/>
+            </a:p>
+          </p:txBody>
+        </p:sp>
+      </p:grpSp>
+    </p:spTree>
+  </p:cSld>
+  <p:clrMapOvr>
+    <a:masterClrMapping/>
+  </p:clrMapOvr>
+</p:sld>
+</file>
+
+<file path=ppt/slides/slide6.xml><?xml version="1.0" encoding="utf-8"?>
+<p:sld xmlns:a="http://schemas.openxmlformats.org/drawingml/2006/main" xmlns:r="http://schemas.openxmlformats.org/officeDocument/2006/relationships" xmlns:p="http://schemas.openxmlformats.org/presentationml/2006/main">
+  <p:cSld>
+    <p:spTree>
+      <p:nvGrpSpPr>
+        <p:cNvPr id="1" name=""/>
+        <p:cNvGrpSpPr/>
+        <p:nvPr/>
+      </p:nvGrpSpPr>
+      <p:grpSpPr/>
+      <p:grpSp>
+        <p:nvGrpSpPr>
+          <p:cNvPr id="58" name="组合 57"/>
+          <p:cNvGrpSpPr/>
+          <p:nvPr/>
+        </p:nvGrpSpPr>
+        <p:grpSpPr>
+          <a:xfrm>
+            <a:off x="866140" y="788670"/>
+            <a:ext cx="9284970" cy="5508625"/>
+            <a:chOff x="1364" y="1242"/>
+            <a:chExt cx="14622" cy="8675"/>
+          </a:xfrm>
+        </p:grpSpPr>
+        <p:sp>
+          <p:nvSpPr>
+            <p:cNvPr id="7" name="矩形 6"/>
+            <p:cNvSpPr/>
+            <p:nvPr/>
+          </p:nvSpPr>
+          <p:spPr>
+            <a:xfrm>
+              <a:off x="3303" y="1242"/>
+              <a:ext cx="2139" cy="937"/>
+            </a:xfrm>
+            <a:prstGeom prst="rect">
+              <a:avLst/>
+            </a:prstGeom>
+            <a:noFill/>
+            <a:ln w="19050">
+              <a:solidFill>
+                <a:schemeClr val="tx1"/>
+              </a:solidFill>
+            </a:ln>
+            <a:extLst>
+              <a:ext uri="{909E8E84-426E-40DD-AFC4-6F175D3DCCD1}">
+                <a14:hiddenFill xmlns:a14="http://schemas.microsoft.com/office/drawing/2010/main">
+                  <a:solidFill>
+                    <a:schemeClr val="accent1"/>
+                  </a:solidFill>
+                </a14:hiddenFill>
+              </a:ext>
+            </a:extLst>
+          </p:spPr>
+          <p:style>
+            <a:lnRef idx="2">
+              <a:schemeClr val="accent1">
+                <a:lumMod val="75000"/>
+              </a:schemeClr>
+            </a:lnRef>
+            <a:fillRef idx="1">
+              <a:schemeClr val="accent1"/>
+            </a:fillRef>
+            <a:effectRef idx="0">
+              <a:srgbClr val="FFFFFF"/>
+            </a:effectRef>
+            <a:fontRef idx="minor">
+              <a:schemeClr val="lt1"/>
+            </a:fontRef>
+          </p:style>
+          <p:txBody>
+            <a:bodyPr rtlCol="0" anchor="ctr"/>
+            <a:p>
+              <a:pPr algn="ctr"/>
+              <a:r>
+                <a:rPr lang="zh-CN" altLang="en-US" sz="1500">
+                  <a:solidFill>
+                    <a:schemeClr val="tx1"/>
+                  </a:solidFill>
+                </a:rPr>
+                <a:t>图像</a:t>
+              </a:r>
+              <a:endParaRPr lang="zh-CN" altLang="en-US" sz="1500">
+                <a:solidFill>
+                  <a:schemeClr val="tx1"/>
+                </a:solidFill>
+              </a:endParaRPr>
+            </a:p>
+          </p:txBody>
+        </p:sp>
+        <p:sp>
+          <p:nvSpPr>
+            <p:cNvPr id="8" name="矩形 7"/>
+            <p:cNvSpPr/>
+            <p:nvPr/>
+          </p:nvSpPr>
+          <p:spPr>
+            <a:xfrm>
+              <a:off x="6000" y="1242"/>
+              <a:ext cx="3023" cy="937"/>
+            </a:xfrm>
+            <a:prstGeom prst="rect">
+              <a:avLst/>
+            </a:prstGeom>
+            <a:noFill/>
+            <a:ln w="19050">
+              <a:solidFill>
+                <a:schemeClr val="tx1"/>
+              </a:solidFill>
+            </a:ln>
+            <a:extLst>
+              <a:ext uri="{909E8E84-426E-40DD-AFC4-6F175D3DCCD1}">
+                <a14:hiddenFill xmlns:a14="http://schemas.microsoft.com/office/drawing/2010/main">
+                  <a:solidFill>
+                    <a:schemeClr val="accent1"/>
+                  </a:solidFill>
+                </a14:hiddenFill>
+              </a:ext>
+            </a:extLst>
+          </p:spPr>
+          <p:style>
+            <a:lnRef idx="2">
+              <a:schemeClr val="accent1">
+                <a:lumMod val="75000"/>
+              </a:schemeClr>
+            </a:lnRef>
+            <a:fillRef idx="1">
+              <a:schemeClr val="accent1"/>
+            </a:fillRef>
+            <a:effectRef idx="0">
+              <a:srgbClr val="FFFFFF"/>
+            </a:effectRef>
+            <a:fontRef idx="minor">
+              <a:schemeClr val="lt1"/>
+            </a:fontRef>
+          </p:style>
+          <p:txBody>
+            <a:bodyPr rtlCol="0" anchor="ctr"/>
+            <a:p>
+              <a:pPr algn="ctr"/>
+              <a:r>
+                <a:rPr lang="zh-CN" altLang="en-US" sz="1500">
+                  <a:solidFill>
+                    <a:schemeClr val="tx1"/>
+                  </a:solidFill>
+                </a:rPr>
+                <a:t>图像去畸变</a:t>
+              </a:r>
+              <a:endParaRPr lang="zh-CN" altLang="en-US" sz="1500">
+                <a:solidFill>
+                  <a:schemeClr val="tx1"/>
+                </a:solidFill>
+              </a:endParaRPr>
+            </a:p>
+          </p:txBody>
+        </p:sp>
+        <p:cxnSp>
+          <p:nvCxnSpPr>
+            <p:cNvPr id="9" name="直接箭头连接符 8"/>
+            <p:cNvCxnSpPr>
+              <a:stCxn id="7" idx="3"/>
+              <a:endCxn id="8" idx="1"/>
+            </p:cNvCxnSpPr>
+            <p:nvPr/>
+          </p:nvCxnSpPr>
+          <p:spPr>
+            <a:xfrm>
+              <a:off x="5442" y="1711"/>
+              <a:ext cx="558" cy="0"/>
+            </a:xfrm>
+            <a:prstGeom prst="straightConnector1">
+              <a:avLst/>
+            </a:prstGeom>
+            <a:ln w="19050">
+              <a:solidFill>
+                <a:schemeClr val="tx1"/>
+              </a:solidFill>
+              <a:tailEnd type="arrow"/>
+            </a:ln>
+          </p:spPr>
+          <p:style>
+            <a:lnRef idx="2">
+              <a:schemeClr val="accent1"/>
+            </a:lnRef>
+            <a:fillRef idx="0">
+              <a:srgbClr val="FFFFFF"/>
+            </a:fillRef>
+            <a:effectRef idx="0">
+              <a:srgbClr val="FFFFFF"/>
+            </a:effectRef>
+            <a:fontRef idx="minor">
+              <a:schemeClr val="tx1"/>
+            </a:fontRef>
+          </p:style>
+        </p:cxnSp>
+        <p:sp>
+          <p:nvSpPr>
+            <p:cNvPr id="12" name="菱形 11"/>
+            <p:cNvSpPr/>
+            <p:nvPr/>
+          </p:nvSpPr>
+          <p:spPr>
+            <a:xfrm>
+              <a:off x="6091" y="2612"/>
+              <a:ext cx="2846" cy="1182"/>
+            </a:xfrm>
+            <a:prstGeom prst="diamond">
+              <a:avLst/>
+            </a:prstGeom>
+            <a:noFill/>
+            <a:ln w="19050">
+              <a:solidFill>
+                <a:schemeClr val="tx1"/>
+              </a:solidFill>
+            </a:ln>
+            <a:extLst>
+              <a:ext uri="{909E8E84-426E-40DD-AFC4-6F175D3DCCD1}">
+                <a14:hiddenFill xmlns:a14="http://schemas.microsoft.com/office/drawing/2010/main">
+                  <a:solidFill>
+                    <a:schemeClr val="accent1"/>
+                  </a:solidFill>
+                </a14:hiddenFill>
+              </a:ext>
+            </a:extLst>
+          </p:spPr>
+          <p:style>
+            <a:lnRef idx="2">
+              <a:schemeClr val="accent1">
+                <a:lumMod val="75000"/>
+              </a:schemeClr>
+            </a:lnRef>
+            <a:fillRef idx="1">
+              <a:schemeClr val="accent1"/>
+            </a:fillRef>
+            <a:effectRef idx="0">
+              <a:srgbClr val="FFFFFF"/>
+            </a:effectRef>
+            <a:fontRef idx="minor">
+              <a:schemeClr val="lt1"/>
+            </a:fontRef>
+          </p:style>
+          <p:txBody>
+            <a:bodyPr rtlCol="0" anchor="ctr"/>
+            <a:p>
+              <a:pPr algn="ctr"/>
+              <a:r>
+                <a:rPr lang="zh-CN" altLang="en-US" sz="1500">
+                  <a:solidFill>
+                    <a:schemeClr val="tx1"/>
+                  </a:solidFill>
+                </a:rPr>
+                <a:t>第一帧？</a:t>
+              </a:r>
+              <a:endParaRPr lang="zh-CN" altLang="en-US" sz="1500">
+                <a:solidFill>
+                  <a:schemeClr val="tx1"/>
+                </a:solidFill>
+              </a:endParaRPr>
+            </a:p>
+          </p:txBody>
+        </p:sp>
+        <p:cxnSp>
+          <p:nvCxnSpPr>
+            <p:cNvPr id="13" name="直接箭头连接符 12"/>
+            <p:cNvCxnSpPr>
+              <a:stCxn id="8" idx="2"/>
+              <a:endCxn id="12" idx="0"/>
+            </p:cNvCxnSpPr>
+            <p:nvPr/>
+          </p:nvCxnSpPr>
+          <p:spPr>
+            <a:xfrm>
+              <a:off x="7512" y="2179"/>
+              <a:ext cx="2" cy="433"/>
+            </a:xfrm>
+            <a:prstGeom prst="straightConnector1">
+              <a:avLst/>
+            </a:prstGeom>
+            <a:ln w="19050">
+              <a:solidFill>
+                <a:schemeClr val="tx1"/>
+              </a:solidFill>
+              <a:tailEnd type="arrow"/>
+            </a:ln>
+          </p:spPr>
+          <p:style>
+            <a:lnRef idx="2">
+              <a:schemeClr val="accent1"/>
+            </a:lnRef>
+            <a:fillRef idx="0">
+              <a:srgbClr val="FFFFFF"/>
+            </a:fillRef>
+            <a:effectRef idx="0">
+              <a:srgbClr val="FFFFFF"/>
+            </a:effectRef>
+            <a:fontRef idx="minor">
+              <a:schemeClr val="tx1"/>
+            </a:fontRef>
+          </p:style>
+        </p:cxnSp>
+        <p:sp>
+          <p:nvSpPr>
+            <p:cNvPr id="14" name="矩形 13"/>
+            <p:cNvSpPr/>
+            <p:nvPr/>
+          </p:nvSpPr>
+          <p:spPr>
+            <a:xfrm>
+              <a:off x="8940" y="4255"/>
+              <a:ext cx="2139" cy="937"/>
+            </a:xfrm>
+            <a:prstGeom prst="rect">
+              <a:avLst/>
+            </a:prstGeom>
+            <a:noFill/>
+            <a:ln w="19050">
+              <a:solidFill>
+                <a:schemeClr val="tx1"/>
+              </a:solidFill>
+            </a:ln>
+            <a:extLst>
+              <a:ext uri="{909E8E84-426E-40DD-AFC4-6F175D3DCCD1}">
+                <a14:hiddenFill xmlns:a14="http://schemas.microsoft.com/office/drawing/2010/main">
+                  <a:solidFill>
+                    <a:schemeClr val="accent1"/>
+                  </a:solidFill>
+                </a14:hiddenFill>
+              </a:ext>
+            </a:extLst>
+          </p:spPr>
+          <p:style>
+            <a:lnRef idx="2">
+              <a:schemeClr val="accent1">
+                <a:lumMod val="75000"/>
+              </a:schemeClr>
+            </a:lnRef>
+            <a:fillRef idx="1">
+              <a:schemeClr val="accent1"/>
+            </a:fillRef>
+            <a:effectRef idx="0">
+              <a:srgbClr val="FFFFFF"/>
+            </a:effectRef>
+            <a:fontRef idx="minor">
+              <a:schemeClr val="lt1"/>
+            </a:fontRef>
+          </p:style>
+          <p:txBody>
+            <a:bodyPr rtlCol="0" anchor="ctr"/>
+            <a:p>
+              <a:pPr algn="ctr"/>
+              <a:r>
+                <a:rPr lang="zh-CN" altLang="en-US" sz="1500">
+                  <a:solidFill>
+                    <a:schemeClr val="tx1"/>
+                  </a:solidFill>
+                </a:rPr>
+                <a:t>初始化点选</a:t>
+              </a:r>
+              <a:endParaRPr lang="zh-CN" altLang="en-US" sz="1500">
+                <a:solidFill>
+                  <a:schemeClr val="tx1"/>
+                </a:solidFill>
+              </a:endParaRPr>
+            </a:p>
+          </p:txBody>
+        </p:sp>
+        <p:cxnSp>
+          <p:nvCxnSpPr>
+            <p:cNvPr id="16" name="肘形连接符 15"/>
+            <p:cNvCxnSpPr>
+              <a:stCxn id="12" idx="3"/>
+              <a:endCxn id="14" idx="0"/>
+            </p:cNvCxnSpPr>
+            <p:nvPr/>
+          </p:nvCxnSpPr>
+          <p:spPr>
+            <a:xfrm>
+              <a:off x="8937" y="3203"/>
+              <a:ext cx="1073" cy="1052"/>
+            </a:xfrm>
+            <a:prstGeom prst="bentConnector2">
+              <a:avLst/>
+            </a:prstGeom>
+            <a:ln w="19050">
+              <a:solidFill>
+                <a:schemeClr val="tx1"/>
+              </a:solidFill>
+              <a:tailEnd type="arrow"/>
+            </a:ln>
+          </p:spPr>
+          <p:style>
+            <a:lnRef idx="2">
+              <a:schemeClr val="accent1"/>
+            </a:lnRef>
+            <a:fillRef idx="0">
+              <a:srgbClr val="FFFFFF"/>
+            </a:fillRef>
+            <a:effectRef idx="0">
+              <a:srgbClr val="FFFFFF"/>
+            </a:effectRef>
+            <a:fontRef idx="minor">
+              <a:schemeClr val="tx1"/>
+            </a:fontRef>
+          </p:style>
+        </p:cxnSp>
+        <mc:AlternateContent xmlns:mc="http://schemas.openxmlformats.org/markup-compatibility/2006">
+          <mc:Choice xmlns:a14="http://schemas.microsoft.com/office/drawing/2010/main" Requires="a14">
+            <p:sp>
+              <p:nvSpPr>
+                <p:cNvPr id="17" name="矩形 16"/>
+                <p:cNvSpPr/>
+                <p:nvPr/>
+              </p:nvSpPr>
+              <p:spPr>
+                <a:xfrm>
+                  <a:off x="4034" y="4255"/>
+                  <a:ext cx="2139" cy="937"/>
+                </a:xfrm>
+                <a:prstGeom prst="rect">
+                  <a:avLst/>
+                </a:prstGeom>
+                <a:noFill/>
+                <a:ln w="19050">
+                  <a:solidFill>
+                    <a:schemeClr val="tx1"/>
+                  </a:solidFill>
+                </a:ln>
+                <a:extLst>
+                  <a:ext uri="{909E8E84-426E-40DD-AFC4-6F175D3DCCD1}">
+                    <a14:hiddenFill xmlns:a14="http://schemas.microsoft.com/office/drawing/2010/main">
+                      <a:solidFill>
+                        <a:schemeClr val="accent1"/>
+                      </a:solidFill>
+                    </a14:hiddenFill>
+                  </a:ext>
+                </a:extLst>
+              </p:spPr>
+              <p:style>
+                <a:lnRef idx="2">
+                  <a:schemeClr val="accent1">
+                    <a:lumMod val="75000"/>
+                  </a:schemeClr>
+                </a:lnRef>
+                <a:fillRef idx="1">
+                  <a:schemeClr val="accent1"/>
+                </a:fillRef>
+                <a:effectRef idx="0">
+                  <a:srgbClr val="FFFFFF"/>
+                </a:effectRef>
+                <a:fontRef idx="minor">
+                  <a:schemeClr val="lt1"/>
+                </a:fontRef>
+              </p:style>
+              <p:txBody>
+                <a:bodyPr rtlCol="0" anchor="ctr"/>
+                <a:p>
+                  <a:pPr algn="ctr"/>
+                  <a:r>
+                    <a:rPr lang="zh-CN" altLang="en-US" sz="1500">
+                      <a:solidFill>
+                        <a:schemeClr val="tx1"/>
+                      </a:solidFill>
+                    </a:rPr>
+                    <a:t>普通帧</a:t>
+                  </a:r>
+                  <a14:m>
+                    <m:oMath xmlns:m="http://schemas.openxmlformats.org/officeDocument/2006/math">
+                      <m:r>
+                        <a:rPr lang="en-US" altLang="zh-CN" sz="1500" i="1">
+                          <a:solidFill>
+                            <a:schemeClr val="tx1"/>
+                          </a:solidFill>
+                          <a:latin typeface="Cambria Math" panose="02040503050406030204" charset="0"/>
+                          <a:cs typeface="Cambria Math" panose="02040503050406030204" charset="0"/>
+                        </a:rPr>
+                        <m:t>𝑗</m:t>
+                      </m:r>
+                    </m:oMath>
+                  </a14:m>
+                  <a:endParaRPr lang="zh-CN" altLang="en-US" sz="1500">
+                    <a:solidFill>
+                      <a:schemeClr val="tx1"/>
+                    </a:solidFill>
+                  </a:endParaRPr>
+                </a:p>
+              </p:txBody>
+            </p:sp>
+          </mc:Choice>
+          <mc:Fallback>
+            <p:sp>
+              <p:nvSpPr>
+                <p:cNvPr id="17" name="矩形 16"/>
+                <p:cNvSpPr>
+                  <a:spLocks noRot="1" noChangeAspect="1" noMove="1" noResize="1" noEditPoints="1" noAdjustHandles="1" noChangeArrowheads="1" noChangeShapeType="1" noTextEdit="1"/>
+                </p:cNvSpPr>
+                <p:nvPr/>
+              </p:nvSpPr>
+              <p:spPr>
+                <a:xfrm>
+                  <a:off x="4034" y="4255"/>
+                  <a:ext cx="2139" cy="937"/>
+                </a:xfrm>
+                <a:prstGeom prst="rect">
+                  <a:avLst/>
+                </a:prstGeom>
+                <a:blipFill rotWithShape="1">
+                  <a:blip r:embed="rId1"/>
+                </a:blipFill>
+                <a:ln w="19050">
+                  <a:solidFill>
+                    <a:schemeClr val="tx1"/>
+                  </a:solidFill>
+                </a:ln>
+                <a:extLst>
+                  <a:ext uri="{909E8E84-426E-40DD-AFC4-6F175D3DCCD1}">
+                    <a14:hiddenFill xmlns:a14="http://schemas.microsoft.com/office/drawing/2010/main">
+                      <a:solidFill>
+                        <a:schemeClr val="accent1"/>
+                      </a:solidFill>
+                    </a14:hiddenFill>
+                  </a:ext>
+                </a:extLst>
+              </p:spPr>
+              <p:style>
+                <a:lnRef idx="2">
+                  <a:schemeClr val="accent1">
+                    <a:lumMod val="75000"/>
+                  </a:schemeClr>
+                </a:lnRef>
+                <a:fillRef idx="1">
+                  <a:schemeClr val="accent1"/>
+                </a:fillRef>
+                <a:effectRef idx="0">
+                  <a:srgbClr val="FFFFFF"/>
+                </a:effectRef>
+                <a:fontRef idx="minor">
+                  <a:schemeClr val="lt1"/>
+                </a:fontRef>
+              </p:style>
+              <p:txBody>
+                <a:bodyPr/>
+                <a:lstStyle/>
+                <a:p>
+                  <a:r>
+                    <a:rPr lang="zh-CN" altLang="en-US">
+                      <a:noFill/>
+                    </a:rPr>
+                    <a:t> </a:t>
+                  </a:r>
+                </a:p>
+              </p:txBody>
+            </p:sp>
+          </mc:Fallback>
+        </mc:AlternateContent>
+        <p:cxnSp>
+          <p:nvCxnSpPr>
+            <p:cNvPr id="18" name="肘形连接符 17"/>
+            <p:cNvCxnSpPr>
+              <a:stCxn id="12" idx="1"/>
+              <a:endCxn id="17" idx="0"/>
+            </p:cNvCxnSpPr>
+            <p:nvPr/>
+          </p:nvCxnSpPr>
+          <p:spPr>
+            <a:xfrm rot="10800000" flipV="1">
+              <a:off x="5104" y="3203"/>
+              <a:ext cx="987" cy="1052"/>
+            </a:xfrm>
+            <a:prstGeom prst="bentConnector2">
+              <a:avLst/>
+            </a:prstGeom>
+            <a:ln w="19050">
+              <a:solidFill>
+                <a:schemeClr val="tx1"/>
+              </a:solidFill>
+              <a:tailEnd type="arrow"/>
+            </a:ln>
+          </p:spPr>
+          <p:style>
+            <a:lnRef idx="2">
+              <a:schemeClr val="accent1"/>
+            </a:lnRef>
+            <a:fillRef idx="0">
+              <a:srgbClr val="FFFFFF"/>
+            </a:fillRef>
+            <a:effectRef idx="0">
+              <a:srgbClr val="FFFFFF"/>
+            </a:effectRef>
+            <a:fontRef idx="minor">
+              <a:schemeClr val="tx1"/>
+            </a:fontRef>
+          </p:style>
+        </p:cxnSp>
+        <mc:AlternateContent xmlns:mc="http://schemas.openxmlformats.org/markup-compatibility/2006">
+          <mc:Choice xmlns:a14="http://schemas.microsoft.com/office/drawing/2010/main" Requires="a14">
+            <p:sp>
+              <p:nvSpPr>
+                <p:cNvPr id="19" name="矩形 18"/>
+                <p:cNvSpPr/>
+                <p:nvPr/>
+              </p:nvSpPr>
+              <p:spPr>
+                <a:xfrm>
+                  <a:off x="8940" y="5877"/>
+                  <a:ext cx="2139" cy="937"/>
+                </a:xfrm>
+                <a:prstGeom prst="rect">
+                  <a:avLst/>
+                </a:prstGeom>
+                <a:noFill/>
+                <a:ln w="19050">
+                  <a:solidFill>
+                    <a:schemeClr val="tx1"/>
+                  </a:solidFill>
+                </a:ln>
+                <a:extLst>
+                  <a:ext uri="{909E8E84-426E-40DD-AFC4-6F175D3DCCD1}">
+                    <a14:hiddenFill xmlns:a14="http://schemas.microsoft.com/office/drawing/2010/main">
+                      <a:solidFill>
+                        <a:schemeClr val="accent1"/>
+                      </a:solidFill>
+                    </a14:hiddenFill>
+                  </a:ext>
+                </a:extLst>
+              </p:spPr>
+              <p:style>
+                <a:lnRef idx="2">
+                  <a:schemeClr val="accent1">
+                    <a:lumMod val="75000"/>
+                  </a:schemeClr>
+                </a:lnRef>
+                <a:fillRef idx="1">
+                  <a:schemeClr val="accent1"/>
+                </a:fillRef>
+                <a:effectRef idx="0">
+                  <a:srgbClr val="FFFFFF"/>
+                </a:effectRef>
+                <a:fontRef idx="minor">
+                  <a:schemeClr val="lt1"/>
+                </a:fontRef>
+              </p:style>
+              <p:txBody>
+                <a:bodyPr rtlCol="0" anchor="ctr"/>
+                <a:p>
+                  <a:pPr algn="ctr"/>
+                  <a:r>
+                    <a:rPr lang="zh-CN" altLang="en-US" sz="1500">
+                      <a:solidFill>
+                        <a:schemeClr val="tx1"/>
+                      </a:solidFill>
+                    </a:rPr>
+                    <a:t>参考帧</a:t>
+                  </a:r>
+                  <a14:m>
+                    <m:oMath xmlns:m="http://schemas.openxmlformats.org/officeDocument/2006/math">
+                      <m:sSub>
+                        <m:sSubPr>
+                          <m:ctrlPr>
+                            <a:rPr lang="en-US" altLang="zh-CN" sz="1500" i="1">
+                              <a:solidFill>
+                                <a:schemeClr val="tx1"/>
+                              </a:solidFill>
+                              <a:latin typeface="Cambria Math" panose="02040503050406030204" charset="0"/>
+                              <a:cs typeface="Cambria Math" panose="02040503050406030204" charset="0"/>
+                            </a:rPr>
+                          </m:ctrlPr>
+                        </m:sSubPr>
+                        <m:e>
+                          <m:r>
+                            <a:rPr lang="en-US" altLang="zh-CN" sz="1500" i="1">
+                              <a:solidFill>
+                                <a:schemeClr val="tx1"/>
+                              </a:solidFill>
+                              <a:latin typeface="Cambria Math" panose="02040503050406030204" charset="0"/>
+                              <a:cs typeface="Cambria Math" panose="02040503050406030204" charset="0"/>
+                            </a:rPr>
+                            <m:t>𝑅</m:t>
+                          </m:r>
+                        </m:e>
+                        <m:sub>
+                          <m:r>
+                            <a:rPr lang="en-US" altLang="zh-CN" sz="1500" i="1">
+                              <a:solidFill>
+                                <a:schemeClr val="tx1"/>
+                              </a:solidFill>
+                              <a:latin typeface="Cambria Math" panose="02040503050406030204" charset="0"/>
+                              <a:cs typeface="Cambria Math" panose="02040503050406030204" charset="0"/>
+                            </a:rPr>
+                            <m:t>𝑓</m:t>
+                          </m:r>
+                        </m:sub>
+                      </m:sSub>
+                    </m:oMath>
+                  </a14:m>
+                  <a:endParaRPr lang="zh-CN" altLang="en-US" sz="1500">
+                    <a:solidFill>
+                      <a:schemeClr val="tx1"/>
+                    </a:solidFill>
+                  </a:endParaRPr>
+                </a:p>
+              </p:txBody>
+            </p:sp>
+          </mc:Choice>
+          <mc:Fallback>
+            <p:sp>
+              <p:nvSpPr>
+                <p:cNvPr id="19" name="矩形 18"/>
+                <p:cNvSpPr>
+                  <a:spLocks noRot="1" noChangeAspect="1" noMove="1" noResize="1" noEditPoints="1" noAdjustHandles="1" noChangeArrowheads="1" noChangeShapeType="1" noTextEdit="1"/>
+                </p:cNvSpPr>
+                <p:nvPr/>
+              </p:nvSpPr>
+              <p:spPr>
+                <a:xfrm>
+                  <a:off x="8940" y="5877"/>
+                  <a:ext cx="2139" cy="937"/>
+                </a:xfrm>
+                <a:prstGeom prst="rect">
+                  <a:avLst/>
+                </a:prstGeom>
+                <a:blipFill rotWithShape="1">
+                  <a:blip r:embed="rId2"/>
+                </a:blipFill>
+                <a:ln w="19050">
+                  <a:solidFill>
+                    <a:schemeClr val="tx1"/>
+                  </a:solidFill>
+                </a:ln>
+                <a:extLst>
+                  <a:ext uri="{909E8E84-426E-40DD-AFC4-6F175D3DCCD1}">
+                    <a14:hiddenFill xmlns:a14="http://schemas.microsoft.com/office/drawing/2010/main">
+                      <a:solidFill>
+                        <a:schemeClr val="accent1"/>
+                      </a:solidFill>
+                    </a14:hiddenFill>
+                  </a:ext>
+                </a:extLst>
+              </p:spPr>
+              <p:style>
+                <a:lnRef idx="2">
+                  <a:schemeClr val="accent1">
+                    <a:lumMod val="75000"/>
+                  </a:schemeClr>
+                </a:lnRef>
+                <a:fillRef idx="1">
+                  <a:schemeClr val="accent1"/>
+                </a:fillRef>
+                <a:effectRef idx="0">
+                  <a:srgbClr val="FFFFFF"/>
+                </a:effectRef>
+                <a:fontRef idx="minor">
+                  <a:schemeClr val="lt1"/>
+                </a:fontRef>
+              </p:style>
+              <p:txBody>
+                <a:bodyPr/>
+                <a:lstStyle/>
+                <a:p>
+                  <a:r>
+                    <a:rPr lang="zh-CN" altLang="en-US">
+                      <a:noFill/>
+                    </a:rPr>
+                    <a:t> </a:t>
+                  </a:r>
+                </a:p>
+              </p:txBody>
+            </p:sp>
+          </mc:Fallback>
+        </mc:AlternateContent>
+        <mc:AlternateContent xmlns:mc="http://schemas.openxmlformats.org/markup-compatibility/2006">
+          <mc:Choice xmlns:a14="http://schemas.microsoft.com/office/drawing/2010/main" Requires="a14">
+            <p:sp>
+              <p:nvSpPr>
+                <p:cNvPr id="24" name="菱形 23"/>
+                <p:cNvSpPr/>
+                <p:nvPr/>
+              </p:nvSpPr>
+              <p:spPr>
+                <a:xfrm>
+                  <a:off x="3681" y="5755"/>
+                  <a:ext cx="2846" cy="1182"/>
+                </a:xfrm>
+                <a:prstGeom prst="diamond">
+                  <a:avLst/>
+                </a:prstGeom>
+                <a:noFill/>
+                <a:ln w="19050">
+                  <a:solidFill>
+                    <a:schemeClr val="tx1"/>
+                  </a:solidFill>
+                </a:ln>
+                <a:extLst>
+                  <a:ext uri="{909E8E84-426E-40DD-AFC4-6F175D3DCCD1}">
+                    <a14:hiddenFill xmlns:a14="http://schemas.microsoft.com/office/drawing/2010/main">
+                      <a:solidFill>
+                        <a:schemeClr val="accent1"/>
+                      </a:solidFill>
+                    </a14:hiddenFill>
+                  </a:ext>
+                </a:extLst>
+              </p:spPr>
+              <p:style>
+                <a:lnRef idx="2">
+                  <a:schemeClr val="accent1">
+                    <a:lumMod val="75000"/>
+                  </a:schemeClr>
+                </a:lnRef>
+                <a:fillRef idx="1">
+                  <a:schemeClr val="accent1"/>
+                </a:fillRef>
+                <a:effectRef idx="0">
+                  <a:srgbClr val="FFFFFF"/>
+                </a:effectRef>
+                <a:fontRef idx="minor">
+                  <a:schemeClr val="lt1"/>
+                </a:fontRef>
+              </p:style>
+              <p:txBody>
+                <a:bodyPr rtlCol="0" anchor="ctr"/>
+                <a:p>
+                  <a:pPr algn="ctr"/>
+                  <a14:m>
+                    <m:oMath xmlns:m="http://schemas.openxmlformats.org/officeDocument/2006/math">
+                      <m:sSub>
+                        <m:sSubPr>
+                          <m:ctrlPr>
+                            <a:rPr lang="en-US" altLang="zh-CN" sz="1500" i="1">
+                              <a:solidFill>
+                                <a:schemeClr val="tx1"/>
+                              </a:solidFill>
+                              <a:latin typeface="Cambria Math" panose="02040503050406030204" charset="0"/>
+                              <a:cs typeface="Cambria Math" panose="02040503050406030204" charset="0"/>
+                            </a:rPr>
+                          </m:ctrlPr>
+                        </m:sSubPr>
+                        <m:e>
+                          <m:r>
+                            <a:rPr lang="en-US" altLang="zh-CN" sz="1500" i="1">
+                              <a:solidFill>
+                                <a:schemeClr val="tx1"/>
+                              </a:solidFill>
+                              <a:latin typeface="Cambria Math" panose="02040503050406030204" charset="0"/>
+                              <a:cs typeface="Cambria Math" panose="02040503050406030204" charset="0"/>
+                            </a:rPr>
+                            <m:t>𝑡</m:t>
+                          </m:r>
+                        </m:e>
+                        <m:sub>
+                          <m:r>
+                            <a:rPr lang="en-US" altLang="zh-CN" sz="1500" i="1">
+                              <a:solidFill>
+                                <a:schemeClr val="tx1"/>
+                              </a:solidFill>
+                              <a:latin typeface="Cambria Math" panose="02040503050406030204" charset="0"/>
+                              <a:cs typeface="Cambria Math" panose="02040503050406030204" charset="0"/>
+                            </a:rPr>
+                            <m:t>𝑗𝑖</m:t>
+                          </m:r>
+                        </m:sub>
+                      </m:sSub>
+                    </m:oMath>
+                  </a14:m>
+                  <a:r>
+                    <a:rPr lang="zh-CN" altLang="en-US" sz="1500">
+                      <a:solidFill>
+                        <a:schemeClr val="tx1"/>
+                      </a:solidFill>
+                      <a:latin typeface="Cambria Math" panose="02040503050406030204" charset="0"/>
+                      <a:cs typeface="Cambria Math" panose="02040503050406030204" charset="0"/>
+                    </a:rPr>
+                    <a:t>足够？</a:t>
+                  </a:r>
+                  <a:endParaRPr lang="zh-CN" altLang="en-US" sz="1500">
+                    <a:solidFill>
+                      <a:schemeClr val="tx1"/>
+                    </a:solidFill>
+                    <a:latin typeface="Cambria Math" panose="02040503050406030204" charset="0"/>
+                    <a:cs typeface="Cambria Math" panose="02040503050406030204" charset="0"/>
+                  </a:endParaRPr>
+                </a:p>
+              </p:txBody>
+            </p:sp>
+          </mc:Choice>
+          <mc:Fallback>
+            <p:sp>
+              <p:nvSpPr>
+                <p:cNvPr id="24" name="菱形 23"/>
+                <p:cNvSpPr>
+                  <a:spLocks noRot="1" noChangeAspect="1" noMove="1" noResize="1" noEditPoints="1" noAdjustHandles="1" noChangeArrowheads="1" noChangeShapeType="1" noTextEdit="1"/>
+                </p:cNvSpPr>
+                <p:nvPr/>
+              </p:nvSpPr>
+              <p:spPr>
+                <a:xfrm>
+                  <a:off x="3681" y="5755"/>
+                  <a:ext cx="2846" cy="1182"/>
+                </a:xfrm>
+                <a:prstGeom prst="diamond">
+                  <a:avLst/>
+                </a:prstGeom>
+                <a:blipFill rotWithShape="1">
+                  <a:blip r:embed="rId3"/>
+                </a:blipFill>
+                <a:ln w="19050">
+                  <a:solidFill>
+                    <a:schemeClr val="tx1"/>
+                  </a:solidFill>
+                </a:ln>
+                <a:extLst>
+                  <a:ext uri="{909E8E84-426E-40DD-AFC4-6F175D3DCCD1}">
+                    <a14:hiddenFill xmlns:a14="http://schemas.microsoft.com/office/drawing/2010/main">
+                      <a:solidFill>
+                        <a:schemeClr val="accent1"/>
+                      </a:solidFill>
+                    </a14:hiddenFill>
+                  </a:ext>
+                </a:extLst>
+              </p:spPr>
+              <p:style>
+                <a:lnRef idx="2">
+                  <a:schemeClr val="accent1">
+                    <a:lumMod val="75000"/>
+                  </a:schemeClr>
+                </a:lnRef>
+                <a:fillRef idx="1">
+                  <a:schemeClr val="accent1"/>
+                </a:fillRef>
+                <a:effectRef idx="0">
+                  <a:srgbClr val="FFFFFF"/>
+                </a:effectRef>
+                <a:fontRef idx="minor">
+                  <a:schemeClr val="lt1"/>
+                </a:fontRef>
+              </p:style>
+              <p:txBody>
+                <a:bodyPr/>
+                <a:lstStyle/>
+                <a:p>
+                  <a:r>
+                    <a:rPr lang="zh-CN" altLang="en-US">
+                      <a:noFill/>
+                    </a:rPr>
+                    <a:t> </a:t>
+                  </a:r>
+                </a:p>
+              </p:txBody>
+            </p:sp>
+          </mc:Fallback>
+        </mc:AlternateContent>
+        <p:cxnSp>
+          <p:nvCxnSpPr>
+            <p:cNvPr id="25" name="直接箭头连接符 24"/>
+            <p:cNvCxnSpPr>
+              <a:stCxn id="17" idx="2"/>
+              <a:endCxn id="24" idx="0"/>
+            </p:cNvCxnSpPr>
+            <p:nvPr/>
+          </p:nvCxnSpPr>
+          <p:spPr>
+            <a:xfrm>
+              <a:off x="5104" y="5192"/>
+              <a:ext cx="0" cy="563"/>
+            </a:xfrm>
+            <a:prstGeom prst="straightConnector1">
+              <a:avLst/>
+            </a:prstGeom>
+            <a:ln w="19050">
+              <a:solidFill>
+                <a:schemeClr val="tx1"/>
+              </a:solidFill>
+              <a:tailEnd type="arrow"/>
+            </a:ln>
+          </p:spPr>
+          <p:style>
+            <a:lnRef idx="2">
+              <a:schemeClr val="accent1"/>
+            </a:lnRef>
+            <a:fillRef idx="0">
+              <a:srgbClr val="FFFFFF"/>
+            </a:fillRef>
+            <a:effectRef idx="0">
+              <a:srgbClr val="FFFFFF"/>
+            </a:effectRef>
+            <a:fontRef idx="minor">
+              <a:schemeClr val="tx1"/>
+            </a:fontRef>
+          </p:style>
+        </p:cxnSp>
+        <mc:AlternateContent xmlns:mc="http://schemas.openxmlformats.org/markup-compatibility/2006">
+          <mc:Choice xmlns:a14="http://schemas.microsoft.com/office/drawing/2010/main" Requires="a14">
+            <p:sp>
+              <p:nvSpPr>
+                <p:cNvPr id="27" name="矩形 26"/>
+                <p:cNvSpPr/>
+                <p:nvPr/>
+              </p:nvSpPr>
+              <p:spPr>
+                <a:xfrm>
+                  <a:off x="6763" y="7179"/>
+                  <a:ext cx="3148" cy="937"/>
+                </a:xfrm>
+                <a:prstGeom prst="rect">
+                  <a:avLst/>
+                </a:prstGeom>
+                <a:noFill/>
+                <a:ln w="19050">
+                  <a:solidFill>
+                    <a:schemeClr val="tx1"/>
+                  </a:solidFill>
+                </a:ln>
+                <a:extLst>
+                  <a:ext uri="{909E8E84-426E-40DD-AFC4-6F175D3DCCD1}">
+                    <a14:hiddenFill xmlns:a14="http://schemas.microsoft.com/office/drawing/2010/main">
+                      <a:solidFill>
+                        <a:schemeClr val="accent1"/>
+                      </a:solidFill>
+                    </a14:hiddenFill>
+                  </a:ext>
+                </a:extLst>
+              </p:spPr>
+              <p:style>
+                <a:lnRef idx="2">
+                  <a:schemeClr val="accent1">
+                    <a:lumMod val="75000"/>
+                  </a:schemeClr>
+                </a:lnRef>
+                <a:fillRef idx="1">
+                  <a:schemeClr val="accent1"/>
+                </a:fillRef>
+                <a:effectRef idx="0">
+                  <a:srgbClr val="FFFFFF"/>
+                </a:effectRef>
+                <a:fontRef idx="minor">
+                  <a:schemeClr val="lt1"/>
+                </a:fontRef>
+              </p:style>
+              <p:txBody>
+                <a:bodyPr rtlCol="0" anchor="ctr"/>
+                <a:p>
+                  <a:pPr algn="ctr"/>
+                  <a:r>
+                    <a:rPr lang="zh-CN" altLang="en-US" sz="1500">
+                      <a:solidFill>
+                        <a:schemeClr val="tx1"/>
+                      </a:solidFill>
+                      <a:latin typeface="Cambria Math" panose="02040503050406030204" charset="0"/>
+                      <a:cs typeface="Cambria Math" panose="02040503050406030204" charset="0"/>
+                    </a:rPr>
+                    <a:t>构建</a:t>
+                  </a:r>
+                  <a14:m>
+                    <m:oMath xmlns:m="http://schemas.openxmlformats.org/officeDocument/2006/math">
+                      <m:sSub>
+                        <m:sSubPr>
+                          <m:ctrlPr>
+                            <a:rPr lang="en-US" altLang="zh-CN" sz="1500" i="1">
+                              <a:solidFill>
+                                <a:schemeClr val="tx1"/>
+                              </a:solidFill>
+                              <a:latin typeface="Cambria Math" panose="02040503050406030204" charset="0"/>
+                              <a:cs typeface="Cambria Math" panose="02040503050406030204" charset="0"/>
+                            </a:rPr>
+                          </m:ctrlPr>
+                        </m:sSubPr>
+                        <m:e>
+                          <m:r>
+                            <a:rPr lang="en-US" altLang="zh-CN" sz="1500" i="1">
+                              <a:solidFill>
+                                <a:schemeClr val="tx1"/>
+                              </a:solidFill>
+                              <a:latin typeface="Cambria Math" panose="02040503050406030204" charset="0"/>
+                              <a:cs typeface="Cambria Math" panose="02040503050406030204" charset="0"/>
+                            </a:rPr>
+                            <m:t>𝑡</m:t>
+                          </m:r>
+                        </m:e>
+                        <m:sub>
+                          <m:r>
+                            <a:rPr lang="en-US" altLang="zh-CN" sz="1500" i="1">
+                              <a:solidFill>
+                                <a:schemeClr val="tx1"/>
+                              </a:solidFill>
+                              <a:latin typeface="Cambria Math" panose="02040503050406030204" charset="0"/>
+                              <a:cs typeface="Cambria Math" panose="02040503050406030204" charset="0"/>
+                            </a:rPr>
+                            <m:t>𝑗𝑖</m:t>
+                          </m:r>
+                        </m:sub>
+                      </m:sSub>
+                    </m:oMath>
+                  </a14:m>
+                  <a:r>
+                    <a:rPr lang="zh-CN" altLang="en-US" sz="1500">
+                      <a:solidFill>
+                        <a:schemeClr val="tx1"/>
+                      </a:solidFill>
+                      <a:latin typeface="Cambria Math" panose="02040503050406030204" charset="0"/>
+                      <a:cs typeface="Cambria Math" panose="02040503050406030204" charset="0"/>
+                      <a:sym typeface="+mn-ea"/>
+                    </a:rPr>
+                    <a:t>足够优化模型</a:t>
+                  </a:r>
+                  <a:endParaRPr lang="zh-CN" altLang="en-US" sz="1500">
+                    <a:solidFill>
+                      <a:schemeClr val="tx1"/>
+                    </a:solidFill>
+                  </a:endParaRPr>
+                </a:p>
+              </p:txBody>
+            </p:sp>
+          </mc:Choice>
+          <mc:Fallback>
+            <p:sp>
+              <p:nvSpPr>
+                <p:cNvPr id="27" name="矩形 26"/>
+                <p:cNvSpPr>
+                  <a:spLocks noRot="1" noChangeAspect="1" noMove="1" noResize="1" noEditPoints="1" noAdjustHandles="1" noChangeArrowheads="1" noChangeShapeType="1" noTextEdit="1"/>
+                </p:cNvSpPr>
+                <p:nvPr/>
+              </p:nvSpPr>
+              <p:spPr>
+                <a:xfrm>
+                  <a:off x="6763" y="7179"/>
+                  <a:ext cx="3148" cy="937"/>
+                </a:xfrm>
+                <a:prstGeom prst="rect">
+                  <a:avLst/>
+                </a:prstGeom>
+                <a:blipFill rotWithShape="1">
+                  <a:blip r:embed="rId4"/>
+                </a:blipFill>
+                <a:ln w="19050">
+                  <a:solidFill>
+                    <a:schemeClr val="tx1"/>
+                  </a:solidFill>
+                </a:ln>
+                <a:extLst>
+                  <a:ext uri="{909E8E84-426E-40DD-AFC4-6F175D3DCCD1}">
+                    <a14:hiddenFill xmlns:a14="http://schemas.microsoft.com/office/drawing/2010/main">
+                      <a:solidFill>
+                        <a:schemeClr val="accent1"/>
+                      </a:solidFill>
+                    </a14:hiddenFill>
+                  </a:ext>
+                </a:extLst>
+              </p:spPr>
+              <p:style>
+                <a:lnRef idx="2">
+                  <a:schemeClr val="accent1">
+                    <a:lumMod val="75000"/>
+                  </a:schemeClr>
+                </a:lnRef>
+                <a:fillRef idx="1">
+                  <a:schemeClr val="accent1"/>
+                </a:fillRef>
+                <a:effectRef idx="0">
+                  <a:srgbClr val="FFFFFF"/>
+                </a:effectRef>
+                <a:fontRef idx="minor">
+                  <a:schemeClr val="lt1"/>
+                </a:fontRef>
+              </p:style>
+              <p:txBody>
+                <a:bodyPr/>
+                <a:lstStyle/>
+                <a:p>
+                  <a:r>
+                    <a:rPr lang="zh-CN" altLang="en-US">
+                      <a:noFill/>
+                    </a:rPr>
+                    <a:t> </a:t>
+                  </a:r>
+                </a:p>
+              </p:txBody>
+            </p:sp>
+          </mc:Fallback>
+        </mc:AlternateContent>
+        <mc:AlternateContent xmlns:mc="http://schemas.openxmlformats.org/markup-compatibility/2006">
+          <mc:Choice xmlns:a14="http://schemas.microsoft.com/office/drawing/2010/main" Requires="a14">
+            <p:sp>
+              <p:nvSpPr>
+                <p:cNvPr id="28" name="矩形 27"/>
+                <p:cNvSpPr/>
+                <p:nvPr/>
+              </p:nvSpPr>
+              <p:spPr>
+                <a:xfrm>
+                  <a:off x="6763" y="8701"/>
+                  <a:ext cx="3149" cy="937"/>
+                </a:xfrm>
+                <a:prstGeom prst="rect">
+                  <a:avLst/>
+                </a:prstGeom>
+                <a:noFill/>
+                <a:ln w="19050">
+                  <a:solidFill>
+                    <a:schemeClr val="tx1"/>
+                  </a:solidFill>
+                </a:ln>
+                <a:extLst>
+                  <a:ext uri="{909E8E84-426E-40DD-AFC4-6F175D3DCCD1}">
+                    <a14:hiddenFill xmlns:a14="http://schemas.microsoft.com/office/drawing/2010/main">
+                      <a:solidFill>
+                        <a:schemeClr val="accent1"/>
+                      </a:solidFill>
+                    </a14:hiddenFill>
+                  </a:ext>
+                </a:extLst>
+              </p:spPr>
+              <p:style>
+                <a:lnRef idx="2">
+                  <a:schemeClr val="accent1">
+                    <a:lumMod val="75000"/>
+                  </a:schemeClr>
+                </a:lnRef>
+                <a:fillRef idx="1">
+                  <a:schemeClr val="accent1"/>
+                </a:fillRef>
+                <a:effectRef idx="0">
+                  <a:srgbClr val="FFFFFF"/>
+                </a:effectRef>
+                <a:fontRef idx="minor">
+                  <a:schemeClr val="lt1"/>
+                </a:fontRef>
+              </p:style>
+              <p:txBody>
+                <a:bodyPr rtlCol="0" anchor="ctr"/>
+                <a:p>
+                  <a:pPr algn="ctr"/>
+                  <a:r>
+                    <a:rPr lang="zh-CN" altLang="en-US" sz="1500">
+                      <a:solidFill>
+                        <a:schemeClr val="tx1"/>
+                      </a:solidFill>
+                      <a:latin typeface="Cambria Math" panose="02040503050406030204" charset="0"/>
+                      <a:cs typeface="Cambria Math" panose="02040503050406030204" charset="0"/>
+                    </a:rPr>
+                    <a:t>构建</a:t>
+                  </a:r>
+                  <a14:m>
+                    <m:oMath xmlns:m="http://schemas.openxmlformats.org/officeDocument/2006/math">
+                      <m:sSub>
+                        <m:sSubPr>
+                          <m:ctrlPr>
+                            <a:rPr lang="en-US" altLang="zh-CN" sz="1500" i="1">
+                              <a:solidFill>
+                                <a:schemeClr val="tx1"/>
+                              </a:solidFill>
+                              <a:latin typeface="Cambria Math" panose="02040503050406030204" charset="0"/>
+                              <a:cs typeface="Cambria Math" panose="02040503050406030204" charset="0"/>
+                            </a:rPr>
+                          </m:ctrlPr>
+                        </m:sSubPr>
+                        <m:e>
+                          <m:r>
+                            <a:rPr lang="en-US" altLang="zh-CN" sz="1500" i="1">
+                              <a:solidFill>
+                                <a:schemeClr val="tx1"/>
+                              </a:solidFill>
+                              <a:latin typeface="Cambria Math" panose="02040503050406030204" charset="0"/>
+                              <a:cs typeface="Cambria Math" panose="02040503050406030204" charset="0"/>
+                            </a:rPr>
+                            <m:t>𝑡</m:t>
+                          </m:r>
+                        </m:e>
+                        <m:sub>
+                          <m:r>
+                            <a:rPr lang="en-US" altLang="zh-CN" sz="1500" i="1">
+                              <a:solidFill>
+                                <a:schemeClr val="tx1"/>
+                              </a:solidFill>
+                              <a:latin typeface="Cambria Math" panose="02040503050406030204" charset="0"/>
+                              <a:cs typeface="Cambria Math" panose="02040503050406030204" charset="0"/>
+                            </a:rPr>
+                            <m:t>𝑗𝑖</m:t>
+                          </m:r>
+                        </m:sub>
+                      </m:sSub>
+                    </m:oMath>
+                  </a14:m>
+                  <a:r>
+                    <a:rPr lang="zh-CN" altLang="en-US" sz="1500">
+                      <a:solidFill>
+                        <a:schemeClr val="tx1"/>
+                      </a:solidFill>
+                      <a:latin typeface="Cambria Math" panose="02040503050406030204" charset="0"/>
+                      <a:cs typeface="Cambria Math" panose="02040503050406030204" charset="0"/>
+                    </a:rPr>
+                    <a:t>不</a:t>
+                  </a:r>
+                  <a:r>
+                    <a:rPr lang="zh-CN" altLang="en-US" sz="1500">
+                      <a:solidFill>
+                        <a:schemeClr val="tx1"/>
+                      </a:solidFill>
+                      <a:latin typeface="Cambria Math" panose="02040503050406030204" charset="0"/>
+                      <a:cs typeface="Cambria Math" panose="02040503050406030204" charset="0"/>
+                      <a:sym typeface="+mn-ea"/>
+                    </a:rPr>
+                    <a:t>足优化模型</a:t>
+                  </a:r>
+                  <a:endParaRPr lang="zh-CN" altLang="en-US" sz="1500">
+                    <a:solidFill>
+                      <a:schemeClr val="tx1"/>
+                    </a:solidFill>
+                  </a:endParaRPr>
+                </a:p>
+              </p:txBody>
+            </p:sp>
+          </mc:Choice>
+          <mc:Fallback>
+            <p:sp>
+              <p:nvSpPr>
+                <p:cNvPr id="28" name="矩形 27"/>
+                <p:cNvSpPr>
+                  <a:spLocks noRot="1" noChangeAspect="1" noMove="1" noResize="1" noEditPoints="1" noAdjustHandles="1" noChangeArrowheads="1" noChangeShapeType="1" noTextEdit="1"/>
+                </p:cNvSpPr>
+                <p:nvPr/>
+              </p:nvSpPr>
+              <p:spPr>
+                <a:xfrm>
+                  <a:off x="6763" y="8701"/>
+                  <a:ext cx="3149" cy="937"/>
+                </a:xfrm>
+                <a:prstGeom prst="rect">
+                  <a:avLst/>
+                </a:prstGeom>
+                <a:blipFill rotWithShape="1">
+                  <a:blip r:embed="rId5"/>
+                </a:blipFill>
+                <a:ln w="19050">
+                  <a:solidFill>
+                    <a:schemeClr val="tx1"/>
+                  </a:solidFill>
+                </a:ln>
+                <a:extLst>
+                  <a:ext uri="{909E8E84-426E-40DD-AFC4-6F175D3DCCD1}">
+                    <a14:hiddenFill xmlns:a14="http://schemas.microsoft.com/office/drawing/2010/main">
+                      <a:solidFill>
+                        <a:schemeClr val="accent1"/>
+                      </a:solidFill>
+                    </a14:hiddenFill>
+                  </a:ext>
+                </a:extLst>
+              </p:spPr>
+              <p:style>
+                <a:lnRef idx="2">
+                  <a:schemeClr val="accent1">
+                    <a:lumMod val="75000"/>
+                  </a:schemeClr>
+                </a:lnRef>
+                <a:fillRef idx="1">
+                  <a:schemeClr val="accent1"/>
+                </a:fillRef>
+                <a:effectRef idx="0">
+                  <a:srgbClr val="FFFFFF"/>
+                </a:effectRef>
+                <a:fontRef idx="minor">
+                  <a:schemeClr val="lt1"/>
+                </a:fontRef>
+              </p:style>
+              <p:txBody>
+                <a:bodyPr/>
+                <a:lstStyle/>
+                <a:p>
+                  <a:r>
+                    <a:rPr lang="zh-CN" altLang="en-US">
+                      <a:noFill/>
+                    </a:rPr>
+                    <a:t> </a:t>
+                  </a:r>
+                </a:p>
+              </p:txBody>
+            </p:sp>
+          </mc:Fallback>
+        </mc:AlternateContent>
+        <p:cxnSp>
+          <p:nvCxnSpPr>
+            <p:cNvPr id="29" name="肘形连接符 28"/>
+            <p:cNvCxnSpPr>
+              <a:stCxn id="24" idx="1"/>
+              <a:endCxn id="28" idx="1"/>
+            </p:cNvCxnSpPr>
+            <p:nvPr/>
+          </p:nvCxnSpPr>
+          <p:spPr>
+            <a:xfrm rot="10800000" flipH="1" flipV="1">
+              <a:off x="3681" y="6346"/>
+              <a:ext cx="3082" cy="2824"/>
+            </a:xfrm>
+            <a:prstGeom prst="bentConnector3">
+              <a:avLst>
+                <a:gd name="adj1" fmla="val -12167"/>
+              </a:avLst>
+            </a:prstGeom>
+            <a:ln w="19050">
+              <a:solidFill>
+                <a:schemeClr val="tx1"/>
+              </a:solidFill>
+              <a:tailEnd type="arrow"/>
+            </a:ln>
+          </p:spPr>
+          <p:style>
+            <a:lnRef idx="2">
+              <a:schemeClr val="accent1"/>
+            </a:lnRef>
+            <a:fillRef idx="0">
+              <a:srgbClr val="FFFFFF"/>
+            </a:fillRef>
+            <a:effectRef idx="0">
+              <a:srgbClr val="FFFFFF"/>
+            </a:effectRef>
+            <a:fontRef idx="minor">
+              <a:schemeClr val="tx1"/>
+            </a:fontRef>
+          </p:style>
+        </p:cxnSp>
+        <p:cxnSp>
+          <p:nvCxnSpPr>
+            <p:cNvPr id="30" name="肘形连接符 29"/>
+            <p:cNvCxnSpPr>
+              <a:stCxn id="24" idx="2"/>
+              <a:endCxn id="27" idx="1"/>
+            </p:cNvCxnSpPr>
+            <p:nvPr/>
+          </p:nvCxnSpPr>
+          <p:spPr>
+            <a:xfrm rot="5400000" flipV="1">
+              <a:off x="5578" y="6463"/>
+              <a:ext cx="711" cy="1659"/>
+            </a:xfrm>
+            <a:prstGeom prst="bentConnector2">
+              <a:avLst/>
+            </a:prstGeom>
+            <a:ln w="19050">
+              <a:solidFill>
+                <a:schemeClr val="tx1"/>
+              </a:solidFill>
+              <a:tailEnd type="arrow"/>
+            </a:ln>
+          </p:spPr>
+          <p:style>
+            <a:lnRef idx="2">
+              <a:schemeClr val="accent1"/>
+            </a:lnRef>
+            <a:fillRef idx="0">
+              <a:srgbClr val="FFFFFF"/>
+            </a:fillRef>
+            <a:effectRef idx="0">
+              <a:srgbClr val="FFFFFF"/>
+            </a:effectRef>
+            <a:fontRef idx="minor">
+              <a:schemeClr val="tx1"/>
+            </a:fontRef>
+          </p:style>
+        </p:cxnSp>
+        <p:sp>
+          <p:nvSpPr>
+            <p:cNvPr id="32" name="矩形 31"/>
+            <p:cNvSpPr/>
+            <p:nvPr/>
+          </p:nvSpPr>
+          <p:spPr>
+            <a:xfrm>
+              <a:off x="12407" y="7882"/>
+              <a:ext cx="2139" cy="937"/>
+            </a:xfrm>
+            <a:prstGeom prst="rect">
+              <a:avLst/>
+            </a:prstGeom>
+            <a:noFill/>
+            <a:ln w="19050">
+              <a:solidFill>
+                <a:schemeClr val="tx1"/>
+              </a:solidFill>
+            </a:ln>
+            <a:extLst>
+              <a:ext uri="{909E8E84-426E-40DD-AFC4-6F175D3DCCD1}">
+                <a14:hiddenFill xmlns:a14="http://schemas.microsoft.com/office/drawing/2010/main">
+                  <a:solidFill>
+                    <a:schemeClr val="accent1"/>
+                  </a:solidFill>
+                </a14:hiddenFill>
+              </a:ext>
+            </a:extLst>
+          </p:spPr>
+          <p:style>
+            <a:lnRef idx="2">
+              <a:schemeClr val="accent1">
+                <a:lumMod val="75000"/>
+              </a:schemeClr>
+            </a:lnRef>
+            <a:fillRef idx="1">
+              <a:schemeClr val="accent1"/>
+            </a:fillRef>
+            <a:effectRef idx="0">
+              <a:srgbClr val="FFFFFF"/>
+            </a:effectRef>
+            <a:fontRef idx="minor">
+              <a:schemeClr val="lt1"/>
+            </a:fontRef>
+          </p:style>
+          <p:txBody>
+            <a:bodyPr rtlCol="0" anchor="ctr"/>
+            <a:p>
+              <a:pPr algn="ctr"/>
+              <a:r>
+                <a:rPr lang="zh-CN" sz="1500">
+                  <a:solidFill>
+                    <a:schemeClr val="tx1"/>
+                  </a:solidFill>
+                </a:rPr>
+                <a:t>金字塔由高到低优化</a:t>
+              </a:r>
+              <a:endParaRPr lang="zh-CN" sz="1500">
+                <a:solidFill>
+                  <a:schemeClr val="tx1"/>
+                </a:solidFill>
+              </a:endParaRPr>
+            </a:p>
+          </p:txBody>
+        </p:sp>
+        <p:cxnSp>
+          <p:nvCxnSpPr>
+            <p:cNvPr id="33" name="肘形连接符 32"/>
+            <p:cNvCxnSpPr>
+              <a:stCxn id="27" idx="3"/>
+              <a:endCxn id="32" idx="1"/>
+            </p:cNvCxnSpPr>
+            <p:nvPr/>
+          </p:nvCxnSpPr>
+          <p:spPr>
+            <a:xfrm>
+              <a:off x="9911" y="7648"/>
+              <a:ext cx="2496" cy="703"/>
+            </a:xfrm>
+            <a:prstGeom prst="bentConnector3">
+              <a:avLst>
+                <a:gd name="adj1" fmla="val 50000"/>
+              </a:avLst>
+            </a:prstGeom>
+            <a:ln w="19050">
+              <a:solidFill>
+                <a:schemeClr val="tx1"/>
+              </a:solidFill>
+              <a:tailEnd type="arrow"/>
+            </a:ln>
+          </p:spPr>
+          <p:style>
+            <a:lnRef idx="2">
+              <a:schemeClr val="accent1"/>
+            </a:lnRef>
+            <a:fillRef idx="0">
+              <a:srgbClr val="FFFFFF"/>
+            </a:fillRef>
+            <a:effectRef idx="0">
+              <a:srgbClr val="FFFFFF"/>
+            </a:effectRef>
+            <a:fontRef idx="minor">
+              <a:schemeClr val="tx1"/>
+            </a:fontRef>
+          </p:style>
+        </p:cxnSp>
+        <p:cxnSp>
+          <p:nvCxnSpPr>
+            <p:cNvPr id="34" name="肘形连接符 33"/>
+            <p:cNvCxnSpPr>
+              <a:stCxn id="28" idx="3"/>
+              <a:endCxn id="32" idx="1"/>
+            </p:cNvCxnSpPr>
+            <p:nvPr/>
+          </p:nvCxnSpPr>
+          <p:spPr>
+            <a:xfrm flipV="1">
+              <a:off x="9912" y="8351"/>
+              <a:ext cx="2495" cy="819"/>
+            </a:xfrm>
+            <a:prstGeom prst="bentConnector3">
+              <a:avLst>
+                <a:gd name="adj1" fmla="val 50020"/>
+              </a:avLst>
+            </a:prstGeom>
+            <a:ln w="19050">
+              <a:solidFill>
+                <a:schemeClr val="tx1"/>
+              </a:solidFill>
+              <a:tailEnd type="arrow"/>
+            </a:ln>
+          </p:spPr>
+          <p:style>
+            <a:lnRef idx="2">
+              <a:schemeClr val="accent1"/>
+            </a:lnRef>
+            <a:fillRef idx="0">
+              <a:srgbClr val="FFFFFF"/>
+            </a:fillRef>
+            <a:effectRef idx="0">
+              <a:srgbClr val="FFFFFF"/>
+            </a:effectRef>
+            <a:fontRef idx="minor">
+              <a:schemeClr val="tx1"/>
+            </a:fontRef>
+          </p:style>
+        </p:cxnSp>
+        <p:sp>
+          <p:nvSpPr>
+            <p:cNvPr id="35" name="菱形 34"/>
+            <p:cNvSpPr/>
+            <p:nvPr/>
+          </p:nvSpPr>
+          <p:spPr>
+            <a:xfrm>
+              <a:off x="12036" y="4120"/>
+              <a:ext cx="2846" cy="1182"/>
+            </a:xfrm>
+            <a:prstGeom prst="diamond">
+              <a:avLst/>
+            </a:prstGeom>
+            <a:noFill/>
+            <a:ln w="19050">
+              <a:solidFill>
+                <a:schemeClr val="tx1"/>
+              </a:solidFill>
+            </a:ln>
+            <a:extLst>
+              <a:ext uri="{909E8E84-426E-40DD-AFC4-6F175D3DCCD1}">
+                <a14:hiddenFill xmlns:a14="http://schemas.microsoft.com/office/drawing/2010/main">
+                  <a:solidFill>
+                    <a:schemeClr val="accent1"/>
+                  </a:solidFill>
+                </a14:hiddenFill>
+              </a:ext>
+            </a:extLst>
+          </p:spPr>
+          <p:style>
+            <a:lnRef idx="2">
+              <a:schemeClr val="accent1">
+                <a:lumMod val="75000"/>
+              </a:schemeClr>
+            </a:lnRef>
+            <a:fillRef idx="1">
+              <a:schemeClr val="accent1"/>
+            </a:fillRef>
+            <a:effectRef idx="0">
+              <a:srgbClr val="FFFFFF"/>
+            </a:effectRef>
+            <a:fontRef idx="minor">
+              <a:schemeClr val="lt1"/>
+            </a:fontRef>
+          </p:style>
+          <p:txBody>
+            <a:bodyPr rtlCol="0" anchor="ctr"/>
+            <a:p>
+              <a:pPr algn="ctr"/>
+              <a:r>
+                <a:rPr lang="zh-CN" altLang="en-US" sz="1400">
+                  <a:solidFill>
+                    <a:schemeClr val="tx1"/>
+                  </a:solidFill>
+                </a:rPr>
+                <a:t>达到初始化要求？</a:t>
+              </a:r>
+              <a:endParaRPr lang="zh-CN" altLang="en-US" sz="1400">
+                <a:solidFill>
+                  <a:schemeClr val="tx1"/>
+                </a:solidFill>
+              </a:endParaRPr>
+            </a:p>
+          </p:txBody>
+        </p:sp>
+        <p:cxnSp>
+          <p:nvCxnSpPr>
+            <p:cNvPr id="36" name="直接箭头连接符 35"/>
+            <p:cNvCxnSpPr>
+              <a:stCxn id="32" idx="0"/>
+              <a:endCxn id="49" idx="2"/>
+            </p:cNvCxnSpPr>
+            <p:nvPr/>
+          </p:nvCxnSpPr>
+          <p:spPr>
+            <a:xfrm flipV="1">
+              <a:off x="13477" y="7061"/>
+              <a:ext cx="0" cy="821"/>
+            </a:xfrm>
+            <a:prstGeom prst="straightConnector1">
+              <a:avLst/>
+            </a:prstGeom>
+            <a:ln w="19050">
+              <a:solidFill>
+                <a:schemeClr val="tx1"/>
+              </a:solidFill>
+              <a:tailEnd type="arrow"/>
+            </a:ln>
+          </p:spPr>
+          <p:style>
+            <a:lnRef idx="2">
+              <a:schemeClr val="accent1"/>
+            </a:lnRef>
+            <a:fillRef idx="0">
+              <a:srgbClr val="FFFFFF"/>
+            </a:fillRef>
+            <a:effectRef idx="0">
+              <a:srgbClr val="FFFFFF"/>
+            </a:effectRef>
+            <a:fontRef idx="minor">
+              <a:schemeClr val="tx1"/>
+            </a:fontRef>
+          </p:style>
+        </p:cxnSp>
+        <p:sp>
+          <p:nvSpPr>
+            <p:cNvPr id="37" name="矩形 36"/>
+            <p:cNvSpPr/>
+            <p:nvPr/>
+          </p:nvSpPr>
+          <p:spPr>
+            <a:xfrm>
+              <a:off x="1771" y="2429"/>
+              <a:ext cx="13433" cy="7488"/>
+            </a:xfrm>
+            <a:prstGeom prst="rect">
+              <a:avLst/>
+            </a:prstGeom>
+            <a:noFill/>
+            <a:ln w="19050">
+              <a:solidFill>
+                <a:schemeClr val="tx1"/>
+              </a:solidFill>
+              <a:prstDash val="dashDot"/>
+            </a:ln>
+            <a:extLst>
+              <a:ext uri="{909E8E84-426E-40DD-AFC4-6F175D3DCCD1}">
+                <a14:hiddenFill xmlns:a14="http://schemas.microsoft.com/office/drawing/2010/main">
+                  <a:solidFill>
+                    <a:schemeClr val="accent1"/>
+                  </a:solidFill>
+                </a14:hiddenFill>
+              </a:ext>
+            </a:extLst>
+          </p:spPr>
+          <p:style>
+            <a:lnRef idx="2">
+              <a:schemeClr val="accent1">
+                <a:lumMod val="75000"/>
+              </a:schemeClr>
+            </a:lnRef>
+            <a:fillRef idx="1">
+              <a:schemeClr val="accent1"/>
+            </a:fillRef>
+            <a:effectRef idx="0">
+              <a:srgbClr val="FFFFFF"/>
+            </a:effectRef>
+            <a:fontRef idx="minor">
+              <a:schemeClr val="lt1"/>
+            </a:fontRef>
+          </p:style>
+          <p:txBody>
+            <a:bodyPr rtlCol="0" anchor="ctr"/>
+            <a:p>
+              <a:pPr algn="ctr"/>
+              <a:endParaRPr lang="zh-CN" altLang="en-US"/>
+            </a:p>
+          </p:txBody>
+        </p:sp>
+        <p:cxnSp>
+          <p:nvCxnSpPr>
+            <p:cNvPr id="39" name="直接箭头连接符 38"/>
+            <p:cNvCxnSpPr>
+              <a:endCxn id="7" idx="1"/>
+            </p:cNvCxnSpPr>
+            <p:nvPr/>
+          </p:nvCxnSpPr>
+          <p:spPr>
+            <a:xfrm>
+              <a:off x="1770" y="1711"/>
+              <a:ext cx="1533" cy="0"/>
+            </a:xfrm>
+            <a:prstGeom prst="straightConnector1">
+              <a:avLst/>
+            </a:prstGeom>
+            <a:ln w="19050">
+              <a:solidFill>
+                <a:schemeClr val="tx1"/>
+              </a:solidFill>
+              <a:tailEnd type="arrow"/>
+            </a:ln>
+          </p:spPr>
+          <p:style>
+            <a:lnRef idx="2">
+              <a:schemeClr val="accent1"/>
+            </a:lnRef>
+            <a:fillRef idx="0">
+              <a:srgbClr val="FFFFFF"/>
+            </a:fillRef>
+            <a:effectRef idx="0">
+              <a:srgbClr val="FFFFFF"/>
+            </a:effectRef>
+            <a:fontRef idx="minor">
+              <a:schemeClr val="tx1"/>
+            </a:fontRef>
+          </p:style>
+        </p:cxnSp>
+        <p:cxnSp>
+          <p:nvCxnSpPr>
+            <p:cNvPr id="44" name="直接箭头连接符 43"/>
+            <p:cNvCxnSpPr>
+              <a:stCxn id="35" idx="3"/>
+            </p:cNvCxnSpPr>
+            <p:nvPr/>
+          </p:nvCxnSpPr>
+          <p:spPr>
+            <a:xfrm>
+              <a:off x="14882" y="4711"/>
+              <a:ext cx="1104" cy="0"/>
+            </a:xfrm>
+            <a:prstGeom prst="straightConnector1">
+              <a:avLst/>
+            </a:prstGeom>
+            <a:ln w="19050">
+              <a:solidFill>
+                <a:schemeClr val="tx1"/>
+              </a:solidFill>
+              <a:tailEnd type="arrow"/>
+            </a:ln>
+          </p:spPr>
+          <p:style>
+            <a:lnRef idx="2">
+              <a:schemeClr val="accent1"/>
+            </a:lnRef>
+            <a:fillRef idx="0">
+              <a:srgbClr val="FFFFFF"/>
+            </a:fillRef>
+            <a:effectRef idx="0">
+              <a:srgbClr val="FFFFFF"/>
+            </a:effectRef>
+            <a:fontRef idx="minor">
+              <a:schemeClr val="tx1"/>
+            </a:fontRef>
+          </p:style>
+        </p:cxnSp>
+        <p:sp>
+          <p:nvSpPr>
+            <p:cNvPr id="46" name="文本框 45"/>
+            <p:cNvSpPr txBox="1"/>
+            <p:nvPr/>
+          </p:nvSpPr>
+          <p:spPr>
+            <a:xfrm>
+              <a:off x="1771" y="2429"/>
+              <a:ext cx="869" cy="3600"/>
+            </a:xfrm>
+            <a:prstGeom prst="rect">
+              <a:avLst/>
+            </a:prstGeom>
+            <a:noFill/>
+            <a:ln>
+              <a:noFill/>
+            </a:ln>
+          </p:spPr>
+          <p:txBody>
+            <a:bodyPr vert="eaVert" wrap="square" rtlCol="0">
+              <a:spAutoFit/>
+            </a:bodyPr>
+            <a:p>
+              <a:r>
+                <a:rPr lang="zh-CN" altLang="en-US" sz="2400" b="1"/>
+                <a:t>初始化器</a:t>
+              </a:r>
+              <a:endParaRPr lang="zh-CN" altLang="en-US" sz="2400" b="1"/>
+            </a:p>
+          </p:txBody>
+        </p:sp>
+        <mc:AlternateContent xmlns:mc="http://schemas.openxmlformats.org/markup-compatibility/2006">
+          <mc:Choice xmlns:a14="http://schemas.microsoft.com/office/drawing/2010/main" Requires="a14">
+            <p:sp>
+              <p:nvSpPr>
+                <p:cNvPr id="49" name="矩形 48"/>
+                <p:cNvSpPr/>
+                <p:nvPr/>
+              </p:nvSpPr>
+              <p:spPr>
+                <a:xfrm>
+                  <a:off x="12407" y="6124"/>
+                  <a:ext cx="2139" cy="937"/>
+                </a:xfrm>
+                <a:prstGeom prst="rect">
+                  <a:avLst/>
+                </a:prstGeom>
+                <a:noFill/>
+                <a:ln w="19050">
+                  <a:solidFill>
+                    <a:schemeClr val="tx1"/>
+                  </a:solidFill>
+                </a:ln>
+                <a:extLst>
+                  <a:ext uri="{909E8E84-426E-40DD-AFC4-6F175D3DCCD1}">
+                    <a14:hiddenFill xmlns:a14="http://schemas.microsoft.com/office/drawing/2010/main">
+                      <a:solidFill>
+                        <a:schemeClr val="accent1"/>
+                      </a:solidFill>
+                    </a14:hiddenFill>
+                  </a:ext>
+                </a:extLst>
+              </p:spPr>
+              <p:style>
+                <a:lnRef idx="2">
+                  <a:schemeClr val="accent1">
+                    <a:lumMod val="75000"/>
+                  </a:schemeClr>
+                </a:lnRef>
+                <a:fillRef idx="1">
+                  <a:schemeClr val="accent1"/>
+                </a:fillRef>
+                <a:effectRef idx="0">
+                  <a:srgbClr val="FFFFFF"/>
+                </a:effectRef>
+                <a:fontRef idx="minor">
+                  <a:schemeClr val="lt1"/>
+                </a:fontRef>
+              </p:style>
+              <p:txBody>
+                <a:bodyPr rtlCol="0" anchor="ctr"/>
+                <a:p>
+                  <a:pPr algn="ctr"/>
+                  <a:r>
+                    <a:rPr lang="zh-CN" sz="1500" b="1">
+                      <a:solidFill>
+                        <a:srgbClr val="C00000"/>
+                      </a:solidFill>
+                    </a:rPr>
+                    <a:t>更新</a:t>
+                  </a:r>
+                  <a14:m>
+                    <m:oMath xmlns:m="http://schemas.openxmlformats.org/officeDocument/2006/math">
+                      <m:sSub>
+                        <m:sSubPr>
+                          <m:ctrlPr>
+                            <a:rPr lang="en-US" altLang="zh-CN" sz="1500" b="1" i="1">
+                              <a:solidFill>
+                                <a:srgbClr val="C00000"/>
+                              </a:solidFill>
+                              <a:latin typeface="Cambria Math" panose="02040503050406030204" charset="0"/>
+                              <a:cs typeface="Cambria Math" panose="02040503050406030204" charset="0"/>
+                            </a:rPr>
+                          </m:ctrlPr>
+                        </m:sSubPr>
+                        <m:e>
+                          <m:r>
+                            <a:rPr lang="en-US" altLang="zh-CN" sz="1500" b="1" i="1">
+                              <a:solidFill>
+                                <a:srgbClr val="C00000"/>
+                              </a:solidFill>
+                              <a:latin typeface="Cambria Math" panose="02040503050406030204" charset="0"/>
+                              <a:cs typeface="Cambria Math" panose="02040503050406030204" charset="0"/>
+                            </a:rPr>
+                            <m:t>𝑹</m:t>
+                          </m:r>
+                        </m:e>
+                        <m:sub>
+                          <m:r>
+                            <a:rPr lang="en-US" altLang="zh-CN" sz="1500" b="1" i="1">
+                              <a:solidFill>
+                                <a:srgbClr val="C00000"/>
+                              </a:solidFill>
+                              <a:latin typeface="Cambria Math" panose="02040503050406030204" charset="0"/>
+                              <a:cs typeface="Cambria Math" panose="02040503050406030204" charset="0"/>
+                            </a:rPr>
+                            <m:t>𝒇</m:t>
+                          </m:r>
+                        </m:sub>
+                      </m:sSub>
+                    </m:oMath>
+                  </a14:m>
+                  <a:r>
+                    <a:rPr lang="zh-CN" altLang="en-US" sz="1500" b="1">
+                      <a:solidFill>
+                        <a:srgbClr val="C00000"/>
+                      </a:solidFill>
+                      <a:latin typeface="Cambria Math" panose="02040503050406030204" charset="0"/>
+                      <a:cs typeface="Cambria Math" panose="02040503050406030204" charset="0"/>
+                    </a:rPr>
+                    <a:t>高层金字塔点逆深度</a:t>
+                  </a:r>
+                  <a:endParaRPr lang="zh-CN" altLang="en-US" sz="1500" b="1">
+                    <a:solidFill>
+                      <a:srgbClr val="C00000"/>
+                    </a:solidFill>
+                    <a:latin typeface="Cambria Math" panose="02040503050406030204" charset="0"/>
+                    <a:cs typeface="Cambria Math" panose="02040503050406030204" charset="0"/>
+                  </a:endParaRPr>
+                </a:p>
+              </p:txBody>
+            </p:sp>
+          </mc:Choice>
+          <mc:Fallback>
+            <p:sp>
+              <p:nvSpPr>
+                <p:cNvPr id="49" name="矩形 48"/>
+                <p:cNvSpPr>
+                  <a:spLocks noRot="1" noChangeAspect="1" noMove="1" noResize="1" noEditPoints="1" noAdjustHandles="1" noChangeArrowheads="1" noChangeShapeType="1" noTextEdit="1"/>
+                </p:cNvSpPr>
+                <p:nvPr/>
+              </p:nvSpPr>
+              <p:spPr>
+                <a:xfrm>
+                  <a:off x="12407" y="6124"/>
+                  <a:ext cx="2139" cy="937"/>
+                </a:xfrm>
+                <a:prstGeom prst="rect">
+                  <a:avLst/>
+                </a:prstGeom>
+                <a:blipFill rotWithShape="1">
+                  <a:blip r:embed="rId6"/>
+                </a:blipFill>
+                <a:ln w="19050">
+                  <a:solidFill>
+                    <a:schemeClr val="tx1"/>
+                  </a:solidFill>
+                </a:ln>
+                <a:extLst>
+                  <a:ext uri="{909E8E84-426E-40DD-AFC4-6F175D3DCCD1}">
+                    <a14:hiddenFill xmlns:a14="http://schemas.microsoft.com/office/drawing/2010/main">
+                      <a:solidFill>
+                        <a:schemeClr val="accent1"/>
+                      </a:solidFill>
+                    </a14:hiddenFill>
+                  </a:ext>
+                </a:extLst>
+              </p:spPr>
+              <p:style>
+                <a:lnRef idx="2">
+                  <a:schemeClr val="accent1">
+                    <a:lumMod val="75000"/>
+                  </a:schemeClr>
+                </a:lnRef>
+                <a:fillRef idx="1">
+                  <a:schemeClr val="accent1"/>
+                </a:fillRef>
+                <a:effectRef idx="0">
+                  <a:srgbClr val="FFFFFF"/>
+                </a:effectRef>
+                <a:fontRef idx="minor">
+                  <a:schemeClr val="lt1"/>
+                </a:fontRef>
+              </p:style>
+              <p:txBody>
+                <a:bodyPr/>
+                <a:lstStyle/>
+                <a:p>
+                  <a:r>
+                    <a:rPr lang="zh-CN" altLang="en-US">
+                      <a:noFill/>
+                    </a:rPr>
+                    <a:t> </a:t>
+                  </a:r>
+                </a:p>
+              </p:txBody>
+            </p:sp>
+          </mc:Fallback>
+        </mc:AlternateContent>
+        <p:cxnSp>
+          <p:nvCxnSpPr>
+            <p:cNvPr id="50" name="直接箭头连接符 49"/>
+            <p:cNvCxnSpPr>
+              <a:stCxn id="49" idx="0"/>
+              <a:endCxn id="35" idx="2"/>
+            </p:cNvCxnSpPr>
+            <p:nvPr/>
+          </p:nvCxnSpPr>
+          <p:spPr>
+            <a:xfrm flipH="1" flipV="1">
+              <a:off x="13459" y="5302"/>
+              <a:ext cx="18" cy="822"/>
+            </a:xfrm>
+            <a:prstGeom prst="straightConnector1">
+              <a:avLst/>
+            </a:prstGeom>
+            <a:ln w="19050">
+              <a:solidFill>
+                <a:schemeClr val="tx1"/>
+              </a:solidFill>
+              <a:tailEnd type="arrow"/>
+            </a:ln>
+          </p:spPr>
+          <p:style>
+            <a:lnRef idx="2">
+              <a:schemeClr val="accent1"/>
+            </a:lnRef>
+            <a:fillRef idx="0">
+              <a:srgbClr val="FFFFFF"/>
+            </a:fillRef>
+            <a:effectRef idx="0">
+              <a:srgbClr val="FFFFFF"/>
+            </a:effectRef>
+            <a:fontRef idx="minor">
+              <a:schemeClr val="tx1"/>
+            </a:fontRef>
+          </p:style>
+        </p:cxnSp>
+        <p:sp>
+          <p:nvSpPr>
+            <p:cNvPr id="51" name="矩形 50"/>
+            <p:cNvSpPr/>
+            <p:nvPr/>
+          </p:nvSpPr>
+          <p:spPr>
+            <a:xfrm>
+              <a:off x="6487" y="4264"/>
+              <a:ext cx="2139" cy="937"/>
+            </a:xfrm>
+            <a:prstGeom prst="rect">
+              <a:avLst/>
+            </a:prstGeom>
+            <a:noFill/>
+            <a:ln w="19050">
+              <a:solidFill>
+                <a:schemeClr val="tx1"/>
+              </a:solidFill>
+            </a:ln>
+            <a:extLst>
+              <a:ext uri="{909E8E84-426E-40DD-AFC4-6F175D3DCCD1}">
+                <a14:hiddenFill xmlns:a14="http://schemas.microsoft.com/office/drawing/2010/main">
+                  <a:solidFill>
+                    <a:schemeClr val="accent1"/>
+                  </a:solidFill>
+                </a14:hiddenFill>
+              </a:ext>
+            </a:extLst>
+          </p:spPr>
+          <p:style>
+            <a:lnRef idx="2">
+              <a:schemeClr val="accent1">
+                <a:lumMod val="75000"/>
+              </a:schemeClr>
+            </a:lnRef>
+            <a:fillRef idx="1">
+              <a:schemeClr val="accent1"/>
+            </a:fillRef>
+            <a:effectRef idx="0">
+              <a:srgbClr val="FFFFFF"/>
+            </a:effectRef>
+            <a:fontRef idx="minor">
+              <a:schemeClr val="lt1"/>
+            </a:fontRef>
+          </p:style>
+          <p:txBody>
+            <a:bodyPr rtlCol="0" anchor="ctr"/>
+            <a:p>
+              <a:pPr algn="ctr"/>
+              <a:r>
+                <a:rPr lang="zh-CN" altLang="en-US" sz="1500" b="1">
+                  <a:solidFill>
+                    <a:srgbClr val="C00000"/>
+                  </a:solidFill>
+                </a:rPr>
+                <a:t>构建相邻点和上层父点关系</a:t>
+              </a:r>
+              <a:endParaRPr lang="zh-CN" altLang="en-US" sz="1500" b="1">
+                <a:solidFill>
+                  <a:srgbClr val="C00000"/>
+                </a:solidFill>
+              </a:endParaRPr>
+            </a:p>
+          </p:txBody>
+        </p:sp>
+        <p:cxnSp>
+          <p:nvCxnSpPr>
+            <p:cNvPr id="52" name="直接箭头连接符 51"/>
+            <p:cNvCxnSpPr>
+              <a:stCxn id="14" idx="1"/>
+              <a:endCxn id="51" idx="3"/>
+            </p:cNvCxnSpPr>
+            <p:nvPr/>
+          </p:nvCxnSpPr>
+          <p:spPr>
+            <a:xfrm flipH="1">
+              <a:off x="8626" y="4724"/>
+              <a:ext cx="314" cy="9"/>
+            </a:xfrm>
+            <a:prstGeom prst="straightConnector1">
+              <a:avLst/>
+            </a:prstGeom>
+            <a:ln w="19050">
+              <a:solidFill>
+                <a:schemeClr val="tx1"/>
+              </a:solidFill>
+              <a:tailEnd type="arrow"/>
+            </a:ln>
+          </p:spPr>
+          <p:style>
+            <a:lnRef idx="2">
+              <a:schemeClr val="accent1"/>
+            </a:lnRef>
+            <a:fillRef idx="0">
+              <a:srgbClr val="FFFFFF"/>
+            </a:fillRef>
+            <a:effectRef idx="0">
+              <a:srgbClr val="FFFFFF"/>
+            </a:effectRef>
+            <a:fontRef idx="minor">
+              <a:schemeClr val="tx1"/>
+            </a:fontRef>
+          </p:style>
+        </p:cxnSp>
+        <p:cxnSp>
+          <p:nvCxnSpPr>
+            <p:cNvPr id="53" name="肘形连接符 52"/>
+            <p:cNvCxnSpPr>
+              <a:stCxn id="51" idx="2"/>
+              <a:endCxn id="19" idx="0"/>
+            </p:cNvCxnSpPr>
+            <p:nvPr/>
+          </p:nvCxnSpPr>
+          <p:spPr>
+            <a:xfrm rot="5400000" flipV="1">
+              <a:off x="8445" y="4312"/>
+              <a:ext cx="676" cy="2453"/>
+            </a:xfrm>
+            <a:prstGeom prst="bentConnector3">
+              <a:avLst>
+                <a:gd name="adj1" fmla="val 49926"/>
+              </a:avLst>
+            </a:prstGeom>
+            <a:ln w="19050">
+              <a:solidFill>
+                <a:schemeClr val="tx1"/>
+              </a:solidFill>
+              <a:tailEnd type="arrow"/>
+            </a:ln>
+          </p:spPr>
+          <p:style>
+            <a:lnRef idx="2">
+              <a:schemeClr val="accent1"/>
+            </a:lnRef>
+            <a:fillRef idx="0">
+              <a:srgbClr val="FFFFFF"/>
+            </a:fillRef>
+            <a:effectRef idx="0">
+              <a:srgbClr val="FFFFFF"/>
+            </a:effectRef>
+            <a:fontRef idx="minor">
+              <a:schemeClr val="tx1"/>
+            </a:fontRef>
+          </p:style>
+        </p:cxnSp>
+        <p:cxnSp>
+          <p:nvCxnSpPr>
+            <p:cNvPr id="54" name="直接箭头连接符 53"/>
+            <p:cNvCxnSpPr>
+              <a:stCxn id="19" idx="1"/>
+              <a:endCxn id="24" idx="3"/>
+            </p:cNvCxnSpPr>
+            <p:nvPr/>
+          </p:nvCxnSpPr>
+          <p:spPr>
+            <a:xfrm flipH="1">
+              <a:off x="6527" y="6346"/>
+              <a:ext cx="2413" cy="0"/>
+            </a:xfrm>
+            <a:prstGeom prst="straightConnector1">
+              <a:avLst/>
+            </a:prstGeom>
+            <a:ln w="19050">
+              <a:solidFill>
+                <a:schemeClr val="tx1"/>
+              </a:solidFill>
+              <a:tailEnd type="arrow"/>
+            </a:ln>
+          </p:spPr>
+          <p:style>
+            <a:lnRef idx="2">
+              <a:schemeClr val="accent1"/>
+            </a:lnRef>
+            <a:fillRef idx="0">
+              <a:srgbClr val="FFFFFF"/>
+            </a:fillRef>
+            <a:effectRef idx="0">
+              <a:srgbClr val="FFFFFF"/>
+            </a:effectRef>
+            <a:fontRef idx="minor">
+              <a:schemeClr val="tx1"/>
+            </a:fontRef>
+          </p:style>
+        </p:cxnSp>
+        <p:cxnSp>
+          <p:nvCxnSpPr>
+            <p:cNvPr id="56" name="肘形连接符 55"/>
+            <p:cNvCxnSpPr>
+              <a:stCxn id="35" idx="0"/>
+              <a:endCxn id="57" idx="0"/>
+            </p:cNvCxnSpPr>
+            <p:nvPr/>
+          </p:nvCxnSpPr>
+          <p:spPr>
+            <a:xfrm rot="16200000" flipV="1">
+              <a:off x="6741" y="-2597"/>
+              <a:ext cx="2409" cy="11025"/>
+            </a:xfrm>
+            <a:prstGeom prst="bentConnector3">
+              <a:avLst>
+                <a:gd name="adj1" fmla="val 140431"/>
+              </a:avLst>
+            </a:prstGeom>
+            <a:ln w="19050">
+              <a:solidFill>
+                <a:schemeClr val="tx1"/>
+              </a:solidFill>
+              <a:tailEnd type="arrow"/>
+            </a:ln>
+          </p:spPr>
+          <p:style>
+            <a:lnRef idx="2">
+              <a:schemeClr val="accent1"/>
+            </a:lnRef>
+            <a:fillRef idx="0">
+              <a:srgbClr val="FFFFFF"/>
+            </a:fillRef>
+            <a:effectRef idx="0">
+              <a:srgbClr val="FFFFFF"/>
+            </a:effectRef>
+            <a:fontRef idx="minor">
+              <a:schemeClr val="tx1"/>
+            </a:fontRef>
+          </p:style>
+        </p:cxnSp>
+        <p:sp>
+          <p:nvSpPr>
+            <p:cNvPr id="57" name="矩形 56"/>
+            <p:cNvSpPr/>
+            <p:nvPr/>
+          </p:nvSpPr>
+          <p:spPr>
+            <a:xfrm>
+              <a:off x="1364" y="1711"/>
+              <a:ext cx="2139" cy="937"/>
+            </a:xfrm>
+            <a:prstGeom prst="rect">
+              <a:avLst/>
+            </a:prstGeom>
+            <a:noFill/>
+            <a:ln w="19050">
+              <a:noFill/>
+            </a:ln>
+            <a:extLst>
+              <a:ext uri="{909E8E84-426E-40DD-AFC4-6F175D3DCCD1}">
+                <a14:hiddenFill xmlns:a14="http://schemas.microsoft.com/office/drawing/2010/main">
+                  <a:solidFill>
+                    <a:schemeClr val="accent1"/>
+                  </a:solidFill>
+                </a14:hiddenFill>
+              </a:ext>
+            </a:extLst>
+          </p:spPr>
+          <p:style>
+            <a:lnRef idx="2">
+              <a:schemeClr val="accent1">
+                <a:lumMod val="75000"/>
+              </a:schemeClr>
+            </a:lnRef>
+            <a:fillRef idx="1">
+              <a:schemeClr val="accent1"/>
+            </a:fillRef>
+            <a:effectRef idx="0">
+              <a:srgbClr val="FFFFFF"/>
+            </a:effectRef>
+            <a:fontRef idx="minor">
+              <a:schemeClr val="lt1"/>
+            </a:fontRef>
+          </p:style>
+          <p:txBody>
+            <a:bodyPr rtlCol="0" anchor="ctr"/>
+            <a:p>
+              <a:pPr algn="ctr"/>
+              <a:endParaRPr lang="zh-CN" altLang="en-US" sz="1500">
+                <a:solidFill>
+                  <a:schemeClr val="tx1"/>
+                </a:solidFill>
+              </a:endParaRPr>
+            </a:p>
+          </p:txBody>
+        </p:sp>
+      </p:grpSp>
+    </p:spTree>
+  </p:cSld>
+  <p:clrMapOvr>
+    <a:masterClrMapping/>
+  </p:clrMapOvr>
+</p:sld>
+</file>
+
+<file path=ppt/slides/slide7.xml><?xml version="1.0" encoding="utf-8"?>
+<p:sld xmlns:a="http://schemas.openxmlformats.org/drawingml/2006/main" xmlns:r="http://schemas.openxmlformats.org/officeDocument/2006/relationships" xmlns:p="http://schemas.openxmlformats.org/presentationml/2006/main">
+  <p:cSld>
+    <p:spTree>
+      <p:nvGrpSpPr>
+        <p:cNvPr id="1" name=""/>
+        <p:cNvGrpSpPr/>
+        <p:nvPr/>
+      </p:nvGrpSpPr>
+      <p:grpSpPr/>
+      <p:cxnSp>
+        <p:nvCxnSpPr>
+          <p:cNvPr id="3" name="肘形连接符 2"/>
+          <p:cNvCxnSpPr>
+            <a:stCxn id="6" idx="3"/>
+            <a:endCxn id="26" idx="1"/>
+          </p:cNvCxnSpPr>
+          <p:nvPr/>
+        </p:nvCxnSpPr>
+        <p:spPr>
+          <a:xfrm flipV="1">
+            <a:off x="2268220" y="1573530"/>
+            <a:ext cx="551180" cy="382905"/>
+          </a:xfrm>
+          <a:prstGeom prst="bentConnector3">
+            <a:avLst>
+              <a:gd name="adj1" fmla="val 50000"/>
+            </a:avLst>
+          </a:prstGeom>
+          <a:ln w="19050">
+            <a:solidFill>
+              <a:schemeClr val="tx1"/>
+            </a:solidFill>
+            <a:tailEnd type="arrow"/>
+          </a:ln>
+        </p:spPr>
+        <p:style>
+          <a:lnRef idx="2">
+            <a:schemeClr val="accent1"/>
+          </a:lnRef>
+          <a:fillRef idx="0">
+            <a:srgbClr val="FFFFFF"/>
+          </a:fillRef>
+          <a:effectRef idx="0">
+            <a:srgbClr val="FFFFFF"/>
+          </a:effectRef>
+          <a:fontRef idx="minor">
+            <a:schemeClr val="tx1"/>
+          </a:fontRef>
+        </p:style>
+      </p:cxnSp>
+      <mc:AlternateContent xmlns:mc="http://schemas.openxmlformats.org/markup-compatibility/2006">
+        <mc:Choice xmlns:a14="http://schemas.microsoft.com/office/drawing/2010/main" Requires="a14">
+          <p:sp>
+            <p:nvSpPr>
+              <p:cNvPr id="6" name="矩形 5"/>
+              <p:cNvSpPr/>
+              <p:nvPr/>
+            </p:nvSpPr>
+            <p:spPr>
+              <a:xfrm>
+                <a:off x="1166495" y="1734820"/>
+                <a:ext cx="1101725" cy="442595"/>
+              </a:xfrm>
+              <a:prstGeom prst="rect">
+                <a:avLst/>
+              </a:prstGeom>
+              <a:noFill/>
+              <a:ln w="19050">
+                <a:solidFill>
+                  <a:schemeClr val="tx1"/>
+                </a:solidFill>
+              </a:ln>
+              <a:extLst>
+                <a:ext uri="{909E8E84-426E-40DD-AFC4-6F175D3DCCD1}">
+                  <a14:hiddenFill xmlns:a14="http://schemas.microsoft.com/office/drawing/2010/main">
+                    <a:solidFill>
+                      <a:schemeClr val="accent1"/>
+                    </a:solidFill>
+                  </a14:hiddenFill>
+                </a:ext>
+              </a:extLst>
+            </p:spPr>
+            <p:style>
+              <a:lnRef idx="2">
+                <a:schemeClr val="accent1">
+                  <a:lumMod val="75000"/>
+                </a:schemeClr>
+              </a:lnRef>
+              <a:fillRef idx="1">
+                <a:schemeClr val="accent1"/>
+              </a:fillRef>
+              <a:effectRef idx="0">
+                <a:srgbClr val="FFFFFF"/>
+              </a:effectRef>
+              <a:fontRef idx="minor">
+                <a:schemeClr val="lt1"/>
+              </a:fontRef>
+            </p:style>
+            <p:txBody>
+              <a:bodyPr vertOverflow="overflow" horzOverflow="overflow" vert="horz" wrap="square" numCol="1" spcCol="0" rtlCol="0" fromWordArt="0" anchor="ctr" anchorCtr="0" forceAA="0" compatLnSpc="1">
+                <a:noAutofit/>
+              </a:bodyPr>
+              <a:p>
+                <a:pPr lvl="0" algn="ctr">
+                  <a:buClrTx/>
+                  <a:buSzTx/>
+                  <a:buFontTx/>
+                </a:pPr>
+                <a:r>
+                  <a:rPr lang="zh-CN" altLang="en-US" sz="1500">
+                    <a:solidFill>
+                      <a:schemeClr val="tx1"/>
+                    </a:solidFill>
+                    <a:latin typeface="Cambria Math" panose="02040503050406030204" charset="0"/>
+                    <a:cs typeface="Cambria Math" panose="02040503050406030204" charset="0"/>
+                    <a:sym typeface="+mn-ea"/>
+                  </a:rPr>
+                  <a:t>父点</a:t>
+                </a:r>
+                <a14:m>
+                  <m:oMath xmlns:m="http://schemas.openxmlformats.org/officeDocument/2006/math">
+                    <m:r>
+                      <a:rPr lang="zh-CN" altLang="en-US" sz="1500">
+                        <a:solidFill>
+                          <a:schemeClr val="tx1"/>
+                        </a:solidFill>
+                        <a:latin typeface="Cambria Math" panose="02040503050406030204" charset="0"/>
+                        <a:cs typeface="Cambria Math" panose="02040503050406030204" charset="0"/>
+                        <a:sym typeface="+mn-ea"/>
+                      </a:rPr>
+                      <m:t>𝑖𝑅</m:t>
+                    </m:r>
+                  </m:oMath>
+                </a14:m>
+                <a:endParaRPr lang="zh-CN" altLang="en-US" sz="1500">
+                  <a:solidFill>
+                    <a:schemeClr val="tx1"/>
+                  </a:solidFill>
+                  <a:latin typeface="Cambria Math" panose="02040503050406030204" charset="0"/>
+                  <a:cs typeface="Cambria Math" panose="02040503050406030204" charset="0"/>
+                  <a:sym typeface="+mn-ea"/>
+                </a:endParaRPr>
+              </a:p>
+            </p:txBody>
+          </p:sp>
+        </mc:Choice>
+        <mc:Fallback>
+          <p:sp>
+            <p:nvSpPr>
+              <p:cNvPr id="6" name="矩形 5"/>
+              <p:cNvSpPr>
+                <a:spLocks noRot="1" noChangeAspect="1" noMove="1" noResize="1" noEditPoints="1" noAdjustHandles="1" noChangeArrowheads="1" noChangeShapeType="1" noTextEdit="1"/>
+              </p:cNvSpPr>
+              <p:nvPr/>
+            </p:nvSpPr>
+            <p:spPr>
+              <a:xfrm>
+                <a:off x="1166495" y="1734820"/>
+                <a:ext cx="1101725" cy="442595"/>
+              </a:xfrm>
+              <a:prstGeom prst="rect">
+                <a:avLst/>
+              </a:prstGeom>
+              <a:blipFill rotWithShape="1">
+                <a:blip r:embed="rId1"/>
+                <a:stretch>
+                  <a:fillRect l="-865" t="-2152" r="-865" b="-2152"/>
+                </a:stretch>
+              </a:blipFill>
+              <a:ln w="19050">
+                <a:solidFill>
+                  <a:schemeClr val="tx1"/>
+                </a:solidFill>
+              </a:ln>
+              <a:extLst>
+                <a:ext uri="{909E8E84-426E-40DD-AFC4-6F175D3DCCD1}">
+                  <a14:hiddenFill xmlns:a14="http://schemas.microsoft.com/office/drawing/2010/main">
+                    <a:solidFill>
+                      <a:schemeClr val="accent1"/>
+                    </a:solidFill>
+                  </a14:hiddenFill>
+                </a:ext>
+              </a:extLst>
+            </p:spPr>
+            <p:style>
+              <a:lnRef idx="2">
+                <a:schemeClr val="accent1">
+                  <a:lumMod val="75000"/>
+                </a:schemeClr>
+              </a:lnRef>
+              <a:fillRef idx="1">
+                <a:schemeClr val="accent1"/>
+              </a:fillRef>
+              <a:effectRef idx="0">
+                <a:srgbClr val="FFFFFF"/>
+              </a:effectRef>
+              <a:fontRef idx="minor">
+                <a:schemeClr val="lt1"/>
+              </a:fontRef>
+            </p:style>
+            <p:txBody>
+              <a:bodyPr/>
+              <a:lstStyle/>
+              <a:p>
+                <a:r>
+                  <a:rPr lang="zh-CN" altLang="en-US">
+                    <a:noFill/>
+                  </a:rPr>
+                  <a:t> </a:t>
+                </a:r>
+              </a:p>
+            </p:txBody>
+          </p:sp>
+        </mc:Fallback>
+      </mc:AlternateContent>
+      <mc:AlternateContent xmlns:mc="http://schemas.openxmlformats.org/markup-compatibility/2006">
+        <mc:Choice xmlns:a14="http://schemas.microsoft.com/office/drawing/2010/main" Requires="a14">
+          <p:sp>
+            <p:nvSpPr>
+              <p:cNvPr id="21" name="矩形 20"/>
+              <p:cNvSpPr/>
+              <p:nvPr/>
+            </p:nvSpPr>
+            <p:spPr>
+              <a:xfrm>
+                <a:off x="1165860" y="984250"/>
+                <a:ext cx="1100455" cy="442595"/>
+              </a:xfrm>
+              <a:prstGeom prst="rect">
+                <a:avLst/>
+              </a:prstGeom>
+              <a:noFill/>
+              <a:ln w="19050">
+                <a:solidFill>
+                  <a:schemeClr val="tx1"/>
+                </a:solidFill>
+              </a:ln>
+              <a:extLst>
+                <a:ext uri="{909E8E84-426E-40DD-AFC4-6F175D3DCCD1}">
+                  <a14:hiddenFill xmlns:a14="http://schemas.microsoft.com/office/drawing/2010/main">
+                    <a:solidFill>
+                      <a:schemeClr val="accent1"/>
+                    </a:solidFill>
+                  </a14:hiddenFill>
+                </a:ext>
+              </a:extLst>
+            </p:spPr>
+            <p:style>
+              <a:lnRef idx="2">
+                <a:schemeClr val="accent1">
+                  <a:lumMod val="75000"/>
+                </a:schemeClr>
+              </a:lnRef>
+              <a:fillRef idx="1">
+                <a:schemeClr val="accent1"/>
+              </a:fillRef>
+              <a:effectRef idx="0">
+                <a:srgbClr val="FFFFFF"/>
+              </a:effectRef>
+              <a:fontRef idx="minor">
+                <a:schemeClr val="lt1"/>
+              </a:fontRef>
+            </p:style>
+            <p:txBody>
+              <a:bodyPr rtlCol="0" anchor="ctr"/>
+              <a:p>
+                <a:pPr algn="ctr"/>
+                <a:r>
+                  <a:rPr lang="zh-CN" altLang="en-US" sz="1500">
+                    <a:solidFill>
+                      <a:schemeClr val="tx1"/>
+                    </a:solidFill>
+                    <a:latin typeface="Cambria Math" panose="02040503050406030204" charset="0"/>
+                    <a:cs typeface="Cambria Math" panose="02040503050406030204" charset="0"/>
+                  </a:rPr>
+                  <a:t>子点</a:t>
+                </a:r>
+                <a14:m>
+                  <m:oMath xmlns:m="http://schemas.openxmlformats.org/officeDocument/2006/math">
+                    <m:r>
+                      <a:rPr lang="en-US" altLang="zh-CN" sz="1500" i="1">
+                        <a:solidFill>
+                          <a:schemeClr val="tx1"/>
+                        </a:solidFill>
+                        <a:latin typeface="Cambria Math" panose="02040503050406030204" charset="0"/>
+                        <a:cs typeface="Cambria Math" panose="02040503050406030204" charset="0"/>
+                      </a:rPr>
+                      <m:t>𝑖𝑅</m:t>
+                    </m:r>
+                  </m:oMath>
+                </a14:m>
+                <a:endParaRPr lang="zh-CN" altLang="en-US" sz="1500">
+                  <a:solidFill>
+                    <a:schemeClr val="tx1"/>
+                  </a:solidFill>
+                </a:endParaRPr>
+              </a:p>
+            </p:txBody>
+          </p:sp>
+        </mc:Choice>
+        <mc:Fallback>
+          <p:sp>
+            <p:nvSpPr>
+              <p:cNvPr id="21" name="矩形 20"/>
+              <p:cNvSpPr>
+                <a:spLocks noRot="1" noChangeAspect="1" noMove="1" noResize="1" noEditPoints="1" noAdjustHandles="1" noChangeArrowheads="1" noChangeShapeType="1" noTextEdit="1"/>
+              </p:cNvSpPr>
+              <p:nvPr/>
+            </p:nvSpPr>
+            <p:spPr>
+              <a:xfrm>
+                <a:off x="1165860" y="984250"/>
+                <a:ext cx="1100455" cy="442595"/>
+              </a:xfrm>
+              <a:prstGeom prst="rect">
+                <a:avLst/>
+              </a:prstGeom>
+              <a:blipFill rotWithShape="1">
+                <a:blip r:embed="rId2"/>
+                <a:stretch>
+                  <a:fillRect l="-866" t="-2152" r="-866" b="-2152"/>
+                </a:stretch>
+              </a:blipFill>
+              <a:ln w="19050">
+                <a:solidFill>
+                  <a:schemeClr val="tx1"/>
+                </a:solidFill>
+              </a:ln>
+              <a:extLst>
+                <a:ext uri="{909E8E84-426E-40DD-AFC4-6F175D3DCCD1}">
+                  <a14:hiddenFill xmlns:a14="http://schemas.microsoft.com/office/drawing/2010/main">
+                    <a:solidFill>
+                      <a:schemeClr val="accent1"/>
+                    </a:solidFill>
+                  </a14:hiddenFill>
+                </a:ext>
+              </a:extLst>
+            </p:spPr>
+            <p:style>
+              <a:lnRef idx="2">
+                <a:schemeClr val="accent1">
+                  <a:lumMod val="75000"/>
+                </a:schemeClr>
+              </a:lnRef>
+              <a:fillRef idx="1">
+                <a:schemeClr val="accent1"/>
+              </a:fillRef>
+              <a:effectRef idx="0">
+                <a:srgbClr val="FFFFFF"/>
+              </a:effectRef>
+              <a:fontRef idx="minor">
+                <a:schemeClr val="lt1"/>
+              </a:fontRef>
+            </p:style>
+            <p:txBody>
+              <a:bodyPr/>
+              <a:lstStyle/>
+              <a:p>
+                <a:r>
+                  <a:rPr lang="zh-CN" altLang="en-US">
+                    <a:noFill/>
+                  </a:rPr>
+                  <a:t> </a:t>
+                </a:r>
+              </a:p>
+            </p:txBody>
+          </p:sp>
+        </mc:Fallback>
+      </mc:AlternateContent>
+      <p:sp>
+        <p:nvSpPr>
+          <p:cNvPr id="26" name="矩形 25"/>
+          <p:cNvSpPr/>
+          <p:nvPr/>
+        </p:nvSpPr>
+        <p:spPr>
+          <a:xfrm>
+            <a:off x="2819400" y="1275715"/>
+            <a:ext cx="1919605" cy="594995"/>
+          </a:xfrm>
+          <a:prstGeom prst="rect">
+            <a:avLst/>
+          </a:prstGeom>
+          <a:noFill/>
+          <a:ln w="19050">
+            <a:solidFill>
+              <a:schemeClr val="tx1"/>
+            </a:solidFill>
+          </a:ln>
+          <a:extLst>
+            <a:ext uri="{909E8E84-426E-40DD-AFC4-6F175D3DCCD1}">
+              <a14:hiddenFill xmlns:a14="http://schemas.microsoft.com/office/drawing/2010/main">
+                <a:solidFill>
+                  <a:schemeClr val="accent1"/>
+                </a:solidFill>
+              </a14:hiddenFill>
+            </a:ext>
+          </a:extLst>
+        </p:spPr>
+        <p:style>
+          <a:lnRef idx="2">
+            <a:schemeClr val="accent1">
+              <a:lumMod val="75000"/>
+            </a:schemeClr>
+          </a:lnRef>
+          <a:fillRef idx="1">
+            <a:schemeClr val="accent1"/>
+          </a:fillRef>
+          <a:effectRef idx="0">
+            <a:srgbClr val="FFFFFF"/>
+          </a:effectRef>
+          <a:fontRef idx="minor">
+            <a:schemeClr val="lt1"/>
+          </a:fontRef>
+        </p:style>
+        <p:txBody>
+          <a:bodyPr rtlCol="0" anchor="ctr"/>
+          <a:p>
+            <a:pPr algn="ctr"/>
+            <a:r>
+              <a:rPr lang="zh-CN" altLang="en-US" sz="1500">
+                <a:solidFill>
+                  <a:schemeClr val="tx1"/>
+                </a:solidFill>
+              </a:rPr>
+              <a:t>高斯归一化积</a:t>
+            </a:r>
+            <a:endParaRPr lang="zh-CN" altLang="en-US" sz="1500">
+              <a:solidFill>
+                <a:schemeClr val="tx1"/>
+              </a:solidFill>
+            </a:endParaRPr>
+          </a:p>
+        </p:txBody>
+      </p:sp>
+      <p:cxnSp>
+        <p:nvCxnSpPr>
+          <p:cNvPr id="31" name="肘形连接符 30"/>
+          <p:cNvCxnSpPr>
+            <a:stCxn id="21" idx="3"/>
+            <a:endCxn id="26" idx="1"/>
+          </p:cNvCxnSpPr>
+          <p:nvPr/>
+        </p:nvCxnSpPr>
+        <p:spPr>
+          <a:xfrm>
+            <a:off x="2266315" y="1205865"/>
+            <a:ext cx="553085" cy="367665"/>
+          </a:xfrm>
+          <a:prstGeom prst="bentConnector3">
+            <a:avLst>
+              <a:gd name="adj1" fmla="val 50057"/>
+            </a:avLst>
+          </a:prstGeom>
+          <a:ln w="19050">
+            <a:solidFill>
+              <a:schemeClr val="tx1"/>
+            </a:solidFill>
+            <a:tailEnd type="arrow"/>
+          </a:ln>
+        </p:spPr>
+        <p:style>
+          <a:lnRef idx="2">
+            <a:schemeClr val="accent1"/>
+          </a:lnRef>
+          <a:fillRef idx="0">
+            <a:srgbClr val="FFFFFF"/>
+          </a:fillRef>
+          <a:effectRef idx="0">
+            <a:srgbClr val="FFFFFF"/>
+          </a:effectRef>
+          <a:fontRef idx="minor">
+            <a:schemeClr val="tx1"/>
+          </a:fontRef>
+        </p:style>
+      </p:cxnSp>
+      <mc:AlternateContent xmlns:mc="http://schemas.openxmlformats.org/markup-compatibility/2006">
+        <mc:Choice xmlns:a14="http://schemas.microsoft.com/office/drawing/2010/main" Requires="a14">
+          <p:sp>
+            <p:nvSpPr>
+              <p:cNvPr id="38" name="矩形 37"/>
+              <p:cNvSpPr/>
+              <p:nvPr/>
+            </p:nvSpPr>
+            <p:spPr>
+              <a:xfrm>
+                <a:off x="5263515" y="1737360"/>
+                <a:ext cx="1232535" cy="442595"/>
+              </a:xfrm>
+              <a:prstGeom prst="rect">
+                <a:avLst/>
+              </a:prstGeom>
+              <a:noFill/>
+              <a:ln w="19050">
+                <a:solidFill>
+                  <a:schemeClr val="tx1"/>
+                </a:solidFill>
+              </a:ln>
+              <a:extLst>
+                <a:ext uri="{909E8E84-426E-40DD-AFC4-6F175D3DCCD1}">
+                  <a14:hiddenFill xmlns:a14="http://schemas.microsoft.com/office/drawing/2010/main">
+                    <a:solidFill>
+                      <a:schemeClr val="accent1"/>
+                    </a:solidFill>
+                  </a14:hiddenFill>
+                </a:ext>
+              </a:extLst>
+            </p:spPr>
+            <p:style>
+              <a:lnRef idx="2">
+                <a:schemeClr val="accent1">
+                  <a:lumMod val="75000"/>
+                </a:schemeClr>
+              </a:lnRef>
+              <a:fillRef idx="1">
+                <a:schemeClr val="accent1"/>
+              </a:fillRef>
+              <a:effectRef idx="0">
+                <a:srgbClr val="FFFFFF"/>
+              </a:effectRef>
+              <a:fontRef idx="minor">
+                <a:schemeClr val="lt1"/>
+              </a:fontRef>
+            </p:style>
+            <p:txBody>
+              <a:bodyPr vertOverflow="overflow" horzOverflow="overflow" vert="horz" wrap="square" numCol="1" spcCol="0" rtlCol="0" fromWordArt="0" anchor="ctr" anchorCtr="0" forceAA="0" compatLnSpc="1">
+                <a:noAutofit/>
+              </a:bodyPr>
+              <a:p>
+                <a:pPr algn="ctr"/>
+                <a:r>
+                  <a:rPr lang="zh-CN" altLang="en-US" sz="1500">
+                    <a:solidFill>
+                      <a:schemeClr val="tx1"/>
+                    </a:solidFill>
+                    <a:latin typeface="Cambria Math" panose="02040503050406030204" charset="0"/>
+                    <a:cs typeface="Cambria Math" panose="02040503050406030204" charset="0"/>
+                    <a:sym typeface="+mn-ea"/>
+                  </a:rPr>
+                  <a:t>更新子点</a:t>
+                </a:r>
+                <a14:m>
+                  <m:oMath xmlns:m="http://schemas.openxmlformats.org/officeDocument/2006/math">
+                    <m:sSub>
+                      <m:sSubPr>
+                        <m:ctrlPr>
+                          <a:rPr lang="en-US" altLang="zh-CN" sz="1500" i="1">
+                            <a:solidFill>
+                              <a:schemeClr val="tx1"/>
+                            </a:solidFill>
+                            <a:latin typeface="Cambria Math" panose="02040503050406030204" charset="0"/>
+                            <a:cs typeface="Cambria Math" panose="02040503050406030204" charset="0"/>
+                          </a:rPr>
+                        </m:ctrlPr>
+                      </m:sSubPr>
+                      <m:e>
+                        <m:r>
+                          <a:rPr lang="en-US" altLang="zh-CN" sz="1500" i="1">
+                            <a:solidFill>
+                              <a:schemeClr val="tx1"/>
+                            </a:solidFill>
+                            <a:latin typeface="Cambria Math" panose="02040503050406030204" charset="0"/>
+                            <a:cs typeface="Cambria Math" panose="02040503050406030204" charset="0"/>
+                          </a:rPr>
+                          <m:t>𝑑</m:t>
+                        </m:r>
+                      </m:e>
+                      <m:sub>
+                        <m:r>
+                          <a:rPr lang="en-US" altLang="zh-CN" sz="1500" i="1">
+                            <a:solidFill>
+                              <a:schemeClr val="tx1"/>
+                            </a:solidFill>
+                            <a:latin typeface="Cambria Math" panose="02040503050406030204" charset="0"/>
+                            <a:cs typeface="Cambria Math" panose="02040503050406030204" charset="0"/>
+                          </a:rPr>
+                          <m:t>𝑝𝑖</m:t>
+                        </m:r>
+                      </m:sub>
+                    </m:sSub>
+                  </m:oMath>
+                </a14:m>
+                <a:endParaRPr lang="zh-CN" altLang="en-US" sz="1500">
+                  <a:solidFill>
+                    <a:schemeClr val="tx1"/>
+                  </a:solidFill>
+                  <a:latin typeface="Cambria Math" panose="02040503050406030204" charset="0"/>
+                  <a:cs typeface="Cambria Math" panose="02040503050406030204" charset="0"/>
+                  <a:sym typeface="+mn-ea"/>
+                </a:endParaRPr>
+              </a:p>
+            </p:txBody>
+          </p:sp>
+        </mc:Choice>
+        <mc:Fallback>
+          <p:sp>
+            <p:nvSpPr>
+              <p:cNvPr id="38" name="矩形 37"/>
+              <p:cNvSpPr>
+                <a:spLocks noRot="1" noChangeAspect="1" noMove="1" noResize="1" noEditPoints="1" noAdjustHandles="1" noChangeArrowheads="1" noChangeShapeType="1" noTextEdit="1"/>
+              </p:cNvSpPr>
+              <p:nvPr/>
+            </p:nvSpPr>
+            <p:spPr>
+              <a:xfrm>
+                <a:off x="5263515" y="1737360"/>
+                <a:ext cx="1232535" cy="442595"/>
+              </a:xfrm>
+              <a:prstGeom prst="rect">
+                <a:avLst/>
+              </a:prstGeom>
+              <a:blipFill rotWithShape="1">
+                <a:blip r:embed="rId3"/>
+                <a:stretch>
+                  <a:fillRect l="-773" t="-2152" r="-773" b="-2152"/>
+                </a:stretch>
+              </a:blipFill>
+              <a:ln w="19050">
+                <a:solidFill>
+                  <a:schemeClr val="tx1"/>
+                </a:solidFill>
+              </a:ln>
+              <a:extLst>
+                <a:ext uri="{909E8E84-426E-40DD-AFC4-6F175D3DCCD1}">
+                  <a14:hiddenFill xmlns:a14="http://schemas.microsoft.com/office/drawing/2010/main">
+                    <a:solidFill>
+                      <a:schemeClr val="accent1"/>
+                    </a:solidFill>
+                  </a14:hiddenFill>
+                </a:ext>
+              </a:extLst>
+            </p:spPr>
+            <p:style>
+              <a:lnRef idx="2">
+                <a:schemeClr val="accent1">
+                  <a:lumMod val="75000"/>
+                </a:schemeClr>
+              </a:lnRef>
+              <a:fillRef idx="1">
+                <a:schemeClr val="accent1"/>
+              </a:fillRef>
+              <a:effectRef idx="0">
+                <a:srgbClr val="FFFFFF"/>
+              </a:effectRef>
+              <a:fontRef idx="minor">
+                <a:schemeClr val="lt1"/>
+              </a:fontRef>
+            </p:style>
+            <p:txBody>
+              <a:bodyPr/>
+              <a:lstStyle/>
+              <a:p>
+                <a:r>
+                  <a:rPr lang="zh-CN" altLang="en-US">
+                    <a:noFill/>
+                  </a:rPr>
+                  <a:t> </a:t>
+                </a:r>
+              </a:p>
+            </p:txBody>
+          </p:sp>
+        </mc:Fallback>
+      </mc:AlternateContent>
+      <mc:AlternateContent xmlns:mc="http://schemas.openxmlformats.org/markup-compatibility/2006">
+        <mc:Choice xmlns:a14="http://schemas.microsoft.com/office/drawing/2010/main" Requires="a14">
+          <p:sp>
+            <p:nvSpPr>
+              <p:cNvPr id="40" name="矩形 39"/>
+              <p:cNvSpPr/>
+              <p:nvPr/>
+            </p:nvSpPr>
+            <p:spPr>
+              <a:xfrm>
+                <a:off x="5263515" y="984250"/>
+                <a:ext cx="1231265" cy="442595"/>
+              </a:xfrm>
+              <a:prstGeom prst="rect">
+                <a:avLst/>
+              </a:prstGeom>
+              <a:noFill/>
+              <a:ln w="19050">
+                <a:solidFill>
+                  <a:schemeClr val="tx1"/>
+                </a:solidFill>
+              </a:ln>
+              <a:extLst>
+                <a:ext uri="{909E8E84-426E-40DD-AFC4-6F175D3DCCD1}">
+                  <a14:hiddenFill xmlns:a14="http://schemas.microsoft.com/office/drawing/2010/main">
+                    <a:solidFill>
+                      <a:schemeClr val="accent1"/>
+                    </a:solidFill>
+                  </a14:hiddenFill>
+                </a:ext>
+              </a:extLst>
+            </p:spPr>
+            <p:style>
+              <a:lnRef idx="2">
+                <a:schemeClr val="accent1">
+                  <a:lumMod val="75000"/>
+                </a:schemeClr>
+              </a:lnRef>
+              <a:fillRef idx="1">
+                <a:schemeClr val="accent1"/>
+              </a:fillRef>
+              <a:effectRef idx="0">
+                <a:srgbClr val="FFFFFF"/>
+              </a:effectRef>
+              <a:fontRef idx="minor">
+                <a:schemeClr val="lt1"/>
+              </a:fontRef>
+            </p:style>
+            <p:txBody>
+              <a:bodyPr rtlCol="0" anchor="ctr"/>
+              <a:p>
+                <a:pPr algn="ctr"/>
+                <a:r>
+                  <a:rPr lang="zh-CN" altLang="en-US" sz="1500">
+                    <a:solidFill>
+                      <a:schemeClr val="tx1"/>
+                    </a:solidFill>
+                    <a:latin typeface="Cambria Math" panose="02040503050406030204" charset="0"/>
+                    <a:cs typeface="Cambria Math" panose="02040503050406030204" charset="0"/>
+                  </a:rPr>
+                  <a:t>更新子点</a:t>
+                </a:r>
+                <a14:m>
+                  <m:oMath xmlns:m="http://schemas.openxmlformats.org/officeDocument/2006/math">
+                    <m:r>
+                      <a:rPr lang="en-US" altLang="zh-CN" sz="1500" i="1">
+                        <a:solidFill>
+                          <a:schemeClr val="tx1"/>
+                        </a:solidFill>
+                        <a:latin typeface="Cambria Math" panose="02040503050406030204" charset="0"/>
+                        <a:cs typeface="Cambria Math" panose="02040503050406030204" charset="0"/>
+                      </a:rPr>
+                      <m:t>𝑖𝑅</m:t>
+                    </m:r>
+                  </m:oMath>
+                </a14:m>
+                <a:endParaRPr lang="zh-CN" altLang="en-US" sz="1500">
+                  <a:solidFill>
+                    <a:schemeClr val="tx1"/>
+                  </a:solidFill>
+                </a:endParaRPr>
+              </a:p>
+            </p:txBody>
+          </p:sp>
+        </mc:Choice>
+        <mc:Fallback>
+          <p:sp>
+            <p:nvSpPr>
+              <p:cNvPr id="40" name="矩形 39"/>
+              <p:cNvSpPr>
+                <a:spLocks noRot="1" noChangeAspect="1" noMove="1" noResize="1" noEditPoints="1" noAdjustHandles="1" noChangeArrowheads="1" noChangeShapeType="1" noTextEdit="1"/>
+              </p:cNvSpPr>
+              <p:nvPr/>
+            </p:nvSpPr>
+            <p:spPr>
+              <a:xfrm>
+                <a:off x="5263515" y="984250"/>
+                <a:ext cx="1231265" cy="442595"/>
+              </a:xfrm>
+              <a:prstGeom prst="rect">
+                <a:avLst/>
+              </a:prstGeom>
+              <a:blipFill rotWithShape="1">
+                <a:blip r:embed="rId4"/>
+                <a:stretch>
+                  <a:fillRect l="-774" t="-2152" r="-774" b="-2152"/>
+                </a:stretch>
+              </a:blipFill>
+              <a:ln w="19050">
+                <a:solidFill>
+                  <a:schemeClr val="tx1"/>
+                </a:solidFill>
+              </a:ln>
+              <a:extLst>
+                <a:ext uri="{909E8E84-426E-40DD-AFC4-6F175D3DCCD1}">
+                  <a14:hiddenFill xmlns:a14="http://schemas.microsoft.com/office/drawing/2010/main">
+                    <a:solidFill>
+                      <a:schemeClr val="accent1"/>
+                    </a:solidFill>
+                  </a14:hiddenFill>
+                </a:ext>
+              </a:extLst>
+            </p:spPr>
+            <p:style>
+              <a:lnRef idx="2">
+                <a:schemeClr val="accent1">
+                  <a:lumMod val="75000"/>
+                </a:schemeClr>
+              </a:lnRef>
+              <a:fillRef idx="1">
+                <a:schemeClr val="accent1"/>
+              </a:fillRef>
+              <a:effectRef idx="0">
+                <a:srgbClr val="FFFFFF"/>
+              </a:effectRef>
+              <a:fontRef idx="minor">
+                <a:schemeClr val="lt1"/>
+              </a:fontRef>
+            </p:style>
+            <p:txBody>
+              <a:bodyPr/>
+              <a:lstStyle/>
+              <a:p>
+                <a:r>
+                  <a:rPr lang="zh-CN" altLang="en-US">
+                    <a:noFill/>
+                  </a:rPr>
+                  <a:t> </a:t>
+                </a:r>
+              </a:p>
+            </p:txBody>
+          </p:sp>
+        </mc:Fallback>
+      </mc:AlternateContent>
+      <p:cxnSp>
+        <p:nvCxnSpPr>
+          <p:cNvPr id="41" name="肘形连接符 40"/>
+          <p:cNvCxnSpPr>
+            <a:stCxn id="26" idx="3"/>
+            <a:endCxn id="38" idx="1"/>
+          </p:cNvCxnSpPr>
+          <p:nvPr/>
+        </p:nvCxnSpPr>
+        <p:spPr>
+          <a:xfrm>
+            <a:off x="4739005" y="1573530"/>
+            <a:ext cx="524510" cy="385445"/>
+          </a:xfrm>
+          <a:prstGeom prst="bentConnector3">
+            <a:avLst>
+              <a:gd name="adj1" fmla="val 50000"/>
+            </a:avLst>
+          </a:prstGeom>
+          <a:ln w="19050">
+            <a:solidFill>
+              <a:schemeClr val="tx1"/>
+            </a:solidFill>
+            <a:tailEnd type="arrow"/>
+          </a:ln>
+        </p:spPr>
+        <p:style>
+          <a:lnRef idx="2">
+            <a:schemeClr val="accent1"/>
+          </a:lnRef>
+          <a:fillRef idx="0">
+            <a:srgbClr val="FFFFFF"/>
+          </a:fillRef>
+          <a:effectRef idx="0">
+            <a:srgbClr val="FFFFFF"/>
+          </a:effectRef>
+          <a:fontRef idx="minor">
+            <a:schemeClr val="tx1"/>
+          </a:fontRef>
+        </p:style>
+      </p:cxnSp>
+      <p:cxnSp>
+        <p:nvCxnSpPr>
+          <p:cNvPr id="42" name="肘形连接符 41"/>
+          <p:cNvCxnSpPr>
+            <a:stCxn id="26" idx="3"/>
+            <a:endCxn id="40" idx="1"/>
+          </p:cNvCxnSpPr>
+          <p:nvPr/>
+        </p:nvCxnSpPr>
+        <p:spPr>
+          <a:xfrm flipV="1">
+            <a:off x="4739005" y="1205865"/>
+            <a:ext cx="524510" cy="367665"/>
+          </a:xfrm>
+          <a:prstGeom prst="bentConnector3">
+            <a:avLst>
+              <a:gd name="adj1" fmla="val 50000"/>
+            </a:avLst>
+          </a:prstGeom>
+          <a:ln w="19050">
+            <a:solidFill>
+              <a:schemeClr val="tx1"/>
+            </a:solidFill>
+            <a:tailEnd type="arrow"/>
+          </a:ln>
+        </p:spPr>
+        <p:style>
+          <a:lnRef idx="2">
+            <a:schemeClr val="accent1"/>
+          </a:lnRef>
+          <a:fillRef idx="0">
+            <a:srgbClr val="FFFFFF"/>
+          </a:fillRef>
+          <a:effectRef idx="0">
+            <a:srgbClr val="FFFFFF"/>
+          </a:effectRef>
+          <a:fontRef idx="minor">
+            <a:schemeClr val="tx1"/>
+          </a:fontRef>
+        </p:style>
+      </p:cxnSp>
+      <mc:AlternateContent xmlns:mc="http://schemas.openxmlformats.org/markup-compatibility/2006">
+        <mc:Choice xmlns:a14="http://schemas.microsoft.com/office/drawing/2010/main" Requires="a14">
+          <p:sp>
+            <p:nvSpPr>
+              <p:cNvPr id="45" name="矩形 44"/>
+              <p:cNvSpPr/>
+              <p:nvPr/>
+            </p:nvSpPr>
+            <p:spPr>
+              <a:xfrm>
+                <a:off x="7019290" y="1275715"/>
+                <a:ext cx="2100580" cy="594995"/>
+              </a:xfrm>
+              <a:prstGeom prst="rect">
+                <a:avLst/>
+              </a:prstGeom>
+              <a:noFill/>
+              <a:ln w="19050">
+                <a:solidFill>
+                  <a:schemeClr val="tx1"/>
+                </a:solidFill>
+              </a:ln>
+              <a:extLst>
+                <a:ext uri="{909E8E84-426E-40DD-AFC4-6F175D3DCCD1}">
+                  <a14:hiddenFill xmlns:a14="http://schemas.microsoft.com/office/drawing/2010/main">
+                    <a:solidFill>
+                      <a:schemeClr val="accent1"/>
+                    </a:solidFill>
+                  </a14:hiddenFill>
+                </a:ext>
+              </a:extLst>
+            </p:spPr>
+            <p:style>
+              <a:lnRef idx="2">
+                <a:schemeClr val="accent1">
+                  <a:lumMod val="75000"/>
+                </a:schemeClr>
+              </a:lnRef>
+              <a:fillRef idx="1">
+                <a:schemeClr val="accent1"/>
+              </a:fillRef>
+              <a:effectRef idx="0">
+                <a:srgbClr val="FFFFFF"/>
+              </a:effectRef>
+              <a:fontRef idx="minor">
+                <a:schemeClr val="lt1"/>
+              </a:fontRef>
+            </p:style>
+            <p:txBody>
+              <a:bodyPr rtlCol="0" anchor="ctr"/>
+              <a:p>
+                <a:pPr algn="ctr"/>
+                <a:r>
+                  <a:rPr lang="zh-CN" altLang="en-US" sz="1500">
+                    <a:solidFill>
+                      <a:schemeClr val="tx1"/>
+                    </a:solidFill>
+                  </a:rPr>
+                  <a:t>考虑相邻点</a:t>
+                </a:r>
+                <a14:m>
+                  <m:oMath xmlns:m="http://schemas.openxmlformats.org/officeDocument/2006/math">
+                    <m:r>
+                      <a:rPr lang="en-US" altLang="zh-CN" sz="1500" i="1">
+                        <a:solidFill>
+                          <a:schemeClr val="tx1"/>
+                        </a:solidFill>
+                        <a:latin typeface="Cambria Math" panose="02040503050406030204" charset="0"/>
+                        <a:cs typeface="Cambria Math" panose="02040503050406030204" charset="0"/>
+                      </a:rPr>
+                      <m:t>𝑖𝑅</m:t>
+                    </m:r>
+                  </m:oMath>
+                </a14:m>
+                <a:r>
+                  <a:rPr lang="zh-CN" altLang="en-US" sz="1500">
+                    <a:solidFill>
+                      <a:schemeClr val="tx1"/>
+                    </a:solidFill>
+                    <a:latin typeface="Cambria Math" panose="02040503050406030204" charset="0"/>
+                    <a:cs typeface="Cambria Math" panose="02040503050406030204" charset="0"/>
+                  </a:rPr>
+                  <a:t>的连续性</a:t>
+                </a:r>
+                <a:endParaRPr lang="zh-CN" altLang="en-US" sz="1500">
+                  <a:solidFill>
+                    <a:schemeClr val="tx1"/>
+                  </a:solidFill>
+                  <a:latin typeface="Cambria Math" panose="02040503050406030204" charset="0"/>
+                  <a:cs typeface="Cambria Math" panose="02040503050406030204" charset="0"/>
+                </a:endParaRPr>
+              </a:p>
+            </p:txBody>
+          </p:sp>
+        </mc:Choice>
+        <mc:Fallback>
+          <p:sp>
+            <p:nvSpPr>
+              <p:cNvPr id="45" name="矩形 44"/>
+              <p:cNvSpPr>
+                <a:spLocks noRot="1" noChangeAspect="1" noMove="1" noResize="1" noEditPoints="1" noAdjustHandles="1" noChangeArrowheads="1" noChangeShapeType="1" noTextEdit="1"/>
+              </p:cNvSpPr>
+              <p:nvPr/>
+            </p:nvSpPr>
+            <p:spPr>
+              <a:xfrm>
+                <a:off x="7019290" y="1275715"/>
+                <a:ext cx="2100580" cy="594995"/>
+              </a:xfrm>
+              <a:prstGeom prst="rect">
+                <a:avLst/>
+              </a:prstGeom>
+              <a:blipFill rotWithShape="1">
+                <a:blip r:embed="rId5"/>
+                <a:stretch>
+                  <a:fillRect l="-453" t="-1601" r="-453" b="-1601"/>
+                </a:stretch>
+              </a:blipFill>
+              <a:ln w="19050">
+                <a:solidFill>
+                  <a:schemeClr val="tx1"/>
+                </a:solidFill>
+              </a:ln>
+              <a:extLst>
+                <a:ext uri="{909E8E84-426E-40DD-AFC4-6F175D3DCCD1}">
+                  <a14:hiddenFill xmlns:a14="http://schemas.microsoft.com/office/drawing/2010/main">
+                    <a:solidFill>
+                      <a:schemeClr val="accent1"/>
+                    </a:solidFill>
+                  </a14:hiddenFill>
+                </a:ext>
+              </a:extLst>
+            </p:spPr>
+            <p:style>
+              <a:lnRef idx="2">
+                <a:schemeClr val="accent1">
+                  <a:lumMod val="75000"/>
+                </a:schemeClr>
+              </a:lnRef>
+              <a:fillRef idx="1">
+                <a:schemeClr val="accent1"/>
+              </a:fillRef>
+              <a:effectRef idx="0">
+                <a:srgbClr val="FFFFFF"/>
+              </a:effectRef>
+              <a:fontRef idx="minor">
+                <a:schemeClr val="lt1"/>
+              </a:fontRef>
+            </p:style>
+            <p:txBody>
+              <a:bodyPr/>
+              <a:lstStyle/>
+              <a:p>
+                <a:r>
+                  <a:rPr lang="zh-CN" altLang="en-US">
+                    <a:noFill/>
+                  </a:rPr>
+                  <a:t> </a:t>
+                </a:r>
+              </a:p>
+            </p:txBody>
+          </p:sp>
+        </mc:Fallback>
+      </mc:AlternateContent>
+      <mc:AlternateContent xmlns:mc="http://schemas.openxmlformats.org/markup-compatibility/2006">
+        <mc:Choice xmlns:a14="http://schemas.microsoft.com/office/drawing/2010/main" Requires="a14">
+          <p:sp>
+            <p:nvSpPr>
+              <p:cNvPr id="47" name="矩形 46"/>
+              <p:cNvSpPr/>
+              <p:nvPr/>
+            </p:nvSpPr>
+            <p:spPr>
+              <a:xfrm>
+                <a:off x="9491980" y="1351915"/>
+                <a:ext cx="1231265" cy="442595"/>
+              </a:xfrm>
+              <a:prstGeom prst="rect">
+                <a:avLst/>
+              </a:prstGeom>
+              <a:noFill/>
+              <a:ln w="19050">
+                <a:solidFill>
+                  <a:schemeClr val="tx1"/>
+                </a:solidFill>
+              </a:ln>
+              <a:extLst>
+                <a:ext uri="{909E8E84-426E-40DD-AFC4-6F175D3DCCD1}">
+                  <a14:hiddenFill xmlns:a14="http://schemas.microsoft.com/office/drawing/2010/main">
+                    <a:solidFill>
+                      <a:schemeClr val="accent1"/>
+                    </a:solidFill>
+                  </a14:hiddenFill>
+                </a:ext>
+              </a:extLst>
+            </p:spPr>
+            <p:style>
+              <a:lnRef idx="2">
+                <a:schemeClr val="accent1">
+                  <a:lumMod val="75000"/>
+                </a:schemeClr>
+              </a:lnRef>
+              <a:fillRef idx="1">
+                <a:schemeClr val="accent1"/>
+              </a:fillRef>
+              <a:effectRef idx="0">
+                <a:srgbClr val="FFFFFF"/>
+              </a:effectRef>
+              <a:fontRef idx="minor">
+                <a:schemeClr val="lt1"/>
+              </a:fontRef>
+            </p:style>
+            <p:txBody>
+              <a:bodyPr rtlCol="0" anchor="ctr"/>
+              <a:p>
+                <a:pPr algn="ctr"/>
+                <a:r>
+                  <a:rPr lang="zh-CN" altLang="en-US" sz="1500">
+                    <a:solidFill>
+                      <a:schemeClr val="tx1"/>
+                    </a:solidFill>
+                    <a:latin typeface="Cambria Math" panose="02040503050406030204" charset="0"/>
+                    <a:cs typeface="Cambria Math" panose="02040503050406030204" charset="0"/>
+                  </a:rPr>
+                  <a:t>更新子点</a:t>
+                </a:r>
+                <a14:m>
+                  <m:oMath xmlns:m="http://schemas.openxmlformats.org/officeDocument/2006/math">
+                    <m:r>
+                      <a:rPr lang="en-US" altLang="zh-CN" sz="1500" i="1">
+                        <a:solidFill>
+                          <a:schemeClr val="tx1"/>
+                        </a:solidFill>
+                        <a:latin typeface="Cambria Math" panose="02040503050406030204" charset="0"/>
+                        <a:cs typeface="Cambria Math" panose="02040503050406030204" charset="0"/>
+                      </a:rPr>
+                      <m:t>𝑖𝑅</m:t>
+                    </m:r>
+                  </m:oMath>
+                </a14:m>
+                <a:endParaRPr lang="zh-CN" altLang="en-US" sz="1500">
+                  <a:solidFill>
+                    <a:schemeClr val="tx1"/>
+                  </a:solidFill>
+                </a:endParaRPr>
+              </a:p>
+            </p:txBody>
+          </p:sp>
+        </mc:Choice>
+        <mc:Fallback>
+          <p:sp>
+            <p:nvSpPr>
+              <p:cNvPr id="47" name="矩形 46"/>
+              <p:cNvSpPr>
+                <a:spLocks noRot="1" noChangeAspect="1" noMove="1" noResize="1" noEditPoints="1" noAdjustHandles="1" noChangeArrowheads="1" noChangeShapeType="1" noTextEdit="1"/>
+              </p:cNvSpPr>
+              <p:nvPr/>
+            </p:nvSpPr>
+            <p:spPr>
+              <a:xfrm>
+                <a:off x="9491980" y="1351915"/>
+                <a:ext cx="1231265" cy="442595"/>
+              </a:xfrm>
+              <a:prstGeom prst="rect">
+                <a:avLst/>
+              </a:prstGeom>
+              <a:blipFill rotWithShape="1">
+                <a:blip r:embed="rId4"/>
+                <a:stretch>
+                  <a:fillRect l="-774" t="-2152" r="-774" b="-2152"/>
+                </a:stretch>
+              </a:blipFill>
+              <a:ln w="19050">
+                <a:solidFill>
+                  <a:schemeClr val="tx1"/>
+                </a:solidFill>
+              </a:ln>
+              <a:extLst>
+                <a:ext uri="{909E8E84-426E-40DD-AFC4-6F175D3DCCD1}">
+                  <a14:hiddenFill xmlns:a14="http://schemas.microsoft.com/office/drawing/2010/main">
+                    <a:solidFill>
+                      <a:schemeClr val="accent1"/>
+                    </a:solidFill>
+                  </a14:hiddenFill>
+                </a:ext>
+              </a:extLst>
+            </p:spPr>
+            <p:style>
+              <a:lnRef idx="2">
+                <a:schemeClr val="accent1">
+                  <a:lumMod val="75000"/>
+                </a:schemeClr>
+              </a:lnRef>
+              <a:fillRef idx="1">
+                <a:schemeClr val="accent1"/>
+              </a:fillRef>
+              <a:effectRef idx="0">
+                <a:srgbClr val="FFFFFF"/>
+              </a:effectRef>
+              <a:fontRef idx="minor">
+                <a:schemeClr val="lt1"/>
+              </a:fontRef>
+            </p:style>
+            <p:txBody>
+              <a:bodyPr/>
+              <a:lstStyle/>
+              <a:p>
+                <a:r>
+                  <a:rPr lang="zh-CN" altLang="en-US">
+                    <a:noFill/>
+                  </a:rPr>
+                  <a:t> </a:t>
+                </a:r>
+              </a:p>
+            </p:txBody>
+          </p:sp>
+        </mc:Fallback>
+      </mc:AlternateContent>
+      <p:cxnSp>
+        <p:nvCxnSpPr>
+          <p:cNvPr id="48" name="肘形连接符 47"/>
+          <p:cNvCxnSpPr>
+            <a:stCxn id="40" idx="3"/>
+            <a:endCxn id="45" idx="1"/>
+          </p:cNvCxnSpPr>
+          <p:nvPr/>
+        </p:nvCxnSpPr>
+        <p:spPr>
+          <a:xfrm>
+            <a:off x="6494780" y="1205865"/>
+            <a:ext cx="524510" cy="367665"/>
+          </a:xfrm>
+          <a:prstGeom prst="bentConnector3">
+            <a:avLst>
+              <a:gd name="adj1" fmla="val 50000"/>
+            </a:avLst>
+          </a:prstGeom>
+          <a:ln w="19050">
+            <a:solidFill>
+              <a:schemeClr val="tx1"/>
+            </a:solidFill>
+            <a:tailEnd type="arrow"/>
+          </a:ln>
+        </p:spPr>
+        <p:style>
+          <a:lnRef idx="2">
+            <a:schemeClr val="accent1"/>
+          </a:lnRef>
+          <a:fillRef idx="0">
+            <a:srgbClr val="FFFFFF"/>
+          </a:fillRef>
+          <a:effectRef idx="0">
+            <a:srgbClr val="FFFFFF"/>
+          </a:effectRef>
+          <a:fontRef idx="minor">
+            <a:schemeClr val="tx1"/>
+          </a:fontRef>
+        </p:style>
+      </p:cxnSp>
+      <p:cxnSp>
+        <p:nvCxnSpPr>
+          <p:cNvPr id="55" name="直接箭头连接符 54"/>
+          <p:cNvCxnSpPr>
+            <a:stCxn id="45" idx="3"/>
+            <a:endCxn id="47" idx="1"/>
+          </p:cNvCxnSpPr>
+          <p:nvPr/>
+        </p:nvCxnSpPr>
+        <p:spPr>
+          <a:xfrm>
+            <a:off x="9119870" y="1573530"/>
+            <a:ext cx="372110" cy="0"/>
+          </a:xfrm>
+          <a:prstGeom prst="straightConnector1">
+            <a:avLst/>
+          </a:prstGeom>
+          <a:ln w="19050">
+            <a:solidFill>
+              <a:schemeClr val="tx1"/>
+            </a:solidFill>
+            <a:tailEnd type="arrow"/>
+          </a:ln>
+        </p:spPr>
+        <p:style>
+          <a:lnRef idx="2">
+            <a:schemeClr val="accent1"/>
+          </a:lnRef>
+          <a:fillRef idx="0">
+            <a:srgbClr val="FFFFFF"/>
+          </a:fillRef>
+          <a:effectRef idx="0">
+            <a:srgbClr val="FFFFFF"/>
+          </a:effectRef>
+          <a:fontRef idx="minor">
+            <a:schemeClr val="tx1"/>
+          </a:fontRef>
+        </p:style>
+      </p:cxnSp>
+      <p:grpSp>
+        <p:nvGrpSpPr>
+          <p:cNvPr id="82" name="组合 81"/>
+          <p:cNvGrpSpPr/>
+          <p:nvPr/>
+        </p:nvGrpSpPr>
+        <p:grpSpPr>
+          <a:xfrm>
+            <a:off x="996315" y="3429000"/>
+            <a:ext cx="9319895" cy="1800860"/>
+            <a:chOff x="1569" y="5400"/>
+            <a:chExt cx="14677" cy="2836"/>
+          </a:xfrm>
+        </p:grpSpPr>
+        <mc:AlternateContent xmlns:mc="http://schemas.openxmlformats.org/markup-compatibility/2006">
+          <mc:Choice xmlns:a14="http://schemas.microsoft.com/office/drawing/2010/main" Requires="a14">
+            <p:sp>
+              <p:nvSpPr>
+                <p:cNvPr id="60" name="矩形 59"/>
+                <p:cNvSpPr/>
+                <p:nvPr/>
+              </p:nvSpPr>
+              <p:spPr>
+                <a:xfrm>
+                  <a:off x="1569" y="5400"/>
+                  <a:ext cx="1733" cy="697"/>
+                </a:xfrm>
+                <a:prstGeom prst="rect">
+                  <a:avLst/>
+                </a:prstGeom>
+                <a:noFill/>
+                <a:ln w="19050">
+                  <a:solidFill>
+                    <a:schemeClr val="tx1"/>
+                  </a:solidFill>
+                </a:ln>
+                <a:extLst>
+                  <a:ext uri="{909E8E84-426E-40DD-AFC4-6F175D3DCCD1}">
+                    <a14:hiddenFill xmlns:a14="http://schemas.microsoft.com/office/drawing/2010/main">
+                      <a:solidFill>
+                        <a:schemeClr val="accent1"/>
+                      </a:solidFill>
+                    </a14:hiddenFill>
+                  </a:ext>
+                </a:extLst>
+              </p:spPr>
+              <p:style>
+                <a:lnRef idx="2">
+                  <a:schemeClr val="accent1">
+                    <a:lumMod val="75000"/>
+                  </a:schemeClr>
+                </a:lnRef>
+                <a:fillRef idx="1">
+                  <a:schemeClr val="accent1"/>
+                </a:fillRef>
+                <a:effectRef idx="0">
+                  <a:srgbClr val="FFFFFF"/>
+                </a:effectRef>
+                <a:fontRef idx="minor">
+                  <a:schemeClr val="lt1"/>
+                </a:fontRef>
+              </p:style>
+              <p:txBody>
+                <a:bodyPr rtlCol="0" anchor="ctr"/>
+                <a:p>
+                  <a:pPr algn="ctr"/>
+                  <a:r>
+                    <a:rPr lang="zh-CN" altLang="en-US" sz="1500">
+                      <a:solidFill>
+                        <a:schemeClr val="tx1"/>
+                      </a:solidFill>
+                      <a:latin typeface="Cambria Math" panose="02040503050406030204" charset="0"/>
+                      <a:cs typeface="Cambria Math" panose="02040503050406030204" charset="0"/>
+                    </a:rPr>
+                    <a:t>子点</a:t>
+                  </a:r>
+                  <a14:m>
+                    <m:oMath xmlns:m="http://schemas.openxmlformats.org/officeDocument/2006/math">
+                      <m:sSub>
+                        <m:sSubPr>
+                          <m:ctrlPr>
+                            <a:rPr lang="en-US" altLang="zh-CN" sz="1500" i="1">
+                              <a:solidFill>
+                                <a:schemeClr val="tx1"/>
+                              </a:solidFill>
+                              <a:latin typeface="Cambria Math" panose="02040503050406030204" charset="0"/>
+                              <a:cs typeface="Cambria Math" panose="02040503050406030204" charset="0"/>
+                            </a:rPr>
+                          </m:ctrlPr>
+                        </m:sSubPr>
+                        <m:e>
+                          <m:r>
+                            <a:rPr lang="en-US" altLang="zh-CN" sz="1500" i="1">
+                              <a:solidFill>
+                                <a:schemeClr val="tx1"/>
+                              </a:solidFill>
+                              <a:latin typeface="Cambria Math" panose="02040503050406030204" charset="0"/>
+                              <a:cs typeface="Cambria Math" panose="02040503050406030204" charset="0"/>
+                            </a:rPr>
+                            <m:t>𝑖𝑅</m:t>
+                          </m:r>
+                        </m:e>
+                        <m:sub>
+                          <m:r>
+                            <a:rPr lang="en-US" altLang="zh-CN" sz="1500" i="1">
+                              <a:solidFill>
+                                <a:schemeClr val="tx1"/>
+                              </a:solidFill>
+                              <a:latin typeface="Cambria Math" panose="02040503050406030204" charset="0"/>
+                              <a:cs typeface="Cambria Math" panose="02040503050406030204" charset="0"/>
+                            </a:rPr>
+                            <m:t>1</m:t>
+                          </m:r>
+                        </m:sub>
+                      </m:sSub>
+                    </m:oMath>
+                  </a14:m>
+                  <a:endParaRPr lang="zh-CN" altLang="en-US" sz="1500">
+                    <a:solidFill>
+                      <a:schemeClr val="tx1"/>
+                    </a:solidFill>
+                  </a:endParaRPr>
+                </a:p>
+              </p:txBody>
+            </p:sp>
+          </mc:Choice>
+          <mc:Fallback>
+            <p:sp>
+              <p:nvSpPr>
+                <p:cNvPr id="60" name="矩形 59"/>
+                <p:cNvSpPr>
+                  <a:spLocks noRot="1" noChangeAspect="1" noMove="1" noResize="1" noEditPoints="1" noAdjustHandles="1" noChangeArrowheads="1" noChangeShapeType="1" noTextEdit="1"/>
+                </p:cNvSpPr>
+                <p:nvPr/>
+              </p:nvSpPr>
+              <p:spPr>
+                <a:xfrm>
+                  <a:off x="1569" y="5400"/>
+                  <a:ext cx="1733" cy="697"/>
+                </a:xfrm>
+                <a:prstGeom prst="rect">
+                  <a:avLst/>
+                </a:prstGeom>
+                <a:blipFill rotWithShape="1">
+                  <a:blip r:embed="rId6"/>
+                </a:blipFill>
+                <a:ln w="19050">
+                  <a:solidFill>
+                    <a:schemeClr val="tx1"/>
+                  </a:solidFill>
+                </a:ln>
+                <a:extLst>
+                  <a:ext uri="{909E8E84-426E-40DD-AFC4-6F175D3DCCD1}">
+                    <a14:hiddenFill xmlns:a14="http://schemas.microsoft.com/office/drawing/2010/main">
+                      <a:solidFill>
+                        <a:schemeClr val="accent1"/>
+                      </a:solidFill>
+                    </a14:hiddenFill>
+                  </a:ext>
+                </a:extLst>
+              </p:spPr>
+              <p:style>
+                <a:lnRef idx="2">
+                  <a:schemeClr val="accent1">
+                    <a:lumMod val="75000"/>
+                  </a:schemeClr>
+                </a:lnRef>
+                <a:fillRef idx="1">
+                  <a:schemeClr val="accent1"/>
+                </a:fillRef>
+                <a:effectRef idx="0">
+                  <a:srgbClr val="FFFFFF"/>
+                </a:effectRef>
+                <a:fontRef idx="minor">
+                  <a:schemeClr val="lt1"/>
+                </a:fontRef>
+              </p:style>
+              <p:txBody>
+                <a:bodyPr/>
+                <a:lstStyle/>
+                <a:p>
+                  <a:r>
+                    <a:rPr lang="zh-CN" altLang="en-US">
+                      <a:noFill/>
+                    </a:rPr>
+                    <a:t> </a:t>
+                  </a:r>
+                </a:p>
+              </p:txBody>
+            </p:sp>
+          </mc:Fallback>
+        </mc:AlternateContent>
+        <mc:AlternateContent xmlns:mc="http://schemas.openxmlformats.org/markup-compatibility/2006">
+          <mc:Choice xmlns:a14="http://schemas.microsoft.com/office/drawing/2010/main" Requires="a14">
+            <p:sp>
+              <p:nvSpPr>
+                <p:cNvPr id="61" name="矩形 60"/>
+                <p:cNvSpPr/>
+                <p:nvPr/>
+              </p:nvSpPr>
+              <p:spPr>
+                <a:xfrm>
+                  <a:off x="1569" y="6470"/>
+                  <a:ext cx="1733" cy="697"/>
+                </a:xfrm>
+                <a:prstGeom prst="rect">
+                  <a:avLst/>
+                </a:prstGeom>
+                <a:noFill/>
+                <a:ln w="19050">
+                  <a:solidFill>
+                    <a:schemeClr val="tx1"/>
+                  </a:solidFill>
+                </a:ln>
+                <a:extLst>
+                  <a:ext uri="{909E8E84-426E-40DD-AFC4-6F175D3DCCD1}">
+                    <a14:hiddenFill xmlns:a14="http://schemas.microsoft.com/office/drawing/2010/main">
+                      <a:solidFill>
+                        <a:schemeClr val="accent1"/>
+                      </a:solidFill>
+                    </a14:hiddenFill>
+                  </a:ext>
+                </a:extLst>
+              </p:spPr>
+              <p:style>
+                <a:lnRef idx="2">
+                  <a:schemeClr val="accent1">
+                    <a:lumMod val="75000"/>
+                  </a:schemeClr>
+                </a:lnRef>
+                <a:fillRef idx="1">
+                  <a:schemeClr val="accent1"/>
+                </a:fillRef>
+                <a:effectRef idx="0">
+                  <a:srgbClr val="FFFFFF"/>
+                </a:effectRef>
+                <a:fontRef idx="minor">
+                  <a:schemeClr val="lt1"/>
+                </a:fontRef>
+              </p:style>
+              <p:txBody>
+                <a:bodyPr rtlCol="0" anchor="ctr"/>
+                <a:p>
+                  <a:pPr algn="ctr"/>
+                  <a:r>
+                    <a:rPr lang="zh-CN" altLang="en-US" sz="1500">
+                      <a:solidFill>
+                        <a:schemeClr val="tx1"/>
+                      </a:solidFill>
+                      <a:latin typeface="Cambria Math" panose="02040503050406030204" charset="0"/>
+                      <a:cs typeface="Cambria Math" panose="02040503050406030204" charset="0"/>
+                    </a:rPr>
+                    <a:t>子点</a:t>
+                  </a:r>
+                  <a14:m>
+                    <m:oMath xmlns:m="http://schemas.openxmlformats.org/officeDocument/2006/math">
+                      <m:sSub>
+                        <m:sSubPr>
+                          <m:ctrlPr>
+                            <a:rPr lang="en-US" altLang="zh-CN" sz="1500" i="1">
+                              <a:solidFill>
+                                <a:schemeClr val="tx1"/>
+                              </a:solidFill>
+                              <a:latin typeface="Cambria Math" panose="02040503050406030204" charset="0"/>
+                              <a:cs typeface="Cambria Math" panose="02040503050406030204" charset="0"/>
+                            </a:rPr>
+                          </m:ctrlPr>
+                        </m:sSubPr>
+                        <m:e>
+                          <m:r>
+                            <a:rPr lang="en-US" altLang="zh-CN" sz="1500" i="1">
+                              <a:solidFill>
+                                <a:schemeClr val="tx1"/>
+                              </a:solidFill>
+                              <a:latin typeface="Cambria Math" panose="02040503050406030204" charset="0"/>
+                              <a:cs typeface="Cambria Math" panose="02040503050406030204" charset="0"/>
+                            </a:rPr>
+                            <m:t>𝑖𝑅</m:t>
+                          </m:r>
+                        </m:e>
+                        <m:sub>
+                          <m:r>
+                            <a:rPr lang="en-US" altLang="zh-CN" sz="1500" i="1">
+                              <a:solidFill>
+                                <a:schemeClr val="tx1"/>
+                              </a:solidFill>
+                              <a:latin typeface="Cambria Math" panose="02040503050406030204" charset="0"/>
+                              <a:cs typeface="Cambria Math" panose="02040503050406030204" charset="0"/>
+                            </a:rPr>
+                            <m:t>2</m:t>
+                          </m:r>
+                        </m:sub>
+                      </m:sSub>
+                    </m:oMath>
+                  </a14:m>
+                  <a:endParaRPr lang="zh-CN" altLang="en-US" sz="1500">
+                    <a:solidFill>
+                      <a:schemeClr val="tx1"/>
+                    </a:solidFill>
+                  </a:endParaRPr>
+                </a:p>
+              </p:txBody>
+            </p:sp>
+          </mc:Choice>
+          <mc:Fallback>
+            <p:sp>
+              <p:nvSpPr>
+                <p:cNvPr id="61" name="矩形 60"/>
+                <p:cNvSpPr>
+                  <a:spLocks noRot="1" noChangeAspect="1" noMove="1" noResize="1" noEditPoints="1" noAdjustHandles="1" noChangeArrowheads="1" noChangeShapeType="1" noTextEdit="1"/>
+                </p:cNvSpPr>
+                <p:nvPr/>
+              </p:nvSpPr>
+              <p:spPr>
+                <a:xfrm>
+                  <a:off x="1569" y="6470"/>
+                  <a:ext cx="1733" cy="697"/>
+                </a:xfrm>
+                <a:prstGeom prst="rect">
+                  <a:avLst/>
+                </a:prstGeom>
+                <a:blipFill rotWithShape="1">
+                  <a:blip r:embed="rId7"/>
+                </a:blipFill>
+                <a:ln w="19050">
+                  <a:solidFill>
+                    <a:schemeClr val="tx1"/>
+                  </a:solidFill>
+                </a:ln>
+                <a:extLst>
+                  <a:ext uri="{909E8E84-426E-40DD-AFC4-6F175D3DCCD1}">
+                    <a14:hiddenFill xmlns:a14="http://schemas.microsoft.com/office/drawing/2010/main">
+                      <a:solidFill>
+                        <a:schemeClr val="accent1"/>
+                      </a:solidFill>
+                    </a14:hiddenFill>
+                  </a:ext>
+                </a:extLst>
+              </p:spPr>
+              <p:style>
+                <a:lnRef idx="2">
+                  <a:schemeClr val="accent1">
+                    <a:lumMod val="75000"/>
+                  </a:schemeClr>
+                </a:lnRef>
+                <a:fillRef idx="1">
+                  <a:schemeClr val="accent1"/>
+                </a:fillRef>
+                <a:effectRef idx="0">
+                  <a:srgbClr val="FFFFFF"/>
+                </a:effectRef>
+                <a:fontRef idx="minor">
+                  <a:schemeClr val="lt1"/>
+                </a:fontRef>
+              </p:style>
+              <p:txBody>
+                <a:bodyPr/>
+                <a:lstStyle/>
+                <a:p>
+                  <a:r>
+                    <a:rPr lang="zh-CN" altLang="en-US">
+                      <a:noFill/>
+                    </a:rPr>
+                    <a:t> </a:t>
+                  </a:r>
+                </a:p>
+              </p:txBody>
+            </p:sp>
+          </mc:Fallback>
+        </mc:AlternateContent>
+        <mc:AlternateContent xmlns:mc="http://schemas.openxmlformats.org/markup-compatibility/2006">
+          <mc:Choice xmlns:a14="http://schemas.microsoft.com/office/drawing/2010/main" Requires="a14">
+            <p:sp>
+              <p:nvSpPr>
+                <p:cNvPr id="62" name="矩形 61"/>
+                <p:cNvSpPr/>
+                <p:nvPr/>
+              </p:nvSpPr>
+              <p:spPr>
+                <a:xfrm>
+                  <a:off x="1569" y="7540"/>
+                  <a:ext cx="1733" cy="697"/>
+                </a:xfrm>
+                <a:prstGeom prst="rect">
+                  <a:avLst/>
+                </a:prstGeom>
+                <a:noFill/>
+                <a:ln w="19050">
+                  <a:solidFill>
+                    <a:schemeClr val="tx1"/>
+                  </a:solidFill>
+                </a:ln>
+                <a:extLst>
+                  <a:ext uri="{909E8E84-426E-40DD-AFC4-6F175D3DCCD1}">
+                    <a14:hiddenFill xmlns:a14="http://schemas.microsoft.com/office/drawing/2010/main">
+                      <a:solidFill>
+                        <a:schemeClr val="accent1"/>
+                      </a:solidFill>
+                    </a14:hiddenFill>
+                  </a:ext>
+                </a:extLst>
+              </p:spPr>
+              <p:style>
+                <a:lnRef idx="2">
+                  <a:schemeClr val="accent1">
+                    <a:lumMod val="75000"/>
+                  </a:schemeClr>
+                </a:lnRef>
+                <a:fillRef idx="1">
+                  <a:schemeClr val="accent1"/>
+                </a:fillRef>
+                <a:effectRef idx="0">
+                  <a:srgbClr val="FFFFFF"/>
+                </a:effectRef>
+                <a:fontRef idx="minor">
+                  <a:schemeClr val="lt1"/>
+                </a:fontRef>
+              </p:style>
+              <p:txBody>
+                <a:bodyPr rtlCol="0" anchor="ctr"/>
+                <a:p>
+                  <a:pPr algn="ctr"/>
+                  <a:r>
+                    <a:rPr lang="zh-CN" altLang="en-US" sz="1500">
+                      <a:solidFill>
+                        <a:schemeClr val="tx1"/>
+                      </a:solidFill>
+                      <a:latin typeface="Cambria Math" panose="02040503050406030204" charset="0"/>
+                      <a:cs typeface="Cambria Math" panose="02040503050406030204" charset="0"/>
+                    </a:rPr>
+                    <a:t>子点</a:t>
+                  </a:r>
+                  <a14:m>
+                    <m:oMath xmlns:m="http://schemas.openxmlformats.org/officeDocument/2006/math">
+                      <m:sSub>
+                        <m:sSubPr>
+                          <m:ctrlPr>
+                            <a:rPr lang="en-US" altLang="zh-CN" sz="1500" i="1">
+                              <a:solidFill>
+                                <a:schemeClr val="tx1"/>
+                              </a:solidFill>
+                              <a:latin typeface="Cambria Math" panose="02040503050406030204" charset="0"/>
+                              <a:cs typeface="Cambria Math" panose="02040503050406030204" charset="0"/>
+                            </a:rPr>
+                          </m:ctrlPr>
+                        </m:sSubPr>
+                        <m:e>
+                          <m:r>
+                            <a:rPr lang="en-US" altLang="zh-CN" sz="1500" i="1">
+                              <a:solidFill>
+                                <a:schemeClr val="tx1"/>
+                              </a:solidFill>
+                              <a:latin typeface="Cambria Math" panose="02040503050406030204" charset="0"/>
+                              <a:cs typeface="Cambria Math" panose="02040503050406030204" charset="0"/>
+                            </a:rPr>
+                            <m:t>𝑖𝑅</m:t>
+                          </m:r>
+                        </m:e>
+                        <m:sub>
+                          <m:r>
+                            <a:rPr lang="en-US" altLang="zh-CN" sz="1500" i="1">
+                              <a:solidFill>
+                                <a:schemeClr val="tx1"/>
+                              </a:solidFill>
+                              <a:latin typeface="Cambria Math" panose="02040503050406030204" charset="0"/>
+                              <a:cs typeface="Cambria Math" panose="02040503050406030204" charset="0"/>
+                            </a:rPr>
+                            <m:t>𝑘</m:t>
+                          </m:r>
+                        </m:sub>
+                      </m:sSub>
+                    </m:oMath>
+                  </a14:m>
+                  <a:endParaRPr lang="zh-CN" altLang="en-US" sz="1500">
+                    <a:solidFill>
+                      <a:schemeClr val="tx1"/>
+                    </a:solidFill>
+                  </a:endParaRPr>
+                </a:p>
+              </p:txBody>
+            </p:sp>
+          </mc:Choice>
+          <mc:Fallback>
+            <p:sp>
+              <p:nvSpPr>
+                <p:cNvPr id="62" name="矩形 61"/>
+                <p:cNvSpPr>
+                  <a:spLocks noRot="1" noChangeAspect="1" noMove="1" noResize="1" noEditPoints="1" noAdjustHandles="1" noChangeArrowheads="1" noChangeShapeType="1" noTextEdit="1"/>
+                </p:cNvSpPr>
+                <p:nvPr/>
+              </p:nvSpPr>
+              <p:spPr>
+                <a:xfrm>
+                  <a:off x="1569" y="7540"/>
+                  <a:ext cx="1733" cy="697"/>
+                </a:xfrm>
+                <a:prstGeom prst="rect">
+                  <a:avLst/>
+                </a:prstGeom>
+                <a:blipFill rotWithShape="1">
+                  <a:blip r:embed="rId8"/>
+                </a:blipFill>
+                <a:ln w="19050">
+                  <a:solidFill>
+                    <a:schemeClr val="tx1"/>
+                  </a:solidFill>
+                </a:ln>
+                <a:extLst>
+                  <a:ext uri="{909E8E84-426E-40DD-AFC4-6F175D3DCCD1}">
+                    <a14:hiddenFill xmlns:a14="http://schemas.microsoft.com/office/drawing/2010/main">
+                      <a:solidFill>
+                        <a:schemeClr val="accent1"/>
+                      </a:solidFill>
+                    </a14:hiddenFill>
+                  </a:ext>
+                </a:extLst>
+              </p:spPr>
+              <p:style>
+                <a:lnRef idx="2">
+                  <a:schemeClr val="accent1">
+                    <a:lumMod val="75000"/>
+                  </a:schemeClr>
+                </a:lnRef>
+                <a:fillRef idx="1">
+                  <a:schemeClr val="accent1"/>
+                </a:fillRef>
+                <a:effectRef idx="0">
+                  <a:srgbClr val="FFFFFF"/>
+                </a:effectRef>
+                <a:fontRef idx="minor">
+                  <a:schemeClr val="lt1"/>
+                </a:fontRef>
+              </p:style>
+              <p:txBody>
+                <a:bodyPr/>
+                <a:lstStyle/>
+                <a:p>
+                  <a:r>
+                    <a:rPr lang="zh-CN" altLang="en-US">
+                      <a:noFill/>
+                    </a:rPr>
+                    <a:t> </a:t>
+                  </a:r>
+                </a:p>
+              </p:txBody>
+            </p:sp>
+          </mc:Fallback>
+        </mc:AlternateContent>
+        <p:sp>
+          <p:nvSpPr>
+            <p:cNvPr id="64" name="矩形 63"/>
+            <p:cNvSpPr/>
+            <p:nvPr/>
+          </p:nvSpPr>
+          <p:spPr>
+            <a:xfrm>
+              <a:off x="4550" y="6350"/>
+              <a:ext cx="2483" cy="937"/>
+            </a:xfrm>
+            <a:prstGeom prst="rect">
+              <a:avLst/>
+            </a:prstGeom>
+            <a:noFill/>
+            <a:ln w="19050">
+              <a:solidFill>
+                <a:schemeClr val="tx1"/>
+              </a:solidFill>
+            </a:ln>
+            <a:extLst>
+              <a:ext uri="{909E8E84-426E-40DD-AFC4-6F175D3DCCD1}">
+                <a14:hiddenFill xmlns:a14="http://schemas.microsoft.com/office/drawing/2010/main">
+                  <a:solidFill>
+                    <a:schemeClr val="accent1"/>
+                  </a:solidFill>
+                </a14:hiddenFill>
+              </a:ext>
+            </a:extLst>
+          </p:spPr>
+          <p:style>
+            <a:lnRef idx="2">
+              <a:schemeClr val="accent1">
+                <a:lumMod val="75000"/>
+              </a:schemeClr>
+            </a:lnRef>
+            <a:fillRef idx="1">
+              <a:schemeClr val="accent1"/>
+            </a:fillRef>
+            <a:effectRef idx="0">
+              <a:srgbClr val="FFFFFF"/>
+            </a:effectRef>
+            <a:fontRef idx="minor">
+              <a:schemeClr val="lt1"/>
+            </a:fontRef>
+          </p:style>
+          <p:txBody>
+            <a:bodyPr rtlCol="0" anchor="ctr"/>
+            <a:p>
+              <a:pPr algn="ctr"/>
+              <a:r>
+                <a:rPr lang="zh-CN" altLang="en-US" sz="1500">
+                  <a:solidFill>
+                    <a:schemeClr val="tx1"/>
+                  </a:solidFill>
+                </a:rPr>
+                <a:t>高斯归一化积</a:t>
+              </a:r>
+              <a:endParaRPr lang="zh-CN" altLang="en-US" sz="1500">
+                <a:solidFill>
+                  <a:schemeClr val="tx1"/>
+                </a:solidFill>
+              </a:endParaRPr>
+            </a:p>
+          </p:txBody>
+        </p:sp>
+        <p:cxnSp>
+          <p:nvCxnSpPr>
+            <p:cNvPr id="65" name="肘形连接符 64"/>
+            <p:cNvCxnSpPr>
+              <a:stCxn id="60" idx="3"/>
+              <a:endCxn id="64" idx="1"/>
+            </p:cNvCxnSpPr>
+            <p:nvPr/>
+          </p:nvCxnSpPr>
+          <p:spPr>
+            <a:xfrm>
+              <a:off x="3302" y="5749"/>
+              <a:ext cx="1248" cy="1070"/>
+            </a:xfrm>
+            <a:prstGeom prst="bentConnector3">
+              <a:avLst>
+                <a:gd name="adj1" fmla="val 50000"/>
+              </a:avLst>
+            </a:prstGeom>
+            <a:ln w="19050">
+              <a:solidFill>
+                <a:schemeClr val="tx1"/>
+              </a:solidFill>
+              <a:tailEnd type="arrow"/>
+            </a:ln>
+          </p:spPr>
+          <p:style>
+            <a:lnRef idx="2">
+              <a:schemeClr val="accent1"/>
+            </a:lnRef>
+            <a:fillRef idx="0">
+              <a:srgbClr val="FFFFFF"/>
+            </a:fillRef>
+            <a:effectRef idx="0">
+              <a:srgbClr val="FFFFFF"/>
+            </a:effectRef>
+            <a:fontRef idx="minor">
+              <a:schemeClr val="tx1"/>
+            </a:fontRef>
+          </p:style>
+        </p:cxnSp>
+        <p:cxnSp>
+          <p:nvCxnSpPr>
+            <p:cNvPr id="66" name="肘形连接符 65"/>
+            <p:cNvCxnSpPr>
+              <a:stCxn id="62" idx="3"/>
+              <a:endCxn id="64" idx="1"/>
+            </p:cNvCxnSpPr>
+            <p:nvPr/>
+          </p:nvCxnSpPr>
+          <p:spPr>
+            <a:xfrm flipV="1">
+              <a:off x="3302" y="6819"/>
+              <a:ext cx="1248" cy="1070"/>
+            </a:xfrm>
+            <a:prstGeom prst="bentConnector3">
+              <a:avLst>
+                <a:gd name="adj1" fmla="val 50000"/>
+              </a:avLst>
+            </a:prstGeom>
+            <a:ln w="19050">
+              <a:solidFill>
+                <a:schemeClr val="tx1"/>
+              </a:solidFill>
+              <a:tailEnd type="arrow"/>
+            </a:ln>
+          </p:spPr>
+          <p:style>
+            <a:lnRef idx="2">
+              <a:schemeClr val="accent1"/>
+            </a:lnRef>
+            <a:fillRef idx="0">
+              <a:srgbClr val="FFFFFF"/>
+            </a:fillRef>
+            <a:effectRef idx="0">
+              <a:srgbClr val="FFFFFF"/>
+            </a:effectRef>
+            <a:fontRef idx="minor">
+              <a:schemeClr val="tx1"/>
+            </a:fontRef>
+          </p:style>
+        </p:cxnSp>
+        <p:cxnSp>
+          <p:nvCxnSpPr>
+            <p:cNvPr id="67" name="直接箭头连接符 66"/>
+            <p:cNvCxnSpPr>
+              <a:stCxn id="61" idx="3"/>
+              <a:endCxn id="64" idx="1"/>
+            </p:cNvCxnSpPr>
+            <p:nvPr/>
+          </p:nvCxnSpPr>
+          <p:spPr>
+            <a:xfrm>
+              <a:off x="3302" y="6819"/>
+              <a:ext cx="1248" cy="0"/>
+            </a:xfrm>
+            <a:prstGeom prst="straightConnector1">
+              <a:avLst/>
+            </a:prstGeom>
+            <a:ln w="19050">
+              <a:solidFill>
+                <a:schemeClr val="tx1"/>
+              </a:solidFill>
+              <a:tailEnd type="arrow"/>
+            </a:ln>
+          </p:spPr>
+          <p:style>
+            <a:lnRef idx="2">
+              <a:schemeClr val="accent1"/>
+            </a:lnRef>
+            <a:fillRef idx="0">
+              <a:srgbClr val="FFFFFF"/>
+            </a:fillRef>
+            <a:effectRef idx="0">
+              <a:srgbClr val="FFFFFF"/>
+            </a:effectRef>
+            <a:fontRef idx="minor">
+              <a:schemeClr val="tx1"/>
+            </a:fontRef>
+          </p:style>
+        </p:cxnSp>
+        <mc:AlternateContent xmlns:mc="http://schemas.openxmlformats.org/markup-compatibility/2006">
+          <mc:Choice xmlns:a14="http://schemas.microsoft.com/office/drawing/2010/main" Requires="a14">
+            <p:sp>
+              <p:nvSpPr>
+                <p:cNvPr id="70" name="矩形 69"/>
+                <p:cNvSpPr/>
+                <p:nvPr/>
+              </p:nvSpPr>
+              <p:spPr>
+                <a:xfrm>
+                  <a:off x="7771" y="7315"/>
+                  <a:ext cx="1939" cy="697"/>
+                </a:xfrm>
+                <a:prstGeom prst="rect">
+                  <a:avLst/>
+                </a:prstGeom>
+                <a:noFill/>
+                <a:ln w="19050">
+                  <a:solidFill>
+                    <a:schemeClr val="tx1"/>
+                  </a:solidFill>
+                </a:ln>
+                <a:extLst>
+                  <a:ext uri="{909E8E84-426E-40DD-AFC4-6F175D3DCCD1}">
+                    <a14:hiddenFill xmlns:a14="http://schemas.microsoft.com/office/drawing/2010/main">
+                      <a:solidFill>
+                        <a:schemeClr val="accent1"/>
+                      </a:solidFill>
+                    </a14:hiddenFill>
+                  </a:ext>
+                </a:extLst>
+              </p:spPr>
+              <p:style>
+                <a:lnRef idx="2">
+                  <a:schemeClr val="accent1">
+                    <a:lumMod val="75000"/>
+                  </a:schemeClr>
+                </a:lnRef>
+                <a:fillRef idx="1">
+                  <a:schemeClr val="accent1"/>
+                </a:fillRef>
+                <a:effectRef idx="0">
+                  <a:srgbClr val="FFFFFF"/>
+                </a:effectRef>
+                <a:fontRef idx="minor">
+                  <a:schemeClr val="lt1"/>
+                </a:fontRef>
+              </p:style>
+              <p:txBody>
+                <a:bodyPr rtlCol="0" anchor="ctr"/>
+                <a:p>
+                  <a:pPr algn="ctr"/>
+                  <a:r>
+                    <a:rPr lang="zh-CN" altLang="en-US" sz="1500">
+                      <a:solidFill>
+                        <a:schemeClr val="tx1"/>
+                      </a:solidFill>
+                      <a:latin typeface="Cambria Math" panose="02040503050406030204" charset="0"/>
+                      <a:cs typeface="Cambria Math" panose="02040503050406030204" charset="0"/>
+                    </a:rPr>
+                    <a:t>更新父点</a:t>
+                  </a:r>
+                  <a14:m>
+                    <m:oMath xmlns:m="http://schemas.openxmlformats.org/officeDocument/2006/math">
+                      <m:sSub>
+                        <m:sSubPr>
+                          <m:ctrlPr>
+                            <a:rPr lang="en-US" altLang="zh-CN" sz="1500" i="1">
+                              <a:solidFill>
+                                <a:schemeClr val="tx1"/>
+                              </a:solidFill>
+                              <a:latin typeface="Cambria Math" panose="02040503050406030204" charset="0"/>
+                              <a:cs typeface="Cambria Math" panose="02040503050406030204" charset="0"/>
+                            </a:rPr>
+                          </m:ctrlPr>
+                        </m:sSubPr>
+                        <m:e>
+                          <m:r>
+                            <a:rPr lang="en-US" altLang="zh-CN" sz="1500" i="1">
+                              <a:solidFill>
+                                <a:schemeClr val="tx1"/>
+                              </a:solidFill>
+                              <a:latin typeface="Cambria Math" panose="02040503050406030204" charset="0"/>
+                              <a:cs typeface="Cambria Math" panose="02040503050406030204" charset="0"/>
+                            </a:rPr>
+                            <m:t>𝑑</m:t>
+                          </m:r>
+                        </m:e>
+                        <m:sub>
+                          <m:r>
+                            <a:rPr lang="en-US" altLang="zh-CN" sz="1500" i="1">
+                              <a:solidFill>
+                                <a:schemeClr val="tx1"/>
+                              </a:solidFill>
+                              <a:latin typeface="Cambria Math" panose="02040503050406030204" charset="0"/>
+                              <a:cs typeface="Cambria Math" panose="02040503050406030204" charset="0"/>
+                            </a:rPr>
+                            <m:t>𝑝𝑖</m:t>
+                          </m:r>
+                        </m:sub>
+                      </m:sSub>
+                    </m:oMath>
+                  </a14:m>
+                  <a:endParaRPr lang="zh-CN" altLang="en-US" sz="1500">
+                    <a:solidFill>
+                      <a:schemeClr val="tx1"/>
+                    </a:solidFill>
+                  </a:endParaRPr>
+                </a:p>
+              </p:txBody>
+            </p:sp>
+          </mc:Choice>
+          <mc:Fallback>
+            <p:sp>
+              <p:nvSpPr>
+                <p:cNvPr id="70" name="矩形 69"/>
+                <p:cNvSpPr>
+                  <a:spLocks noRot="1" noChangeAspect="1" noMove="1" noResize="1" noEditPoints="1" noAdjustHandles="1" noChangeArrowheads="1" noChangeShapeType="1" noTextEdit="1"/>
+                </p:cNvSpPr>
+                <p:nvPr/>
+              </p:nvSpPr>
+              <p:spPr>
+                <a:xfrm>
+                  <a:off x="7771" y="7315"/>
+                  <a:ext cx="1939" cy="697"/>
+                </a:xfrm>
+                <a:prstGeom prst="rect">
+                  <a:avLst/>
+                </a:prstGeom>
+                <a:blipFill rotWithShape="1">
+                  <a:blip r:embed="rId9"/>
+                </a:blipFill>
+                <a:ln w="19050">
+                  <a:solidFill>
+                    <a:schemeClr val="tx1"/>
+                  </a:solidFill>
+                </a:ln>
+                <a:extLst>
+                  <a:ext uri="{909E8E84-426E-40DD-AFC4-6F175D3DCCD1}">
+                    <a14:hiddenFill xmlns:a14="http://schemas.microsoft.com/office/drawing/2010/main">
+                      <a:solidFill>
+                        <a:schemeClr val="accent1"/>
+                      </a:solidFill>
+                    </a14:hiddenFill>
+                  </a:ext>
+                </a:extLst>
+              </p:spPr>
+              <p:style>
+                <a:lnRef idx="2">
+                  <a:schemeClr val="accent1">
+                    <a:lumMod val="75000"/>
+                  </a:schemeClr>
+                </a:lnRef>
+                <a:fillRef idx="1">
+                  <a:schemeClr val="accent1"/>
+                </a:fillRef>
+                <a:effectRef idx="0">
+                  <a:srgbClr val="FFFFFF"/>
+                </a:effectRef>
+                <a:fontRef idx="minor">
+                  <a:schemeClr val="lt1"/>
+                </a:fontRef>
+              </p:style>
+              <p:txBody>
+                <a:bodyPr/>
+                <a:lstStyle/>
+                <a:p>
+                  <a:r>
+                    <a:rPr lang="zh-CN" altLang="en-US">
+                      <a:noFill/>
+                    </a:rPr>
+                    <a:t> </a:t>
+                  </a:r>
+                </a:p>
+              </p:txBody>
+            </p:sp>
+          </mc:Fallback>
+        </mc:AlternateContent>
+        <mc:AlternateContent xmlns:mc="http://schemas.openxmlformats.org/markup-compatibility/2006">
+          <mc:Choice xmlns:a14="http://schemas.microsoft.com/office/drawing/2010/main" Requires="a14">
+            <p:sp>
+              <p:nvSpPr>
+                <p:cNvPr id="71" name="矩形 70"/>
+                <p:cNvSpPr/>
+                <p:nvPr/>
+              </p:nvSpPr>
+              <p:spPr>
+                <a:xfrm>
+                  <a:off x="7771" y="5625"/>
+                  <a:ext cx="1939" cy="697"/>
+                </a:xfrm>
+                <a:prstGeom prst="rect">
+                  <a:avLst/>
+                </a:prstGeom>
+                <a:noFill/>
+                <a:ln w="19050">
+                  <a:solidFill>
+                    <a:schemeClr val="tx1"/>
+                  </a:solidFill>
+                </a:ln>
+                <a:extLst>
+                  <a:ext uri="{909E8E84-426E-40DD-AFC4-6F175D3DCCD1}">
+                    <a14:hiddenFill xmlns:a14="http://schemas.microsoft.com/office/drawing/2010/main">
+                      <a:solidFill>
+                        <a:schemeClr val="accent1"/>
+                      </a:solidFill>
+                    </a14:hiddenFill>
+                  </a:ext>
+                </a:extLst>
+              </p:spPr>
+              <p:style>
+                <a:lnRef idx="2">
+                  <a:schemeClr val="accent1">
+                    <a:lumMod val="75000"/>
+                  </a:schemeClr>
+                </a:lnRef>
+                <a:fillRef idx="1">
+                  <a:schemeClr val="accent1"/>
+                </a:fillRef>
+                <a:effectRef idx="0">
+                  <a:srgbClr val="FFFFFF"/>
+                </a:effectRef>
+                <a:fontRef idx="minor">
+                  <a:schemeClr val="lt1"/>
+                </a:fontRef>
+              </p:style>
+              <p:txBody>
+                <a:bodyPr rtlCol="0" anchor="ctr"/>
+                <a:p>
+                  <a:pPr algn="ctr"/>
+                  <a:r>
+                    <a:rPr lang="zh-CN" altLang="en-US" sz="1500">
+                      <a:solidFill>
+                        <a:schemeClr val="tx1"/>
+                      </a:solidFill>
+                      <a:latin typeface="Cambria Math" panose="02040503050406030204" charset="0"/>
+                      <a:cs typeface="Cambria Math" panose="02040503050406030204" charset="0"/>
+                    </a:rPr>
+                    <a:t>更新父点</a:t>
+                  </a:r>
+                  <a14:m>
+                    <m:oMath xmlns:m="http://schemas.openxmlformats.org/officeDocument/2006/math">
+                      <m:r>
+                        <a:rPr lang="en-US" altLang="zh-CN" sz="1500" i="1">
+                          <a:solidFill>
+                            <a:schemeClr val="tx1"/>
+                          </a:solidFill>
+                          <a:latin typeface="Cambria Math" panose="02040503050406030204" charset="0"/>
+                          <a:cs typeface="Cambria Math" panose="02040503050406030204" charset="0"/>
+                        </a:rPr>
+                        <m:t>𝑖𝑅</m:t>
+                      </m:r>
+                    </m:oMath>
+                  </a14:m>
+                  <a:endParaRPr lang="zh-CN" altLang="en-US" sz="1500">
+                    <a:solidFill>
+                      <a:schemeClr val="tx1"/>
+                    </a:solidFill>
+                  </a:endParaRPr>
+                </a:p>
+              </p:txBody>
+            </p:sp>
+          </mc:Choice>
+          <mc:Fallback>
+            <p:sp>
+              <p:nvSpPr>
+                <p:cNvPr id="71" name="矩形 70"/>
+                <p:cNvSpPr>
+                  <a:spLocks noRot="1" noChangeAspect="1" noMove="1" noResize="1" noEditPoints="1" noAdjustHandles="1" noChangeArrowheads="1" noChangeShapeType="1" noTextEdit="1"/>
+                </p:cNvSpPr>
+                <p:nvPr/>
+              </p:nvSpPr>
+              <p:spPr>
+                <a:xfrm>
+                  <a:off x="7771" y="5625"/>
+                  <a:ext cx="1939" cy="697"/>
+                </a:xfrm>
+                <a:prstGeom prst="rect">
+                  <a:avLst/>
+                </a:prstGeom>
+                <a:blipFill rotWithShape="1">
+                  <a:blip r:embed="rId10"/>
+                </a:blipFill>
+                <a:ln w="19050">
+                  <a:solidFill>
+                    <a:schemeClr val="tx1"/>
+                  </a:solidFill>
+                </a:ln>
+                <a:extLst>
+                  <a:ext uri="{909E8E84-426E-40DD-AFC4-6F175D3DCCD1}">
+                    <a14:hiddenFill xmlns:a14="http://schemas.microsoft.com/office/drawing/2010/main">
+                      <a:solidFill>
+                        <a:schemeClr val="accent1"/>
+                      </a:solidFill>
+                    </a14:hiddenFill>
+                  </a:ext>
+                </a:extLst>
+              </p:spPr>
+              <p:style>
+                <a:lnRef idx="2">
+                  <a:schemeClr val="accent1">
+                    <a:lumMod val="75000"/>
+                  </a:schemeClr>
+                </a:lnRef>
+                <a:fillRef idx="1">
+                  <a:schemeClr val="accent1"/>
+                </a:fillRef>
+                <a:effectRef idx="0">
+                  <a:srgbClr val="FFFFFF"/>
+                </a:effectRef>
+                <a:fontRef idx="minor">
+                  <a:schemeClr val="lt1"/>
+                </a:fontRef>
+              </p:style>
+              <p:txBody>
+                <a:bodyPr/>
+                <a:lstStyle/>
+                <a:p>
+                  <a:r>
+                    <a:rPr lang="zh-CN" altLang="en-US">
+                      <a:noFill/>
+                    </a:rPr>
+                    <a:t> </a:t>
+                  </a:r>
+                </a:p>
+              </p:txBody>
+            </p:sp>
+          </mc:Fallback>
+        </mc:AlternateContent>
+        <p:cxnSp>
+          <p:nvCxnSpPr>
+            <p:cNvPr id="72" name="肘形连接符 71"/>
+            <p:cNvCxnSpPr>
+              <a:stCxn id="64" idx="3"/>
+              <a:endCxn id="71" idx="1"/>
+            </p:cNvCxnSpPr>
+            <p:nvPr/>
+          </p:nvCxnSpPr>
+          <p:spPr>
+            <a:xfrm flipV="1">
+              <a:off x="7033" y="5974"/>
+              <a:ext cx="738" cy="845"/>
+            </a:xfrm>
+            <a:prstGeom prst="bentConnector3">
+              <a:avLst>
+                <a:gd name="adj1" fmla="val 50000"/>
+              </a:avLst>
+            </a:prstGeom>
+            <a:ln w="19050">
+              <a:solidFill>
+                <a:schemeClr val="tx1"/>
+              </a:solidFill>
+              <a:tailEnd type="arrow"/>
+            </a:ln>
+          </p:spPr>
+          <p:style>
+            <a:lnRef idx="2">
+              <a:schemeClr val="accent1"/>
+            </a:lnRef>
+            <a:fillRef idx="0">
+              <a:srgbClr val="FFFFFF"/>
+            </a:fillRef>
+            <a:effectRef idx="0">
+              <a:srgbClr val="FFFFFF"/>
+            </a:effectRef>
+            <a:fontRef idx="minor">
+              <a:schemeClr val="tx1"/>
+            </a:fontRef>
+          </p:style>
+        </p:cxnSp>
+        <p:cxnSp>
+          <p:nvCxnSpPr>
+            <p:cNvPr id="73" name="肘形连接符 72"/>
+            <p:cNvCxnSpPr>
+              <a:stCxn id="64" idx="3"/>
+              <a:endCxn id="70" idx="1"/>
+            </p:cNvCxnSpPr>
+            <p:nvPr/>
+          </p:nvCxnSpPr>
+          <p:spPr>
+            <a:xfrm>
+              <a:off x="7033" y="6819"/>
+              <a:ext cx="738" cy="845"/>
+            </a:xfrm>
+            <a:prstGeom prst="bentConnector3">
+              <a:avLst>
+                <a:gd name="adj1" fmla="val 50000"/>
+              </a:avLst>
+            </a:prstGeom>
+            <a:ln w="19050">
+              <a:solidFill>
+                <a:schemeClr val="tx1"/>
+              </a:solidFill>
+              <a:tailEnd type="arrow"/>
+            </a:ln>
+          </p:spPr>
+          <p:style>
+            <a:lnRef idx="2">
+              <a:schemeClr val="accent1"/>
+            </a:lnRef>
+            <a:fillRef idx="0">
+              <a:srgbClr val="FFFFFF"/>
+            </a:fillRef>
+            <a:effectRef idx="0">
+              <a:srgbClr val="FFFFFF"/>
+            </a:effectRef>
+            <a:fontRef idx="minor">
+              <a:schemeClr val="tx1"/>
+            </a:fontRef>
+          </p:style>
+        </p:cxnSp>
+        <mc:AlternateContent xmlns:mc="http://schemas.openxmlformats.org/markup-compatibility/2006">
+          <mc:Choice xmlns:a14="http://schemas.microsoft.com/office/drawing/2010/main" Requires="a14">
+            <p:sp>
+              <p:nvSpPr>
+                <p:cNvPr id="76" name="矩形 75"/>
+                <p:cNvSpPr/>
+                <p:nvPr/>
+              </p:nvSpPr>
+              <p:spPr>
+                <a:xfrm>
+                  <a:off x="10414" y="6350"/>
+                  <a:ext cx="3308" cy="937"/>
+                </a:xfrm>
+                <a:prstGeom prst="rect">
+                  <a:avLst/>
+                </a:prstGeom>
+                <a:noFill/>
+                <a:ln w="19050">
+                  <a:solidFill>
+                    <a:schemeClr val="tx1"/>
+                  </a:solidFill>
+                </a:ln>
+                <a:extLst>
+                  <a:ext uri="{909E8E84-426E-40DD-AFC4-6F175D3DCCD1}">
+                    <a14:hiddenFill xmlns:a14="http://schemas.microsoft.com/office/drawing/2010/main">
+                      <a:solidFill>
+                        <a:schemeClr val="accent1"/>
+                      </a:solidFill>
+                    </a14:hiddenFill>
+                  </a:ext>
+                </a:extLst>
+              </p:spPr>
+              <p:style>
+                <a:lnRef idx="2">
+                  <a:schemeClr val="accent1">
+                    <a:lumMod val="75000"/>
+                  </a:schemeClr>
+                </a:lnRef>
+                <a:fillRef idx="1">
+                  <a:schemeClr val="accent1"/>
+                </a:fillRef>
+                <a:effectRef idx="0">
+                  <a:srgbClr val="FFFFFF"/>
+                </a:effectRef>
+                <a:fontRef idx="minor">
+                  <a:schemeClr val="lt1"/>
+                </a:fontRef>
+              </p:style>
+              <p:txBody>
+                <a:bodyPr rtlCol="0" anchor="ctr"/>
+                <a:p>
+                  <a:pPr algn="ctr"/>
+                  <a:r>
+                    <a:rPr lang="zh-CN" altLang="en-US" sz="1500">
+                      <a:solidFill>
+                        <a:schemeClr val="tx1"/>
+                      </a:solidFill>
+                    </a:rPr>
+                    <a:t>考虑相邻点</a:t>
+                  </a:r>
+                  <a14:m>
+                    <m:oMath xmlns:m="http://schemas.openxmlformats.org/officeDocument/2006/math">
+                      <m:r>
+                        <a:rPr lang="en-US" altLang="zh-CN" sz="1500" i="1">
+                          <a:solidFill>
+                            <a:schemeClr val="tx1"/>
+                          </a:solidFill>
+                          <a:latin typeface="Cambria Math" panose="02040503050406030204" charset="0"/>
+                          <a:cs typeface="Cambria Math" panose="02040503050406030204" charset="0"/>
+                        </a:rPr>
+                        <m:t>𝑖𝑅</m:t>
+                      </m:r>
+                    </m:oMath>
+                  </a14:m>
+                  <a:r>
+                    <a:rPr lang="zh-CN" altLang="en-US" sz="1500">
+                      <a:solidFill>
+                        <a:schemeClr val="tx1"/>
+                      </a:solidFill>
+                      <a:latin typeface="Cambria Math" panose="02040503050406030204" charset="0"/>
+                      <a:cs typeface="Cambria Math" panose="02040503050406030204" charset="0"/>
+                    </a:rPr>
+                    <a:t>的连续性</a:t>
+                  </a:r>
+                  <a:endParaRPr lang="zh-CN" altLang="en-US" sz="1500">
+                    <a:solidFill>
+                      <a:schemeClr val="tx1"/>
+                    </a:solidFill>
+                    <a:latin typeface="Cambria Math" panose="02040503050406030204" charset="0"/>
+                    <a:cs typeface="Cambria Math" panose="02040503050406030204" charset="0"/>
+                  </a:endParaRPr>
+                </a:p>
+              </p:txBody>
+            </p:sp>
+          </mc:Choice>
+          <mc:Fallback>
+            <p:sp>
+              <p:nvSpPr>
+                <p:cNvPr id="76" name="矩形 75"/>
+                <p:cNvSpPr>
+                  <a:spLocks noRot="1" noChangeAspect="1" noMove="1" noResize="1" noEditPoints="1" noAdjustHandles="1" noChangeArrowheads="1" noChangeShapeType="1" noTextEdit="1"/>
+                </p:cNvSpPr>
+                <p:nvPr/>
+              </p:nvSpPr>
+              <p:spPr>
+                <a:xfrm>
+                  <a:off x="10414" y="6350"/>
+                  <a:ext cx="3308" cy="937"/>
+                </a:xfrm>
+                <a:prstGeom prst="rect">
+                  <a:avLst/>
+                </a:prstGeom>
+                <a:blipFill rotWithShape="1">
+                  <a:blip r:embed="rId5"/>
+                </a:blipFill>
+                <a:ln w="19050">
+                  <a:solidFill>
+                    <a:schemeClr val="tx1"/>
+                  </a:solidFill>
+                </a:ln>
+                <a:extLst>
+                  <a:ext uri="{909E8E84-426E-40DD-AFC4-6F175D3DCCD1}">
+                    <a14:hiddenFill xmlns:a14="http://schemas.microsoft.com/office/drawing/2010/main">
+                      <a:solidFill>
+                        <a:schemeClr val="accent1"/>
+                      </a:solidFill>
+                    </a14:hiddenFill>
+                  </a:ext>
+                </a:extLst>
+              </p:spPr>
+              <p:style>
+                <a:lnRef idx="2">
+                  <a:schemeClr val="accent1">
+                    <a:lumMod val="75000"/>
+                  </a:schemeClr>
+                </a:lnRef>
+                <a:fillRef idx="1">
+                  <a:schemeClr val="accent1"/>
+                </a:fillRef>
+                <a:effectRef idx="0">
+                  <a:srgbClr val="FFFFFF"/>
+                </a:effectRef>
+                <a:fontRef idx="minor">
+                  <a:schemeClr val="lt1"/>
+                </a:fontRef>
+              </p:style>
+              <p:txBody>
+                <a:bodyPr/>
+                <a:lstStyle/>
+                <a:p>
+                  <a:r>
+                    <a:rPr lang="zh-CN" altLang="en-US">
+                      <a:noFill/>
+                    </a:rPr>
+                    <a:t> </a:t>
+                  </a:r>
+                </a:p>
+              </p:txBody>
+            </p:sp>
+          </mc:Fallback>
+        </mc:AlternateContent>
+        <mc:AlternateContent xmlns:mc="http://schemas.openxmlformats.org/markup-compatibility/2006">
+          <mc:Choice xmlns:a14="http://schemas.microsoft.com/office/drawing/2010/main" Requires="a14">
+            <p:sp>
+              <p:nvSpPr>
+                <p:cNvPr id="77" name="矩形 76"/>
+                <p:cNvSpPr/>
+                <p:nvPr/>
+              </p:nvSpPr>
+              <p:spPr>
+                <a:xfrm>
+                  <a:off x="14308" y="6470"/>
+                  <a:ext cx="1939" cy="697"/>
+                </a:xfrm>
+                <a:prstGeom prst="rect">
+                  <a:avLst/>
+                </a:prstGeom>
+                <a:noFill/>
+                <a:ln w="19050">
+                  <a:solidFill>
+                    <a:schemeClr val="tx1"/>
+                  </a:solidFill>
+                </a:ln>
+                <a:extLst>
+                  <a:ext uri="{909E8E84-426E-40DD-AFC4-6F175D3DCCD1}">
+                    <a14:hiddenFill xmlns:a14="http://schemas.microsoft.com/office/drawing/2010/main">
+                      <a:solidFill>
+                        <a:schemeClr val="accent1"/>
+                      </a:solidFill>
+                    </a14:hiddenFill>
+                  </a:ext>
+                </a:extLst>
+              </p:spPr>
+              <p:style>
+                <a:lnRef idx="2">
+                  <a:schemeClr val="accent1">
+                    <a:lumMod val="75000"/>
+                  </a:schemeClr>
+                </a:lnRef>
+                <a:fillRef idx="1">
+                  <a:schemeClr val="accent1"/>
+                </a:fillRef>
+                <a:effectRef idx="0">
+                  <a:srgbClr val="FFFFFF"/>
+                </a:effectRef>
+                <a:fontRef idx="minor">
+                  <a:schemeClr val="lt1"/>
+                </a:fontRef>
+              </p:style>
+              <p:txBody>
+                <a:bodyPr rtlCol="0" anchor="ctr"/>
+                <a:p>
+                  <a:pPr algn="ctr"/>
+                  <a:r>
+                    <a:rPr lang="zh-CN" altLang="en-US" sz="1500">
+                      <a:solidFill>
+                        <a:schemeClr val="tx1"/>
+                      </a:solidFill>
+                      <a:latin typeface="Cambria Math" panose="02040503050406030204" charset="0"/>
+                      <a:cs typeface="Cambria Math" panose="02040503050406030204" charset="0"/>
+                    </a:rPr>
+                    <a:t>更新父点</a:t>
+                  </a:r>
+                  <a14:m>
+                    <m:oMath xmlns:m="http://schemas.openxmlformats.org/officeDocument/2006/math">
+                      <m:r>
+                        <a:rPr lang="en-US" altLang="zh-CN" sz="1500" i="1">
+                          <a:solidFill>
+                            <a:schemeClr val="tx1"/>
+                          </a:solidFill>
+                          <a:latin typeface="Cambria Math" panose="02040503050406030204" charset="0"/>
+                          <a:cs typeface="Cambria Math" panose="02040503050406030204" charset="0"/>
+                        </a:rPr>
+                        <m:t>𝑖𝑅</m:t>
+                      </m:r>
+                    </m:oMath>
+                  </a14:m>
+                  <a:endParaRPr lang="zh-CN" altLang="en-US" sz="1500">
+                    <a:solidFill>
+                      <a:schemeClr val="tx1"/>
+                    </a:solidFill>
+                  </a:endParaRPr>
+                </a:p>
+              </p:txBody>
+            </p:sp>
+          </mc:Choice>
+          <mc:Fallback>
+            <p:sp>
+              <p:nvSpPr>
+                <p:cNvPr id="77" name="矩形 76"/>
+                <p:cNvSpPr>
+                  <a:spLocks noRot="1" noChangeAspect="1" noMove="1" noResize="1" noEditPoints="1" noAdjustHandles="1" noChangeArrowheads="1" noChangeShapeType="1" noTextEdit="1"/>
+                </p:cNvSpPr>
+                <p:nvPr/>
+              </p:nvSpPr>
+              <p:spPr>
+                <a:xfrm>
+                  <a:off x="14308" y="6470"/>
+                  <a:ext cx="1939" cy="697"/>
+                </a:xfrm>
+                <a:prstGeom prst="rect">
+                  <a:avLst/>
+                </a:prstGeom>
+                <a:blipFill rotWithShape="1">
+                  <a:blip r:embed="rId10"/>
+                </a:blipFill>
+                <a:ln w="19050">
+                  <a:solidFill>
+                    <a:schemeClr val="tx1"/>
+                  </a:solidFill>
+                </a:ln>
+                <a:extLst>
+                  <a:ext uri="{909E8E84-426E-40DD-AFC4-6F175D3DCCD1}">
+                    <a14:hiddenFill xmlns:a14="http://schemas.microsoft.com/office/drawing/2010/main">
+                      <a:solidFill>
+                        <a:schemeClr val="accent1"/>
+                      </a:solidFill>
+                    </a14:hiddenFill>
+                  </a:ext>
+                </a:extLst>
+              </p:spPr>
+              <p:style>
+                <a:lnRef idx="2">
+                  <a:schemeClr val="accent1">
+                    <a:lumMod val="75000"/>
+                  </a:schemeClr>
+                </a:lnRef>
+                <a:fillRef idx="1">
+                  <a:schemeClr val="accent1"/>
+                </a:fillRef>
+                <a:effectRef idx="0">
+                  <a:srgbClr val="FFFFFF"/>
+                </a:effectRef>
+                <a:fontRef idx="minor">
+                  <a:schemeClr val="lt1"/>
+                </a:fontRef>
+              </p:style>
+              <p:txBody>
+                <a:bodyPr/>
+                <a:lstStyle/>
+                <a:p>
+                  <a:r>
+                    <a:rPr lang="zh-CN" altLang="en-US">
+                      <a:noFill/>
+                    </a:rPr>
+                    <a:t> </a:t>
+                  </a:r>
+                </a:p>
+              </p:txBody>
+            </p:sp>
+          </mc:Fallback>
+        </mc:AlternateContent>
+        <p:cxnSp>
+          <p:nvCxnSpPr>
+            <p:cNvPr id="80" name="肘形连接符 79"/>
+            <p:cNvCxnSpPr>
+              <a:stCxn id="71" idx="3"/>
+              <a:endCxn id="76" idx="1"/>
+            </p:cNvCxnSpPr>
+            <p:nvPr/>
+          </p:nvCxnSpPr>
+          <p:spPr>
+            <a:xfrm>
+              <a:off x="9710" y="5974"/>
+              <a:ext cx="704" cy="845"/>
+            </a:xfrm>
+            <a:prstGeom prst="bentConnector3">
+              <a:avLst>
+                <a:gd name="adj1" fmla="val 50000"/>
+              </a:avLst>
+            </a:prstGeom>
+            <a:ln w="19050">
+              <a:solidFill>
+                <a:schemeClr val="tx1"/>
+              </a:solidFill>
+              <a:tailEnd type="arrow"/>
+            </a:ln>
+          </p:spPr>
+          <p:style>
+            <a:lnRef idx="2">
+              <a:schemeClr val="accent1"/>
+            </a:lnRef>
+            <a:fillRef idx="0">
+              <a:srgbClr val="FFFFFF"/>
+            </a:fillRef>
+            <a:effectRef idx="0">
+              <a:srgbClr val="FFFFFF"/>
+            </a:effectRef>
+            <a:fontRef idx="minor">
+              <a:schemeClr val="tx1"/>
+            </a:fontRef>
+          </p:style>
+        </p:cxnSp>
+        <p:cxnSp>
+          <p:nvCxnSpPr>
+            <p:cNvPr id="81" name="直接箭头连接符 80"/>
+            <p:cNvCxnSpPr>
+              <a:stCxn id="76" idx="3"/>
+              <a:endCxn id="77" idx="1"/>
+            </p:cNvCxnSpPr>
+            <p:nvPr/>
+          </p:nvCxnSpPr>
+          <p:spPr>
+            <a:xfrm>
+              <a:off x="13722" y="6819"/>
+              <a:ext cx="586" cy="0"/>
+            </a:xfrm>
+            <a:prstGeom prst="straightConnector1">
+              <a:avLst/>
+            </a:prstGeom>
+            <a:ln w="19050">
+              <a:solidFill>
+                <a:schemeClr val="tx1"/>
+              </a:solidFill>
+              <a:tailEnd type="arrow"/>
+            </a:ln>
+          </p:spPr>
+          <p:style>
+            <a:lnRef idx="2">
+              <a:schemeClr val="accent1"/>
+            </a:lnRef>
+            <a:fillRef idx="0">
+              <a:srgbClr val="FFFFFF"/>
+            </a:fillRef>
+            <a:effectRef idx="0">
+              <a:srgbClr val="FFFFFF"/>
+            </a:effectRef>
+            <a:fontRef idx="minor">
+              <a:schemeClr val="tx1"/>
+            </a:fontRef>
+          </p:style>
+        </p:cxnSp>
+      </p:grpSp>
+    </p:spTree>
+  </p:cSld>
+  <p:clrMapOvr>
+    <a:masterClrMapping/>
+  </p:clrMapOvr>
+</p:sld>
+</file>
+
+<file path=ppt/slides/slide8.xml><?xml version="1.0" encoding="utf-8"?>
+<p:sld xmlns:a="http://schemas.openxmlformats.org/drawingml/2006/main" xmlns:r="http://schemas.openxmlformats.org/officeDocument/2006/relationships" xmlns:p="http://schemas.openxmlformats.org/presentationml/2006/main">
+  <p:cSld>
+    <p:spTree>
+      <p:nvGrpSpPr>
+        <p:cNvPr id="1" name=""/>
+        <p:cNvGrpSpPr/>
+        <p:nvPr/>
+      </p:nvGrpSpPr>
+      <p:grpSpPr/>
+      <p:grpSp>
+        <p:nvGrpSpPr>
+          <p:cNvPr id="13" name="组合 12"/>
+          <p:cNvGrpSpPr/>
+          <p:nvPr/>
+        </p:nvGrpSpPr>
+        <p:grpSpPr>
+          <a:xfrm>
+            <a:off x="-199390" y="1941195"/>
+            <a:ext cx="14345920" cy="2542540"/>
+            <a:chOff x="-5344" y="3398"/>
+            <a:chExt cx="22592" cy="4004"/>
+          </a:xfrm>
+        </p:grpSpPr>
+        <p:grpSp>
+          <p:nvGrpSpPr>
+            <p:cNvPr id="9" name="组合 8"/>
+            <p:cNvGrpSpPr/>
+            <p:nvPr/>
+          </p:nvGrpSpPr>
+          <p:grpSpPr>
+            <a:xfrm>
+              <a:off x="-5344" y="3398"/>
+              <a:ext cx="16966" cy="4005"/>
+              <a:chOff x="1116" y="3397"/>
+              <a:chExt cx="16966" cy="4005"/>
+            </a:xfrm>
+          </p:grpSpPr>
+          <p:pic>
+            <p:nvPicPr>
+              <p:cNvPr id="4" name="图片 3"/>
+              <p:cNvPicPr>
+                <a:picLocks noChangeAspect="1"/>
+              </p:cNvPicPr>
+              <p:nvPr/>
+            </p:nvPicPr>
+            <p:blipFill>
+              <a:blip r:embed="rId1"/>
+              <a:stretch>
+                <a:fillRect/>
+              </a:stretch>
+            </p:blipFill>
+            <p:spPr>
+              <a:xfrm>
+                <a:off x="1117" y="3397"/>
+                <a:ext cx="16965" cy="4005"/>
+              </a:xfrm>
+              <a:prstGeom prst="rect">
+                <a:avLst/>
+              </a:prstGeom>
+            </p:spPr>
+          </p:pic>
+          <mc:AlternateContent xmlns:mc="http://schemas.openxmlformats.org/markup-compatibility/2006">
+            <mc:Choice xmlns:a14="http://schemas.microsoft.com/office/drawing/2010/main" Requires="a14">
+              <p:sp>
+                <p:nvSpPr>
+                  <p:cNvPr id="5" name="矩形 4"/>
+                  <p:cNvSpPr/>
+                  <p:nvPr/>
+                </p:nvSpPr>
+                <p:spPr>
+                  <a:xfrm>
+                    <a:off x="1116" y="3397"/>
+                    <a:ext cx="12691" cy="2963"/>
+                  </a:xfrm>
+                  <a:prstGeom prst="rect">
+                    <a:avLst/>
+                  </a:prstGeom>
+                  <a:solidFill>
+                    <a:srgbClr val="000000">
+                      <a:alpha val="0"/>
+                    </a:srgbClr>
+                  </a:solidFill>
+                  <a:ln w="19050">
+                    <a:solidFill>
+                      <a:srgbClr val="7030A0"/>
+                    </a:solidFill>
+                  </a:ln>
+                </p:spPr>
+                <p:style>
+                  <a:lnRef idx="2">
+                    <a:schemeClr val="accent1">
+                      <a:lumMod val="75000"/>
+                    </a:schemeClr>
+                  </a:lnRef>
+                  <a:fillRef idx="1">
+                    <a:schemeClr val="accent1"/>
+                  </a:fillRef>
+                  <a:effectRef idx="0">
+                    <a:srgbClr val="FFFFFF"/>
+                  </a:effectRef>
+                  <a:fontRef idx="minor">
+                    <a:schemeClr val="lt1"/>
+                  </a:fontRef>
+                </p:style>
+                <p:txBody>
+                  <a:bodyPr rtlCol="0" anchor="ctr"/>
+                  <a:p>
+                    <a:pPr algn="ctr"/>
+                    <a14:m>
+                      <m:oMathPara xmlns:m="http://schemas.openxmlformats.org/officeDocument/2006/math">
+                        <m:oMathParaPr>
+                          <m:jc m:val="centerGroup"/>
+                        </m:oMathParaPr>
+                        <m:oMath xmlns:m="http://schemas.openxmlformats.org/officeDocument/2006/math">
+                          <m:r>
+                            <a:rPr lang="en-US" altLang="zh-CN" sz="8000" b="1">
+                              <a:gradFill>
+                                <a:gsLst>
+                                  <a:gs pos="0">
+                                    <a:srgbClr val="7B32B2"/>
+                                  </a:gs>
+                                  <a:gs pos="100000">
+                                    <a:srgbClr val="401A5D"/>
+                                  </a:gs>
+                                </a:gsLst>
+                                <a:lin scaled="0"/>
+                              </a:gradFill>
+                              <a:latin typeface="Cambria Math" panose="02040503050406030204" charset="0"/>
+                              <a:cs typeface="Cambria Math" panose="02040503050406030204" charset="0"/>
+                            </a:rPr>
+                            <m:t>𝐔</m:t>
+                          </m:r>
+                        </m:oMath>
+                      </m:oMathPara>
+                    </a14:m>
+                    <a:endParaRPr lang="en-US" altLang="zh-CN" sz="8000" b="1">
+                      <a:gradFill>
+                        <a:gsLst>
+                          <a:gs pos="0">
+                            <a:srgbClr val="7B32B2"/>
+                          </a:gs>
+                          <a:gs pos="100000">
+                            <a:srgbClr val="401A5D"/>
+                          </a:gs>
+                        </a:gsLst>
+                        <a:lin scaled="0"/>
+                      </a:gradFill>
+                      <a:latin typeface="Cambria Math" panose="02040503050406030204" charset="0"/>
+                      <a:cs typeface="Cambria Math" panose="02040503050406030204" charset="0"/>
+                    </a:endParaRPr>
+                  </a:p>
+                </p:txBody>
+              </p:sp>
+            </mc:Choice>
+            <mc:Fallback>
+              <p:sp>
+                <p:nvSpPr>
+                  <p:cNvPr id="5" name="矩形 4"/>
+                  <p:cNvSpPr>
+                    <a:spLocks noRot="1" noChangeAspect="1" noMove="1" noResize="1" noEditPoints="1" noAdjustHandles="1" noChangeArrowheads="1" noChangeShapeType="1" noTextEdit="1"/>
+                  </p:cNvSpPr>
+                  <p:nvPr/>
+                </p:nvSpPr>
+                <p:spPr>
+                  <a:xfrm>
+                    <a:off x="1116" y="3397"/>
+                    <a:ext cx="12691" cy="2963"/>
+                  </a:xfrm>
+                  <a:prstGeom prst="rect">
+                    <a:avLst/>
+                  </a:prstGeom>
+                  <a:blipFill rotWithShape="1">
+                    <a:blip r:embed="rId2"/>
+                  </a:blipFill>
+                  <a:ln w="19050">
+                    <a:solidFill>
+                      <a:srgbClr val="7030A0"/>
+                    </a:solidFill>
+                  </a:ln>
+                </p:spPr>
+                <p:style>
+                  <a:lnRef idx="2">
+                    <a:schemeClr val="accent1">
+                      <a:lumMod val="75000"/>
+                    </a:schemeClr>
+                  </a:lnRef>
+                  <a:fillRef idx="1">
+                    <a:schemeClr val="accent1"/>
+                  </a:fillRef>
+                  <a:effectRef idx="0">
+                    <a:srgbClr val="FFFFFF"/>
+                  </a:effectRef>
+                  <a:fontRef idx="minor">
+                    <a:schemeClr val="lt1"/>
+                  </a:fontRef>
+                </p:style>
+                <p:txBody>
+                  <a:bodyPr/>
+                  <a:lstStyle/>
+                  <a:p>
+                    <a:r>
+                      <a:rPr lang="zh-CN" altLang="en-US">
+                        <a:noFill/>
+                      </a:rPr>
+                      <a:t> </a:t>
+                    </a:r>
+                  </a:p>
+                </p:txBody>
+              </p:sp>
+            </mc:Fallback>
+          </mc:AlternateContent>
+          <mc:AlternateContent xmlns:mc="http://schemas.openxmlformats.org/markup-compatibility/2006">
+            <mc:Choice xmlns:a14="http://schemas.microsoft.com/office/drawing/2010/main" Requires="a14">
+              <p:sp>
+                <p:nvSpPr>
+                  <p:cNvPr id="6" name="矩形 5"/>
+                  <p:cNvSpPr/>
+                  <p:nvPr/>
+                </p:nvSpPr>
+                <p:spPr>
+                  <a:xfrm>
+                    <a:off x="13806" y="3397"/>
+                    <a:ext cx="4276" cy="2963"/>
+                  </a:xfrm>
+                  <a:prstGeom prst="rect">
+                    <a:avLst/>
+                  </a:prstGeom>
+                  <a:solidFill>
+                    <a:srgbClr val="000000">
+                      <a:alpha val="0"/>
+                    </a:srgbClr>
+                  </a:solidFill>
+                  <a:ln w="19050">
+                    <a:solidFill>
+                      <a:srgbClr val="7030A0"/>
+                    </a:solidFill>
+                  </a:ln>
+                </p:spPr>
+                <p:style>
+                  <a:lnRef idx="2">
+                    <a:schemeClr val="accent1">
+                      <a:lumMod val="75000"/>
+                    </a:schemeClr>
+                  </a:lnRef>
+                  <a:fillRef idx="1">
+                    <a:schemeClr val="accent1"/>
+                  </a:fillRef>
+                  <a:effectRef idx="0">
+                    <a:srgbClr val="FFFFFF"/>
+                  </a:effectRef>
+                  <a:fontRef idx="minor">
+                    <a:schemeClr val="lt1"/>
+                  </a:fontRef>
+                </p:style>
+                <p:txBody>
+                  <a:bodyPr rtlCol="0" anchor="ctr"/>
+                  <a:p>
+                    <a:pPr algn="ctr"/>
+                    <a14:m>
+                      <m:oMathPara xmlns:m="http://schemas.openxmlformats.org/officeDocument/2006/math">
+                        <m:oMathParaPr>
+                          <m:jc m:val="centerGroup"/>
+                        </m:oMathParaPr>
+                        <m:oMath xmlns:m="http://schemas.openxmlformats.org/officeDocument/2006/math">
+                          <m:r>
+                            <a:rPr lang="en-US" altLang="zh-CN" sz="8000" b="1">
+                              <a:solidFill>
+                                <a:srgbClr val="7030A0"/>
+                              </a:solidFill>
+                              <a:latin typeface="Cambria Math" panose="02040503050406030204" charset="0"/>
+                              <a:cs typeface="Cambria Math" panose="02040503050406030204" charset="0"/>
+                            </a:rPr>
+                            <m:t>𝐖</m:t>
+                          </m:r>
+                        </m:oMath>
+                      </m:oMathPara>
+                    </a14:m>
+                    <a:endParaRPr lang="en-US" altLang="zh-CN" sz="8000" b="1">
+                      <a:solidFill>
+                        <a:srgbClr val="7030A0"/>
+                      </a:solidFill>
+                      <a:latin typeface="Cambria Math" panose="02040503050406030204" charset="0"/>
+                      <a:cs typeface="Cambria Math" panose="02040503050406030204" charset="0"/>
+                    </a:endParaRPr>
+                  </a:p>
+                </p:txBody>
+              </p:sp>
+            </mc:Choice>
+            <mc:Fallback>
+              <p:sp>
+                <p:nvSpPr>
+                  <p:cNvPr id="6" name="矩形 5"/>
+                  <p:cNvSpPr>
+                    <a:spLocks noRot="1" noChangeAspect="1" noMove="1" noResize="1" noEditPoints="1" noAdjustHandles="1" noChangeArrowheads="1" noChangeShapeType="1" noTextEdit="1"/>
+                  </p:cNvSpPr>
+                  <p:nvPr/>
+                </p:nvSpPr>
+                <p:spPr>
+                  <a:xfrm>
+                    <a:off x="13806" y="3397"/>
+                    <a:ext cx="4276" cy="2963"/>
+                  </a:xfrm>
+                  <a:prstGeom prst="rect">
+                    <a:avLst/>
+                  </a:prstGeom>
+                  <a:blipFill rotWithShape="1">
+                    <a:blip r:embed="rId3"/>
+                  </a:blipFill>
+                  <a:ln w="19050">
+                    <a:solidFill>
+                      <a:srgbClr val="7030A0"/>
+                    </a:solidFill>
+                  </a:ln>
+                </p:spPr>
+                <p:style>
+                  <a:lnRef idx="2">
+                    <a:schemeClr val="accent1">
+                      <a:lumMod val="75000"/>
+                    </a:schemeClr>
+                  </a:lnRef>
+                  <a:fillRef idx="1">
+                    <a:schemeClr val="accent1"/>
+                  </a:fillRef>
+                  <a:effectRef idx="0">
+                    <a:srgbClr val="FFFFFF"/>
+                  </a:effectRef>
+                  <a:fontRef idx="minor">
+                    <a:schemeClr val="lt1"/>
+                  </a:fontRef>
+                </p:style>
+                <p:txBody>
+                  <a:bodyPr/>
+                  <a:lstStyle/>
+                  <a:p>
+                    <a:r>
+                      <a:rPr lang="zh-CN" altLang="en-US">
+                        <a:noFill/>
+                      </a:rPr>
+                      <a:t> </a:t>
+                    </a:r>
+                  </a:p>
+                </p:txBody>
+              </p:sp>
+            </mc:Fallback>
+          </mc:AlternateContent>
+          <mc:AlternateContent xmlns:mc="http://schemas.openxmlformats.org/markup-compatibility/2006">
+            <mc:Choice xmlns:a14="http://schemas.microsoft.com/office/drawing/2010/main" Requires="a14">
+              <p:sp>
+                <p:nvSpPr>
+                  <p:cNvPr id="7" name="矩形 6"/>
+                  <p:cNvSpPr/>
+                  <p:nvPr/>
+                </p:nvSpPr>
+                <p:spPr>
+                  <a:xfrm>
+                    <a:off x="1117" y="6360"/>
+                    <a:ext cx="12689" cy="1043"/>
+                  </a:xfrm>
+                  <a:prstGeom prst="rect">
+                    <a:avLst/>
+                  </a:prstGeom>
+                  <a:solidFill>
+                    <a:srgbClr val="000000">
+                      <a:alpha val="0"/>
+                    </a:srgbClr>
+                  </a:solidFill>
+                  <a:ln w="19050">
+                    <a:solidFill>
+                      <a:srgbClr val="7030A0"/>
+                    </a:solidFill>
+                  </a:ln>
+                </p:spPr>
+                <p:style>
+                  <a:lnRef idx="2">
+                    <a:schemeClr val="accent1">
+                      <a:lumMod val="75000"/>
+                    </a:schemeClr>
+                  </a:lnRef>
+                  <a:fillRef idx="1">
+                    <a:schemeClr val="accent1"/>
+                  </a:fillRef>
+                  <a:effectRef idx="0">
+                    <a:srgbClr val="FFFFFF"/>
+                  </a:effectRef>
+                  <a:fontRef idx="minor">
+                    <a:schemeClr val="lt1"/>
+                  </a:fontRef>
+                </p:style>
+                <p:txBody>
+                  <a:bodyPr rtlCol="0" anchor="ctr"/>
+                  <a:p>
+                    <a:pPr algn="ctr"/>
+                    <a14:m>
+                      <m:oMathPara xmlns:m="http://schemas.openxmlformats.org/officeDocument/2006/math">
+                        <m:oMathParaPr>
+                          <m:jc m:val="centerGroup"/>
+                        </m:oMathParaPr>
+                        <m:oMath xmlns:m="http://schemas.openxmlformats.org/officeDocument/2006/math">
+                          <m:sSup>
+                            <m:sSupPr>
+                              <m:ctrlPr>
+                                <a:rPr lang="en-US" altLang="zh-CN" sz="4400" b="1">
+                                  <a:solidFill>
+                                    <a:srgbClr val="7030A0"/>
+                                  </a:solidFill>
+                                  <a:latin typeface="Cambria Math" panose="02040503050406030204" charset="0"/>
+                                  <a:cs typeface="Cambria Math" panose="02040503050406030204" charset="0"/>
+                                </a:rPr>
+                              </m:ctrlPr>
+                            </m:sSupPr>
+                            <m:e>
+                              <m:r>
+                                <a:rPr lang="en-US" altLang="zh-CN" sz="4400" b="1">
+                                  <a:solidFill>
+                                    <a:srgbClr val="7030A0"/>
+                                  </a:solidFill>
+                                  <a:latin typeface="Cambria Math" panose="02040503050406030204" charset="0"/>
+                                  <a:cs typeface="Cambria Math" panose="02040503050406030204" charset="0"/>
+                                </a:rPr>
+                                <m:t>𝐖</m:t>
+                              </m:r>
+                            </m:e>
+                            <m:sup>
+                              <m:r>
+                                <a:rPr lang="en-US" altLang="zh-CN" sz="4400" b="1">
+                                  <a:solidFill>
+                                    <a:srgbClr val="7030A0"/>
+                                  </a:solidFill>
+                                  <a:latin typeface="Cambria Math" panose="02040503050406030204" charset="0"/>
+                                  <a:cs typeface="Cambria Math" panose="02040503050406030204" charset="0"/>
+                                </a:rPr>
+                                <m:t>𝐓</m:t>
+                              </m:r>
+                            </m:sup>
+                          </m:sSup>
+                        </m:oMath>
+                      </m:oMathPara>
+                    </a14:m>
+                    <a:endParaRPr lang="en-US" altLang="zh-CN" sz="4400" b="1">
+                      <a:solidFill>
+                        <a:srgbClr val="7030A0"/>
+                      </a:solidFill>
+                      <a:latin typeface="Cambria Math" panose="02040503050406030204" charset="0"/>
+                      <a:cs typeface="Cambria Math" panose="02040503050406030204" charset="0"/>
+                    </a:endParaRPr>
+                  </a:p>
+                </p:txBody>
+              </p:sp>
+            </mc:Choice>
+            <mc:Fallback>
+              <p:sp>
+                <p:nvSpPr>
+                  <p:cNvPr id="7" name="矩形 6"/>
+                  <p:cNvSpPr>
+                    <a:spLocks noRot="1" noChangeAspect="1" noMove="1" noResize="1" noEditPoints="1" noAdjustHandles="1" noChangeArrowheads="1" noChangeShapeType="1" noTextEdit="1"/>
+                  </p:cNvSpPr>
+                  <p:nvPr/>
+                </p:nvSpPr>
+                <p:spPr>
+                  <a:xfrm>
+                    <a:off x="1117" y="6360"/>
+                    <a:ext cx="12689" cy="1043"/>
+                  </a:xfrm>
+                  <a:prstGeom prst="rect">
+                    <a:avLst/>
+                  </a:prstGeom>
+                  <a:blipFill rotWithShape="1">
+                    <a:blip r:embed="rId4"/>
+                  </a:blipFill>
+                  <a:ln w="19050">
+                    <a:solidFill>
+                      <a:srgbClr val="7030A0"/>
+                    </a:solidFill>
+                  </a:ln>
+                </p:spPr>
+                <p:style>
+                  <a:lnRef idx="2">
+                    <a:schemeClr val="accent1">
+                      <a:lumMod val="75000"/>
+                    </a:schemeClr>
+                  </a:lnRef>
+                  <a:fillRef idx="1">
+                    <a:schemeClr val="accent1"/>
+                  </a:fillRef>
+                  <a:effectRef idx="0">
+                    <a:srgbClr val="FFFFFF"/>
+                  </a:effectRef>
+                  <a:fontRef idx="minor">
+                    <a:schemeClr val="lt1"/>
+                  </a:fontRef>
+                </p:style>
+                <p:txBody>
+                  <a:bodyPr/>
+                  <a:lstStyle/>
+                  <a:p>
+                    <a:r>
+                      <a:rPr lang="zh-CN" altLang="en-US">
+                        <a:noFill/>
+                      </a:rPr>
+                      <a:t> </a:t>
+                    </a:r>
+                  </a:p>
+                </p:txBody>
+              </p:sp>
+            </mc:Fallback>
+          </mc:AlternateContent>
+          <mc:AlternateContent xmlns:mc="http://schemas.openxmlformats.org/markup-compatibility/2006">
+            <mc:Choice xmlns:a14="http://schemas.microsoft.com/office/drawing/2010/main" Requires="a14">
+              <p:sp>
+                <p:nvSpPr>
+                  <p:cNvPr id="8" name="矩形 7"/>
+                  <p:cNvSpPr/>
+                  <p:nvPr/>
+                </p:nvSpPr>
+                <p:spPr>
+                  <a:xfrm>
+                    <a:off x="13805" y="6359"/>
+                    <a:ext cx="4277" cy="1043"/>
+                  </a:xfrm>
+                  <a:prstGeom prst="rect">
+                    <a:avLst/>
+                  </a:prstGeom>
+                  <a:solidFill>
+                    <a:srgbClr val="000000">
+                      <a:alpha val="0"/>
+                    </a:srgbClr>
+                  </a:solidFill>
+                  <a:ln w="19050">
+                    <a:solidFill>
+                      <a:srgbClr val="7030A0"/>
+                    </a:solidFill>
+                  </a:ln>
+                </p:spPr>
+                <p:style>
+                  <a:lnRef idx="2">
+                    <a:schemeClr val="accent1">
+                      <a:lumMod val="75000"/>
+                    </a:schemeClr>
+                  </a:lnRef>
+                  <a:fillRef idx="1">
+                    <a:schemeClr val="accent1"/>
+                  </a:fillRef>
+                  <a:effectRef idx="0">
+                    <a:srgbClr val="FFFFFF"/>
+                  </a:effectRef>
+                  <a:fontRef idx="minor">
+                    <a:schemeClr val="lt1"/>
+                  </a:fontRef>
+                </p:style>
+                <p:txBody>
+                  <a:bodyPr rtlCol="0" anchor="ctr"/>
+                  <a:p>
+                    <a:pPr algn="ctr"/>
+                    <a14:m>
+                      <m:oMathPara xmlns:m="http://schemas.openxmlformats.org/officeDocument/2006/math">
+                        <m:oMathParaPr>
+                          <m:jc m:val="centerGroup"/>
+                        </m:oMathParaPr>
+                        <m:oMath xmlns:m="http://schemas.openxmlformats.org/officeDocument/2006/math">
+                          <m:r>
+                            <a:rPr lang="en-US" altLang="zh-CN" sz="4400" b="1">
+                              <a:solidFill>
+                                <a:srgbClr val="7030A0"/>
+                              </a:solidFill>
+                              <a:latin typeface="Cambria Math" panose="02040503050406030204" charset="0"/>
+                              <a:cs typeface="Cambria Math" panose="02040503050406030204" charset="0"/>
+                            </a:rPr>
+                            <m:t>𝐯</m:t>
+                          </m:r>
+                        </m:oMath>
+                      </m:oMathPara>
+                    </a14:m>
+                    <a:endParaRPr lang="en-US" altLang="zh-CN" sz="4400" b="1">
+                      <a:solidFill>
+                        <a:srgbClr val="7030A0"/>
+                      </a:solidFill>
+                      <a:latin typeface="Cambria Math" panose="02040503050406030204" charset="0"/>
+                      <a:cs typeface="Cambria Math" panose="02040503050406030204" charset="0"/>
+                    </a:endParaRPr>
+                  </a:p>
+                </p:txBody>
+              </p:sp>
+            </mc:Choice>
+            <mc:Fallback>
+              <p:sp>
+                <p:nvSpPr>
+                  <p:cNvPr id="8" name="矩形 7"/>
+                  <p:cNvSpPr>
+                    <a:spLocks noRot="1" noChangeAspect="1" noMove="1" noResize="1" noEditPoints="1" noAdjustHandles="1" noChangeArrowheads="1" noChangeShapeType="1" noTextEdit="1"/>
+                  </p:cNvSpPr>
+                  <p:nvPr/>
+                </p:nvSpPr>
+                <p:spPr>
+                  <a:xfrm>
+                    <a:off x="13805" y="6359"/>
+                    <a:ext cx="4277" cy="1043"/>
+                  </a:xfrm>
+                  <a:prstGeom prst="rect">
+                    <a:avLst/>
+                  </a:prstGeom>
+                  <a:blipFill rotWithShape="1">
+                    <a:blip r:embed="rId5"/>
+                  </a:blipFill>
+                  <a:ln w="19050">
+                    <a:solidFill>
+                      <a:srgbClr val="7030A0"/>
+                    </a:solidFill>
+                  </a:ln>
+                </p:spPr>
+                <p:style>
+                  <a:lnRef idx="2">
+                    <a:schemeClr val="accent1">
+                      <a:lumMod val="75000"/>
+                    </a:schemeClr>
+                  </a:lnRef>
+                  <a:fillRef idx="1">
+                    <a:schemeClr val="accent1"/>
+                  </a:fillRef>
+                  <a:effectRef idx="0">
+                    <a:srgbClr val="FFFFFF"/>
+                  </a:effectRef>
+                  <a:fontRef idx="minor">
+                    <a:schemeClr val="lt1"/>
+                  </a:fontRef>
+                </p:style>
+                <p:txBody>
+                  <a:bodyPr/>
+                  <a:lstStyle/>
+                  <a:p>
+                    <a:r>
+                      <a:rPr lang="zh-CN" altLang="en-US">
+                        <a:noFill/>
+                      </a:rPr>
+                      <a:t> </a:t>
+                    </a:r>
+                  </a:p>
+                </p:txBody>
+              </p:sp>
+            </mc:Fallback>
+          </mc:AlternateContent>
+        </p:grpSp>
+        <p:pic>
+          <p:nvPicPr>
+            <p:cNvPr id="10" name="图片 9"/>
+            <p:cNvPicPr>
+              <a:picLocks noChangeAspect="1"/>
+            </p:cNvPicPr>
+            <p:nvPr/>
+          </p:nvPicPr>
+          <p:blipFill>
+            <a:blip r:embed="rId6"/>
+            <a:stretch>
+              <a:fillRect/>
+            </a:stretch>
+          </p:blipFill>
+          <p:spPr>
+            <a:xfrm>
+              <a:off x="12377" y="3398"/>
+              <a:ext cx="4871" cy="4005"/>
+            </a:xfrm>
+            <a:prstGeom prst="rect">
+              <a:avLst/>
+            </a:prstGeom>
+          </p:spPr>
+        </p:pic>
+        <mc:AlternateContent xmlns:mc="http://schemas.openxmlformats.org/markup-compatibility/2006">
+          <mc:Choice xmlns:a14="http://schemas.microsoft.com/office/drawing/2010/main" Requires="a14">
+            <p:sp>
+              <p:nvSpPr>
+                <p:cNvPr id="11" name="矩形 10"/>
+                <p:cNvSpPr/>
+                <p:nvPr/>
+              </p:nvSpPr>
+              <p:spPr>
+                <a:xfrm>
+                  <a:off x="12376" y="6360"/>
+                  <a:ext cx="4872" cy="1043"/>
+                </a:xfrm>
+                <a:prstGeom prst="rect">
+                  <a:avLst/>
+                </a:prstGeom>
+                <a:solidFill>
+                  <a:srgbClr val="000000">
+                    <a:alpha val="0"/>
+                  </a:srgbClr>
+                </a:solidFill>
+                <a:ln w="19050">
+                  <a:solidFill>
+                    <a:srgbClr val="7030A0"/>
+                  </a:solidFill>
+                </a:ln>
+              </p:spPr>
+              <p:style>
+                <a:lnRef idx="2">
+                  <a:schemeClr val="accent1">
+                    <a:lumMod val="75000"/>
+                  </a:schemeClr>
+                </a:lnRef>
+                <a:fillRef idx="1">
+                  <a:schemeClr val="accent1"/>
+                </a:fillRef>
+                <a:effectRef idx="0">
+                  <a:srgbClr val="FFFFFF"/>
+                </a:effectRef>
+                <a:fontRef idx="minor">
+                  <a:schemeClr val="lt1"/>
+                </a:fontRef>
+              </p:style>
+              <p:txBody>
+                <a:bodyPr rtlCol="0" anchor="ctr"/>
+                <a:p>
+                  <a:pPr algn="ctr"/>
+                  <a14:m>
+                    <m:oMathPara xmlns:m="http://schemas.openxmlformats.org/officeDocument/2006/math">
+                      <m:oMathParaPr>
+                        <m:jc m:val="centerGroup"/>
+                      </m:oMathParaPr>
+                      <m:oMath xmlns:m="http://schemas.openxmlformats.org/officeDocument/2006/math">
+                        <m:r>
+                          <a:rPr lang="en-US" altLang="zh-CN" sz="4400" b="1">
+                            <a:solidFill>
+                              <a:srgbClr val="7030A0"/>
+                            </a:solidFill>
+                            <a:latin typeface="Cambria Math" panose="02040503050406030204" charset="0"/>
+                            <a:cs typeface="Cambria Math" panose="02040503050406030204" charset="0"/>
+                          </a:rPr>
+                          <m:t>−</m:t>
+                        </m:r>
+                        <m:sSub>
+                          <m:sSubPr>
+                            <m:ctrlPr>
+                              <a:rPr lang="en-US" altLang="zh-CN" sz="4400" b="1">
+                                <a:solidFill>
+                                  <a:srgbClr val="7030A0"/>
+                                </a:solidFill>
+                                <a:latin typeface="Cambria Math" panose="02040503050406030204" charset="0"/>
+                                <a:cs typeface="Cambria Math" panose="02040503050406030204" charset="0"/>
+                              </a:rPr>
+                            </m:ctrlPr>
+                          </m:sSubPr>
+                          <m:e>
+                            <m:r>
+                              <a:rPr lang="en-US" altLang="zh-CN" sz="4400" b="1">
+                                <a:solidFill>
+                                  <a:srgbClr val="7030A0"/>
+                                </a:solidFill>
+                                <a:latin typeface="Cambria Math" panose="02040503050406030204" charset="0"/>
+                                <a:cs typeface="Cambria Math" panose="02040503050406030204" charset="0"/>
+                              </a:rPr>
+                              <m:t>𝐛</m:t>
+                            </m:r>
+                          </m:e>
+                          <m:sub>
+                            <m:r>
+                              <a:rPr lang="en-US" altLang="zh-CN" sz="4400" b="1">
+                                <a:solidFill>
+                                  <a:srgbClr val="7030A0"/>
+                                </a:solidFill>
+                                <a:latin typeface="Cambria Math" panose="02040503050406030204" charset="0"/>
+                                <a:cs typeface="Cambria Math" panose="02040503050406030204" charset="0"/>
+                              </a:rPr>
+                              <m:t>𝐯</m:t>
+                            </m:r>
+                          </m:sub>
+                        </m:sSub>
+                      </m:oMath>
+                    </m:oMathPara>
+                  </a14:m>
+                  <a:endParaRPr lang="en-US" altLang="zh-CN" sz="4400" b="1">
+                    <a:solidFill>
+                      <a:srgbClr val="7030A0"/>
+                    </a:solidFill>
+                    <a:latin typeface="Cambria Math" panose="02040503050406030204" charset="0"/>
+                    <a:cs typeface="Cambria Math" panose="02040503050406030204" charset="0"/>
+                  </a:endParaRPr>
+                </a:p>
+              </p:txBody>
+            </p:sp>
+          </mc:Choice>
+          <mc:Fallback>
+            <p:sp>
+              <p:nvSpPr>
+                <p:cNvPr id="11" name="矩形 10"/>
+                <p:cNvSpPr>
+                  <a:spLocks noRot="1" noChangeAspect="1" noMove="1" noResize="1" noEditPoints="1" noAdjustHandles="1" noChangeArrowheads="1" noChangeShapeType="1" noTextEdit="1"/>
+                </p:cNvSpPr>
+                <p:nvPr/>
+              </p:nvSpPr>
+              <p:spPr>
+                <a:xfrm>
+                  <a:off x="12376" y="6360"/>
+                  <a:ext cx="4872" cy="1043"/>
+                </a:xfrm>
+                <a:prstGeom prst="rect">
+                  <a:avLst/>
+                </a:prstGeom>
+                <a:blipFill rotWithShape="1">
+                  <a:blip r:embed="rId7"/>
+                </a:blipFill>
+                <a:ln w="19050">
+                  <a:solidFill>
+                    <a:srgbClr val="7030A0"/>
+                  </a:solidFill>
+                </a:ln>
+              </p:spPr>
+              <p:style>
+                <a:lnRef idx="2">
+                  <a:schemeClr val="accent1">
+                    <a:lumMod val="75000"/>
+                  </a:schemeClr>
+                </a:lnRef>
+                <a:fillRef idx="1">
+                  <a:schemeClr val="accent1"/>
+                </a:fillRef>
+                <a:effectRef idx="0">
+                  <a:srgbClr val="FFFFFF"/>
+                </a:effectRef>
+                <a:fontRef idx="minor">
+                  <a:schemeClr val="lt1"/>
+                </a:fontRef>
+              </p:style>
+              <p:txBody>
+                <a:bodyPr/>
+                <a:lstStyle/>
+                <a:p>
+                  <a:r>
+                    <a:rPr lang="zh-CN" altLang="en-US">
+                      <a:noFill/>
+                    </a:rPr>
+                    <a:t> </a:t>
+                  </a:r>
+                </a:p>
+              </p:txBody>
+            </p:sp>
+          </mc:Fallback>
+        </mc:AlternateContent>
+        <mc:AlternateContent xmlns:mc="http://schemas.openxmlformats.org/markup-compatibility/2006">
+          <mc:Choice xmlns:a14="http://schemas.microsoft.com/office/drawing/2010/main" Requires="a14">
+            <p:sp>
+              <p:nvSpPr>
+                <p:cNvPr id="12" name="矩形 11"/>
+                <p:cNvSpPr/>
+                <p:nvPr/>
+              </p:nvSpPr>
+              <p:spPr>
+                <a:xfrm>
+                  <a:off x="12376" y="3398"/>
+                  <a:ext cx="4872" cy="2962"/>
+                </a:xfrm>
+                <a:prstGeom prst="rect">
+                  <a:avLst/>
+                </a:prstGeom>
+                <a:solidFill>
+                  <a:srgbClr val="000000">
+                    <a:alpha val="0"/>
+                  </a:srgbClr>
+                </a:solidFill>
+                <a:ln w="19050">
+                  <a:solidFill>
+                    <a:srgbClr val="7030A0"/>
+                  </a:solidFill>
+                </a:ln>
+              </p:spPr>
+              <p:style>
+                <a:lnRef idx="2">
+                  <a:schemeClr val="accent1">
+                    <a:lumMod val="75000"/>
+                  </a:schemeClr>
+                </a:lnRef>
+                <a:fillRef idx="1">
+                  <a:schemeClr val="accent1"/>
+                </a:fillRef>
+                <a:effectRef idx="0">
+                  <a:srgbClr val="FFFFFF"/>
+                </a:effectRef>
+                <a:fontRef idx="minor">
+                  <a:schemeClr val="lt1"/>
+                </a:fontRef>
+              </p:style>
+              <p:txBody>
+                <a:bodyPr rtlCol="0" anchor="ctr"/>
+                <a:p>
+                  <a:pPr algn="ctr"/>
+                  <a14:m>
+                    <m:oMathPara xmlns:m="http://schemas.openxmlformats.org/officeDocument/2006/math">
+                      <m:oMathParaPr>
+                        <m:jc m:val="centerGroup"/>
+                      </m:oMathParaPr>
+                      <m:oMath xmlns:m="http://schemas.openxmlformats.org/officeDocument/2006/math">
+                        <m:r>
+                          <a:rPr lang="en-US" altLang="zh-CN" sz="8000" b="1">
+                            <a:solidFill>
+                              <a:srgbClr val="7030A0"/>
+                            </a:solidFill>
+                            <a:latin typeface="Cambria Math" panose="02040503050406030204" charset="0"/>
+                            <a:cs typeface="Cambria Math" panose="02040503050406030204" charset="0"/>
+                          </a:rPr>
+                          <m:t>−</m:t>
+                        </m:r>
+                        <m:sSub>
+                          <m:sSubPr>
+                            <m:ctrlPr>
+                              <a:rPr lang="en-US" altLang="zh-CN" sz="8000" b="1">
+                                <a:solidFill>
+                                  <a:srgbClr val="7030A0"/>
+                                </a:solidFill>
+                                <a:latin typeface="Cambria Math" panose="02040503050406030204" charset="0"/>
+                                <a:cs typeface="Cambria Math" panose="02040503050406030204" charset="0"/>
+                              </a:rPr>
+                            </m:ctrlPr>
+                          </m:sSubPr>
+                          <m:e>
+                            <m:r>
+                              <a:rPr lang="en-US" altLang="zh-CN" sz="8000" b="1">
+                                <a:solidFill>
+                                  <a:srgbClr val="7030A0"/>
+                                </a:solidFill>
+                                <a:latin typeface="Cambria Math" panose="02040503050406030204" charset="0"/>
+                                <a:cs typeface="Cambria Math" panose="02040503050406030204" charset="0"/>
+                              </a:rPr>
+                              <m:t>𝐛</m:t>
+                            </m:r>
+                          </m:e>
+                          <m:sub>
+                            <m:r>
+                              <a:rPr lang="en-US" altLang="zh-CN" sz="8000" b="1">
+                                <a:solidFill>
+                                  <a:srgbClr val="7030A0"/>
+                                </a:solidFill>
+                                <a:latin typeface="Cambria Math" panose="02040503050406030204" charset="0"/>
+                                <a:cs typeface="Cambria Math" panose="02040503050406030204" charset="0"/>
+                              </a:rPr>
+                              <m:t>𝐔</m:t>
+                            </m:r>
+                          </m:sub>
+                        </m:sSub>
+                      </m:oMath>
+                    </m:oMathPara>
+                  </a14:m>
+                  <a:endParaRPr lang="en-US" altLang="zh-CN" sz="8000" b="1">
+                    <a:solidFill>
+                      <a:srgbClr val="7030A0"/>
+                    </a:solidFill>
+                    <a:latin typeface="Cambria Math" panose="02040503050406030204" charset="0"/>
+                    <a:cs typeface="Cambria Math" panose="02040503050406030204" charset="0"/>
+                  </a:endParaRPr>
+                </a:p>
+              </p:txBody>
+            </p:sp>
+          </mc:Choice>
+          <mc:Fallback>
+            <p:sp>
+              <p:nvSpPr>
+                <p:cNvPr id="12" name="矩形 11"/>
+                <p:cNvSpPr>
+                  <a:spLocks noRot="1" noChangeAspect="1" noMove="1" noResize="1" noEditPoints="1" noAdjustHandles="1" noChangeArrowheads="1" noChangeShapeType="1" noTextEdit="1"/>
+                </p:cNvSpPr>
+                <p:nvPr/>
+              </p:nvSpPr>
+              <p:spPr>
+                <a:xfrm>
+                  <a:off x="12376" y="3398"/>
+                  <a:ext cx="4872" cy="2962"/>
+                </a:xfrm>
+                <a:prstGeom prst="rect">
+                  <a:avLst/>
+                </a:prstGeom>
+                <a:blipFill rotWithShape="1">
+                  <a:blip r:embed="rId8"/>
+                </a:blipFill>
+                <a:ln w="19050">
+                  <a:solidFill>
+                    <a:srgbClr val="7030A0"/>
+                  </a:solidFill>
+                </a:ln>
+              </p:spPr>
+              <p:style>
+                <a:lnRef idx="2">
+                  <a:schemeClr val="accent1">
+                    <a:lumMod val="75000"/>
+                  </a:schemeClr>
+                </a:lnRef>
+                <a:fillRef idx="1">
+                  <a:schemeClr val="accent1"/>
+                </a:fillRef>
+                <a:effectRef idx="0">
+                  <a:srgbClr val="FFFFFF"/>
+                </a:effectRef>
+                <a:fontRef idx="minor">
+                  <a:schemeClr val="lt1"/>
+                </a:fontRef>
+              </p:style>
+              <p:txBody>
+                <a:bodyPr/>
+                <a:lstStyle/>
+                <a:p>
+                  <a:r>
+                    <a:rPr lang="zh-CN" altLang="en-US">
+                      <a:noFill/>
+                    </a:rPr>
+                    <a:t> </a:t>
+                  </a:r>
+                </a:p>
+              </p:txBody>
+            </p:sp>
+          </mc:Fallback>
+        </mc:AlternateContent>
+      </p:grpSp>
+    </p:spTree>
+  </p:cSld>
+  <p:clrMapOvr>
+    <a:masterClrMapping/>
+  </p:clrMapOvr>
+</p:sld>
+</file>
+
 <file path=ppt/theme/theme1.xml><?xml version="1.0" encoding="utf-8"?>
 <a:theme xmlns:a="http://schemas.openxmlformats.org/drawingml/2006/main" name="WPS">
   <a:themeElements>
